--- a/Events/2026/Data Sat - Chicago/Intro to Powershell/Intro to Powershell.pptx
+++ b/Events/2026/Data Sat - Chicago/Intro to Powershell/Intro to Powershell.pptx
@@ -5,43 +5,44 @@
     <p:sldMasterId id="2147483648" r:id="rId1"/>
   </p:sldMasterIdLst>
   <p:notesMasterIdLst>
-    <p:notesMasterId r:id="rId26"/>
+    <p:notesMasterId r:id="rId27"/>
   </p:notesMasterIdLst>
   <p:sldIdLst>
     <p:sldId id="256" r:id="rId2"/>
-    <p:sldId id="263" r:id="rId3"/>
-    <p:sldId id="264" r:id="rId4"/>
-    <p:sldId id="265" r:id="rId5"/>
-    <p:sldId id="266" r:id="rId6"/>
-    <p:sldId id="267" r:id="rId7"/>
-    <p:sldId id="268" r:id="rId8"/>
-    <p:sldId id="269" r:id="rId9"/>
-    <p:sldId id="270" r:id="rId10"/>
-    <p:sldId id="271" r:id="rId11"/>
-    <p:sldId id="272" r:id="rId12"/>
-    <p:sldId id="273" r:id="rId13"/>
-    <p:sldId id="274" r:id="rId14"/>
-    <p:sldId id="275" r:id="rId15"/>
-    <p:sldId id="276" r:id="rId16"/>
-    <p:sldId id="277" r:id="rId17"/>
-    <p:sldId id="278" r:id="rId18"/>
-    <p:sldId id="279" r:id="rId19"/>
-    <p:sldId id="280" r:id="rId20"/>
-    <p:sldId id="281" r:id="rId21"/>
-    <p:sldId id="282" r:id="rId22"/>
-    <p:sldId id="283" r:id="rId23"/>
-    <p:sldId id="284" r:id="rId24"/>
-    <p:sldId id="285" r:id="rId25"/>
+    <p:sldId id="286" r:id="rId3"/>
+    <p:sldId id="263" r:id="rId4"/>
+    <p:sldId id="264" r:id="rId5"/>
+    <p:sldId id="265" r:id="rId6"/>
+    <p:sldId id="266" r:id="rId7"/>
+    <p:sldId id="267" r:id="rId8"/>
+    <p:sldId id="268" r:id="rId9"/>
+    <p:sldId id="269" r:id="rId10"/>
+    <p:sldId id="270" r:id="rId11"/>
+    <p:sldId id="271" r:id="rId12"/>
+    <p:sldId id="272" r:id="rId13"/>
+    <p:sldId id="273" r:id="rId14"/>
+    <p:sldId id="274" r:id="rId15"/>
+    <p:sldId id="275" r:id="rId16"/>
+    <p:sldId id="276" r:id="rId17"/>
+    <p:sldId id="277" r:id="rId18"/>
+    <p:sldId id="278" r:id="rId19"/>
+    <p:sldId id="279" r:id="rId20"/>
+    <p:sldId id="280" r:id="rId21"/>
+    <p:sldId id="281" r:id="rId22"/>
+    <p:sldId id="282" r:id="rId23"/>
+    <p:sldId id="283" r:id="rId24"/>
+    <p:sldId id="284" r:id="rId25"/>
+    <p:sldId id="285" r:id="rId26"/>
   </p:sldIdLst>
   <p:sldSz cx="12192000" cy="6858000"/>
   <p:notesSz cx="6858000" cy="9144000"/>
   <p:embeddedFontLst>
     <p:embeddedFont>
       <p:font typeface="Roboto" panose="02000000000000000000" pitchFamily="2" charset="0"/>
-      <p:regular r:id="rId27"/>
-      <p:bold r:id="rId28"/>
-      <p:italic r:id="rId29"/>
-      <p:boldItalic r:id="rId30"/>
+      <p:regular r:id="rId28"/>
+      <p:bold r:id="rId29"/>
+      <p:italic r:id="rId30"/>
+      <p:boldItalic r:id="rId31"/>
     </p:embeddedFont>
   </p:embeddedFontLst>
   <p:defaultTextStyle>
@@ -291,178 +292,87 @@
 </p:cmAuthorLst>
 </file>
 
+<file path=ppt/revisionInfo.xml><?xml version="1.0" encoding="utf-8"?>
+<p1510:revInfo xmlns:a="http://schemas.openxmlformats.org/drawingml/2006/main" xmlns:r="http://schemas.openxmlformats.org/officeDocument/2006/relationships" xmlns:p1510="http://schemas.microsoft.com/office/powerpoint/2015/10/main">
+  <p1510:revLst>
+    <p1510:client id="{33B74841-FB7D-48A7-B35E-85248774B7B6}" v="1" dt="2026-03-14T03:42:20.003"/>
+  </p1510:revLst>
+</p1510:revInfo>
+</file>
+
 <file path=ppt/changesInfos/changesInfo1.xml><?xml version="1.0" encoding="utf-8"?>
 <pc:chgInfo xmlns:a="http://schemas.openxmlformats.org/drawingml/2006/main" xmlns:r="http://schemas.openxmlformats.org/officeDocument/2006/relationships" xmlns:ac="http://schemas.microsoft.com/office/drawing/2013/main/command" xmlns:pc="http://schemas.microsoft.com/office/powerpoint/2013/main/command">
   <pc:docChgLst>
     <pc:chgData name="Anthony (Tony) Wilhelm" userId="111808ec-cec1-4bb5-b99a-563afe69ab96" providerId="ADAL" clId="{72BD8168-86F3-43FC-B709-0507F7810D7D}"/>
     <pc:docChg chg="undo custSel addSld delSld modSld sldOrd delMainMaster">
-      <pc:chgData name="Anthony (Tony) Wilhelm" userId="111808ec-cec1-4bb5-b99a-563afe69ab96" providerId="ADAL" clId="{72BD8168-86F3-43FC-B709-0507F7810D7D}" dt="2025-12-02T18:21:36.700" v="127" actId="47"/>
+      <pc:chgData name="Anthony (Tony) Wilhelm" userId="111808ec-cec1-4bb5-b99a-563afe69ab96" providerId="ADAL" clId="{72BD8168-86F3-43FC-B709-0507F7810D7D}" dt="2026-03-14T03:42:20.002" v="150"/>
       <pc:docMkLst>
         <pc:docMk/>
       </pc:docMkLst>
-      <pc:sldChg chg="add del ord">
-        <pc:chgData name="Anthony (Tony) Wilhelm" userId="111808ec-cec1-4bb5-b99a-563afe69ab96" providerId="ADAL" clId="{72BD8168-86F3-43FC-B709-0507F7810D7D}" dt="2025-12-02T18:21:31.710" v="125" actId="47"/>
+      <pc:sldChg chg="modSp mod">
+        <pc:chgData name="Anthony (Tony) Wilhelm" userId="111808ec-cec1-4bb5-b99a-563afe69ab96" providerId="ADAL" clId="{72BD8168-86F3-43FC-B709-0507F7810D7D}" dt="2026-02-24T16:51:28.905" v="131" actId="20577"/>
         <pc:sldMkLst>
           <pc:docMk/>
-          <pc:sldMk cId="595715541" sldId="259"/>
+          <pc:sldMk cId="0" sldId="266"/>
         </pc:sldMkLst>
+        <pc:spChg chg="mod">
+          <ac:chgData name="Anthony (Tony) Wilhelm" userId="111808ec-cec1-4bb5-b99a-563afe69ab96" providerId="ADAL" clId="{72BD8168-86F3-43FC-B709-0507F7810D7D}" dt="2026-02-24T16:51:28.905" v="131" actId="20577"/>
+          <ac:spMkLst>
+            <pc:docMk/>
+            <pc:sldMk cId="0" sldId="266"/>
+            <ac:spMk id="176" creationId="{00000000-0000-0000-0000-000000000000}"/>
+          </ac:spMkLst>
+        </pc:spChg>
       </pc:sldChg>
-      <pc:sldChg chg="addSp delSp modSp add del mod ord setBg">
-        <pc:chgData name="Anthony (Tony) Wilhelm" userId="111808ec-cec1-4bb5-b99a-563afe69ab96" providerId="ADAL" clId="{72BD8168-86F3-43FC-B709-0507F7810D7D}" dt="2025-12-02T18:21:36.700" v="127" actId="47"/>
+      <pc:sldChg chg="modSp mod">
+        <pc:chgData name="Anthony (Tony) Wilhelm" userId="111808ec-cec1-4bb5-b99a-563afe69ab96" providerId="ADAL" clId="{72BD8168-86F3-43FC-B709-0507F7810D7D}" dt="2026-02-24T16:52:28.001" v="144" actId="400"/>
         <pc:sldMkLst>
           <pc:docMk/>
-          <pc:sldMk cId="3008247371" sldId="262"/>
+          <pc:sldMk cId="0" sldId="272"/>
         </pc:sldMkLst>
         <pc:spChg chg="mod">
-          <ac:chgData name="Anthony (Tony) Wilhelm" userId="111808ec-cec1-4bb5-b99a-563afe69ab96" providerId="ADAL" clId="{72BD8168-86F3-43FC-B709-0507F7810D7D}" dt="2025-11-12T21:07:20.115" v="121" actId="6549"/>
+          <ac:chgData name="Anthony (Tony) Wilhelm" userId="111808ec-cec1-4bb5-b99a-563afe69ab96" providerId="ADAL" clId="{72BD8168-86F3-43FC-B709-0507F7810D7D}" dt="2026-02-24T16:52:28.001" v="144" actId="400"/>
           <ac:spMkLst>
             <pc:docMk/>
-            <pc:sldMk cId="3008247371" sldId="262"/>
-            <ac:spMk id="2" creationId="{B332BAB8-B459-D356-1263-2E65A3939850}"/>
+            <pc:sldMk cId="0" sldId="272"/>
+            <ac:spMk id="262" creationId="{00000000-0000-0000-0000-000000000000}"/>
           </ac:spMkLst>
         </pc:spChg>
-        <pc:spChg chg="add mod">
-          <ac:chgData name="Anthony (Tony) Wilhelm" userId="111808ec-cec1-4bb5-b99a-563afe69ab96" providerId="ADAL" clId="{72BD8168-86F3-43FC-B709-0507F7810D7D}" dt="2025-11-12T21:06:06.785" v="53" actId="20577"/>
+      </pc:sldChg>
+      <pc:sldChg chg="addSp delSp new mod ord">
+        <pc:chgData name="Anthony (Tony) Wilhelm" userId="111808ec-cec1-4bb5-b99a-563afe69ab96" providerId="ADAL" clId="{72BD8168-86F3-43FC-B709-0507F7810D7D}" dt="2026-03-14T03:42:20.002" v="150"/>
+        <pc:sldMkLst>
+          <pc:docMk/>
+          <pc:sldMk cId="3483194011" sldId="286"/>
+        </pc:sldMkLst>
+        <pc:spChg chg="del">
+          <ac:chgData name="Anthony (Tony) Wilhelm" userId="111808ec-cec1-4bb5-b99a-563afe69ab96" providerId="ADAL" clId="{72BD8168-86F3-43FC-B709-0507F7810D7D}" dt="2026-03-14T03:40:04.520" v="149" actId="478"/>
           <ac:spMkLst>
             <pc:docMk/>
-            <pc:sldMk cId="3008247371" sldId="262"/>
-            <ac:spMk id="8" creationId="{B7BB2163-47BE-41F6-D305-CB394DE39A55}"/>
+            <pc:sldMk cId="3483194011" sldId="286"/>
+            <ac:spMk id="2" creationId="{50CB4582-32EA-EFBD-A0A7-5B3B605B247A}"/>
           </ac:spMkLst>
         </pc:spChg>
-        <pc:spChg chg="add mod">
-          <ac:chgData name="Anthony (Tony) Wilhelm" userId="111808ec-cec1-4bb5-b99a-563afe69ab96" providerId="ADAL" clId="{72BD8168-86F3-43FC-B709-0507F7810D7D}" dt="2025-11-12T21:07:05.688" v="120" actId="403"/>
+        <pc:spChg chg="del">
+          <ac:chgData name="Anthony (Tony) Wilhelm" userId="111808ec-cec1-4bb5-b99a-563afe69ab96" providerId="ADAL" clId="{72BD8168-86F3-43FC-B709-0507F7810D7D}" dt="2026-03-14T03:40:02.778" v="148" actId="478"/>
           <ac:spMkLst>
             <pc:docMk/>
-            <pc:sldMk cId="3008247371" sldId="262"/>
-            <ac:spMk id="9" creationId="{62B45668-9333-5D63-E21A-60444EA11290}"/>
+            <pc:sldMk cId="3483194011" sldId="286"/>
+            <ac:spMk id="3" creationId="{95A018D8-96C9-3317-7407-9316AF4C258D}"/>
           </ac:spMkLst>
         </pc:spChg>
-        <pc:picChg chg="mod">
-          <ac:chgData name="Anthony (Tony) Wilhelm" userId="111808ec-cec1-4bb5-b99a-563afe69ab96" providerId="ADAL" clId="{72BD8168-86F3-43FC-B709-0507F7810D7D}" dt="2025-11-12T20:58:08.343" v="39" actId="1076"/>
+        <pc:picChg chg="add">
+          <ac:chgData name="Anthony (Tony) Wilhelm" userId="111808ec-cec1-4bb5-b99a-563afe69ab96" providerId="ADAL" clId="{72BD8168-86F3-43FC-B709-0507F7810D7D}" dt="2026-03-14T03:42:20.002" v="150"/>
           <ac:picMkLst>
             <pc:docMk/>
-            <pc:sldMk cId="3008247371" sldId="262"/>
-            <ac:picMk id="6" creationId="{43CEBBD3-E7CA-5679-69D8-AE6C60BA183B}"/>
+            <pc:sldMk cId="3483194011" sldId="286"/>
+            <ac:picMk id="4" creationId="{96F2C0D5-15F9-6000-BBBD-1279B705F256}"/>
           </ac:picMkLst>
         </pc:picChg>
-        <pc:picChg chg="add mod ord">
-          <ac:chgData name="Anthony (Tony) Wilhelm" userId="111808ec-cec1-4bb5-b99a-563afe69ab96" providerId="ADAL" clId="{72BD8168-86F3-43FC-B709-0507F7810D7D}" dt="2025-11-12T21:04:36.363" v="49" actId="166"/>
-          <ac:picMkLst>
-            <pc:docMk/>
-            <pc:sldMk cId="3008247371" sldId="262"/>
-            <ac:picMk id="7" creationId="{5DF08D37-89CE-A141-F360-62932DEA847A}"/>
-          </ac:picMkLst>
-        </pc:picChg>
-      </pc:sldChg>
-      <pc:sldChg chg="add del">
-        <pc:chgData name="Anthony (Tony) Wilhelm" userId="111808ec-cec1-4bb5-b99a-563afe69ab96" providerId="ADAL" clId="{72BD8168-86F3-43FC-B709-0507F7810D7D}" dt="2025-12-02T18:21:32.459" v="126" actId="47"/>
-        <pc:sldMkLst>
-          <pc:docMk/>
-          <pc:sldMk cId="3304607967" sldId="286"/>
-        </pc:sldMkLst>
       </pc:sldChg>
     </pc:docChg>
   </pc:docChgLst>
 </pc:chgInfo>
-</file>
-
-<file path=ppt/comments/comment1.xml><?xml version="1.0" encoding="utf-8"?>
-<p:cmLst xmlns:a="http://schemas.openxmlformats.org/drawingml/2006/main" xmlns:r="http://schemas.openxmlformats.org/officeDocument/2006/relationships" xmlns:p="http://schemas.openxmlformats.org/presentationml/2006/main">
-  <p:cm authorId="0" dt="2023-04-03T13:09:29.998" idx="1">
-    <p:pos x="6000" y="0"/>
-    <p:text>Be consistent, if you are going to annotate the demos like you did on the first one, do it for all of them</p:text>
-    <p:extLst>
-      <p:ext uri="{C676402C-5697-4E1C-873F-D02D1690AC5C}">
-        <p15:threadingInfo xmlns:p15="http://schemas.microsoft.com/office/powerpoint/2012/main" timeZoneBias="0"/>
-      </p:ext>
-      <p:ext uri="http://customooxmlschemas.google.com/">
-        <go:slidesCustomData xmlns:go="http://customooxmlschemas.google.com/" xmlns:ahyp="http://schemas.microsoft.com/office/drawing/2018/hyperlinkcolor" xmlns:p15="http://schemas.microsoft.com/office/powerpoint/2012/main" xmlns:p14="http://schemas.microsoft.com/office/powerpoint/2010/main" xmlns:com="http://schemas.openxmlformats.org/drawingml/2006/compatibility" xmlns:pvml="urn:schemas-microsoft-com:office:powerpoint" xmlns:v="urn:schemas-microsoft-com:vml" xmlns:o="urn:schemas-microsoft-com:office:office" xmlns:dgm="http://schemas.openxmlformats.org/drawingml/2006/diagram" xmlns:c="http://schemas.openxmlformats.org/drawingml/2006/chart" xmlns:mv="urn:schemas-microsoft-com:mac:vml" xmlns:mc="http://schemas.openxmlformats.org/markup-compatibility/2006" xmlns="" commentPostId="AAAAsEWYE8g"/>
-      </p:ext>
-    </p:extLst>
-  </p:cm>
-  <p:cm authorId="1" dt="2023-04-03T13:09:29.998" idx="1">
-    <p:pos x="6000" y="0"/>
-    <p:text>@pshore73@outlook.com 
-Agreed, hadn't gotten that far yet</p:text>
-    <p:extLst>
-      <p:ext uri="{C676402C-5697-4E1C-873F-D02D1690AC5C}">
-        <p15:threadingInfo xmlns:p15="http://schemas.microsoft.com/office/powerpoint/2012/main" timeZoneBias="0">
-          <p15:parentCm authorId="0" idx="1"/>
-        </p15:threadingInfo>
-      </p:ext>
-      <p:ext uri="http://customooxmlschemas.google.com/">
-        <go:slidesCustomData xmlns:go="http://customooxmlschemas.google.com/" xmlns:ahyp="http://schemas.microsoft.com/office/drawing/2018/hyperlinkcolor" xmlns:p15="http://schemas.microsoft.com/office/powerpoint/2012/main" xmlns:p14="http://schemas.microsoft.com/office/powerpoint/2010/main" xmlns:com="http://schemas.openxmlformats.org/drawingml/2006/compatibility" xmlns:pvml="urn:schemas-microsoft-com:office:powerpoint" xmlns:v="urn:schemas-microsoft-com:vml" xmlns:o="urn:schemas-microsoft-com:office:office" xmlns:dgm="http://schemas.openxmlformats.org/drawingml/2006/diagram" xmlns:c="http://schemas.openxmlformats.org/drawingml/2006/chart" xmlns:mv="urn:schemas-microsoft-com:mac:vml" xmlns:mc="http://schemas.openxmlformats.org/markup-compatibility/2006" xmlns="" commentPostId="AAAAsAIqEF8"/>
-      </p:ext>
-    </p:extLst>
-  </p:cm>
-</p:cmLst>
-</file>
-
-<file path=ppt/comments/comment2.xml><?xml version="1.0" encoding="utf-8"?>
-<p:cmLst xmlns:a="http://schemas.openxmlformats.org/drawingml/2006/main" xmlns:r="http://schemas.openxmlformats.org/officeDocument/2006/relationships" xmlns:p="http://schemas.openxmlformats.org/presentationml/2006/main">
-  <p:cm authorId="0" dt="2023-04-03T13:18:56.173" idx="2">
-    <p:pos x="6000" y="0"/>
-    <p:text>Adding some details about variables is nice.
-To my eye, there is something incongruent between the two sides of the slide</p:text>
-    <p:extLst>
-      <p:ext uri="{C676402C-5697-4E1C-873F-D02D1690AC5C}">
-        <p15:threadingInfo xmlns:p15="http://schemas.microsoft.com/office/powerpoint/2012/main" timeZoneBias="0"/>
-      </p:ext>
-      <p:ext uri="http://customooxmlschemas.google.com/">
-        <go:slidesCustomData xmlns:go="http://customooxmlschemas.google.com/" xmlns:ahyp="http://schemas.microsoft.com/office/drawing/2018/hyperlinkcolor" xmlns:p15="http://schemas.microsoft.com/office/powerpoint/2012/main" xmlns:p14="http://schemas.microsoft.com/office/powerpoint/2010/main" xmlns:com="http://schemas.openxmlformats.org/drawingml/2006/compatibility" xmlns:pvml="urn:schemas-microsoft-com:office:powerpoint" xmlns:v="urn:schemas-microsoft-com:vml" xmlns:o="urn:schemas-microsoft-com:office:office" xmlns:dgm="http://schemas.openxmlformats.org/drawingml/2006/diagram" xmlns:c="http://schemas.openxmlformats.org/drawingml/2006/chart" xmlns:mv="urn:schemas-microsoft-com:mac:vml" xmlns:mc="http://schemas.openxmlformats.org/markup-compatibility/2006" xmlns="" commentPostId="AAAAsEWYE8k"/>
-      </p:ext>
-    </p:extLst>
-  </p:cm>
-  <p:cm authorId="1" dt="2023-04-03T13:18:56.173" idx="2">
-    <p:pos x="6000" y="0"/>
-    <p:text>@pshore73@outlook.com 
-Yeah, I think putting them on the demo slide will look better</p:text>
-    <p:extLst>
-      <p:ext uri="{C676402C-5697-4E1C-873F-D02D1690AC5C}">
-        <p15:threadingInfo xmlns:p15="http://schemas.microsoft.com/office/powerpoint/2012/main" timeZoneBias="0">
-          <p15:parentCm authorId="0" idx="2"/>
-        </p15:threadingInfo>
-      </p:ext>
-      <p:ext uri="http://customooxmlschemas.google.com/">
-        <go:slidesCustomData xmlns:go="http://customooxmlschemas.google.com/" xmlns:ahyp="http://schemas.microsoft.com/office/drawing/2018/hyperlinkcolor" xmlns:p15="http://schemas.microsoft.com/office/powerpoint/2012/main" xmlns:p14="http://schemas.microsoft.com/office/powerpoint/2010/main" xmlns:com="http://schemas.openxmlformats.org/drawingml/2006/compatibility" xmlns:pvml="urn:schemas-microsoft-com:office:powerpoint" xmlns:v="urn:schemas-microsoft-com:vml" xmlns:o="urn:schemas-microsoft-com:office:office" xmlns:dgm="http://schemas.openxmlformats.org/drawingml/2006/diagram" xmlns:c="http://schemas.openxmlformats.org/drawingml/2006/chart" xmlns:mv="urn:schemas-microsoft-com:mac:vml" xmlns:mc="http://schemas.openxmlformats.org/markup-compatibility/2006" xmlns="" commentPostId="AAAAsAIqEGA"/>
-      </p:ext>
-    </p:extLst>
-  </p:cm>
-</p:cmLst>
-</file>
-
-<file path=ppt/comments/comment3.xml><?xml version="1.0" encoding="utf-8"?>
-<p:cmLst xmlns:a="http://schemas.openxmlformats.org/drawingml/2006/main" xmlns:r="http://schemas.openxmlformats.org/officeDocument/2006/relationships" xmlns:p="http://schemas.openxmlformats.org/presentationml/2006/main">
-  <p:cm authorId="0" dt="2023-04-02T23:23:54.397" idx="3">
-    <p:pos x="6000" y="0"/>
-    <p:text>Font/font size consistency throughout the presentation is important, even if it means longer topics sit on multiple slides</p:text>
-    <p:extLst>
-      <p:ext uri="{C676402C-5697-4E1C-873F-D02D1690AC5C}">
-        <p15:threadingInfo xmlns:p15="http://schemas.microsoft.com/office/powerpoint/2012/main" timeZoneBias="0"/>
-      </p:ext>
-      <p:ext uri="http://customooxmlschemas.google.com/">
-        <go:slidesCustomData xmlns:go="http://customooxmlschemas.google.com/" xmlns:ahyp="http://schemas.microsoft.com/office/drawing/2018/hyperlinkcolor" xmlns:p15="http://schemas.microsoft.com/office/powerpoint/2012/main" xmlns:p14="http://schemas.microsoft.com/office/powerpoint/2010/main" xmlns:com="http://schemas.openxmlformats.org/drawingml/2006/compatibility" xmlns:pvml="urn:schemas-microsoft-com:office:powerpoint" xmlns:v="urn:schemas-microsoft-com:vml" xmlns:o="urn:schemas-microsoft-com:office:office" xmlns:dgm="http://schemas.openxmlformats.org/drawingml/2006/diagram" xmlns:c="http://schemas.openxmlformats.org/drawingml/2006/chart" xmlns:mv="urn:schemas-microsoft-com:mac:vml" xmlns:mc="http://schemas.openxmlformats.org/markup-compatibility/2006" xmlns="" commentPostId="AAAAsEWYE8o"/>
-      </p:ext>
-    </p:extLst>
-  </p:cm>
-</p:cmLst>
-</file>
-
-<file path=ppt/comments/comment4.xml><?xml version="1.0" encoding="utf-8"?>
-<p:cmLst xmlns:a="http://schemas.openxmlformats.org/drawingml/2006/main" xmlns:r="http://schemas.openxmlformats.org/officeDocument/2006/relationships" xmlns:p="http://schemas.openxmlformats.org/presentationml/2006/main">
-  <p:cm authorId="0" dt="2023-04-02T23:24:25.663" idx="4">
-    <p:pos x="6000" y="0"/>
-    <p:text>Consistency</p:text>
-    <p:extLst>
-      <p:ext uri="{C676402C-5697-4E1C-873F-D02D1690AC5C}">
-        <p15:threadingInfo xmlns:p15="http://schemas.microsoft.com/office/powerpoint/2012/main" timeZoneBias="0"/>
-      </p:ext>
-      <p:ext uri="http://customooxmlschemas.google.com/">
-        <go:slidesCustomData xmlns:go="http://customooxmlschemas.google.com/" xmlns:ahyp="http://schemas.microsoft.com/office/drawing/2018/hyperlinkcolor" xmlns:p15="http://schemas.microsoft.com/office/powerpoint/2012/main" xmlns:p14="http://schemas.microsoft.com/office/powerpoint/2010/main" xmlns:com="http://schemas.openxmlformats.org/drawingml/2006/compatibility" xmlns:pvml="urn:schemas-microsoft-com:office:powerpoint" xmlns:v="urn:schemas-microsoft-com:vml" xmlns:o="urn:schemas-microsoft-com:office:office" xmlns:dgm="http://schemas.openxmlformats.org/drawingml/2006/diagram" xmlns:c="http://schemas.openxmlformats.org/drawingml/2006/chart" xmlns:mv="urn:schemas-microsoft-com:mac:vml" xmlns:mc="http://schemas.openxmlformats.org/markup-compatibility/2006" xmlns="" commentPostId="AAAAsEWYE8s"/>
-      </p:ext>
-    </p:extLst>
-  </p:cm>
-</p:cmLst>
 </file>
 
 <file path=ppt/notesMasters/notesMaster1.xml><?xml version="1.0" encoding="utf-8"?>
@@ -2128,7 +2038,7 @@
             </a:pPr>
             <a:fld id="{00000000-1234-1234-1234-123412341234}" type="slidenum">
               <a:rPr lang="en-US"/>
-              <a:t>11</a:t>
+              <a:t>12</a:t>
             </a:fld>
             <a:endParaRPr/>
           </a:p>
@@ -2299,7 +2209,7 @@
             </a:pPr>
             <a:fld id="{00000000-1234-1234-1234-123412341234}" type="slidenum">
               <a:rPr lang="en-US"/>
-              <a:t>12</a:t>
+              <a:t>13</a:t>
             </a:fld>
             <a:endParaRPr/>
           </a:p>
@@ -2470,7 +2380,7 @@
             </a:pPr>
             <a:fld id="{00000000-1234-1234-1234-123412341234}" type="slidenum">
               <a:rPr lang="en-US"/>
-              <a:t>13</a:t>
+              <a:t>14</a:t>
             </a:fld>
             <a:endParaRPr/>
           </a:p>
@@ -2974,7 +2884,7 @@
             </a:pPr>
             <a:fld id="{00000000-1234-1234-1234-123412341234}" type="slidenum">
               <a:rPr lang="en-US"/>
-              <a:t>17</a:t>
+              <a:t>18</a:t>
             </a:fld>
             <a:endParaRPr/>
           </a:p>
@@ -3256,7 +3166,7 @@
             </a:pPr>
             <a:fld id="{00000000-1234-1234-1234-123412341234}" type="slidenum">
               <a:rPr lang="en-US"/>
-              <a:t>19</a:t>
+              <a:t>20</a:t>
             </a:fld>
             <a:endParaRPr/>
           </a:p>
@@ -3649,7 +3559,7 @@
             </a:pPr>
             <a:fld id="{00000000-1234-1234-1234-123412341234}" type="slidenum">
               <a:rPr lang="en-US"/>
-              <a:t>21</a:t>
+              <a:t>22</a:t>
             </a:fld>
             <a:endParaRPr/>
           </a:p>
@@ -3820,7 +3730,7 @@
             </a:pPr>
             <a:fld id="{00000000-1234-1234-1234-123412341234}" type="slidenum">
               <a:rPr lang="en-US"/>
-              <a:t>22</a:t>
+              <a:t>23</a:t>
             </a:fld>
             <a:endParaRPr/>
           </a:p>
@@ -3991,7 +3901,7 @@
             </a:pPr>
             <a:fld id="{00000000-1234-1234-1234-123412341234}" type="slidenum">
               <a:rPr lang="en-US"/>
-              <a:t>23</a:t>
+              <a:t>24</a:t>
             </a:fld>
             <a:endParaRPr/>
           </a:p>
@@ -4162,7 +4072,7 @@
             </a:pPr>
             <a:fld id="{00000000-1234-1234-1234-123412341234}" type="slidenum">
               <a:rPr lang="en-US"/>
-              <a:t>24</a:t>
+              <a:t>25</a:t>
             </a:fld>
             <a:endParaRPr/>
           </a:p>
@@ -4338,7 +4248,7 @@
             </a:pPr>
             <a:fld id="{00000000-1234-1234-1234-123412341234}" type="slidenum">
               <a:rPr lang="en-US"/>
-              <a:t>3</a:t>
+              <a:t>4</a:t>
             </a:fld>
             <a:endParaRPr/>
           </a:p>
@@ -4513,7 +4423,7 @@
             </a:pPr>
             <a:fld id="{00000000-1234-1234-1234-123412341234}" type="slidenum">
               <a:rPr lang="en-US"/>
-              <a:t>4</a:t>
+              <a:t>5</a:t>
             </a:fld>
             <a:endParaRPr/>
           </a:p>
@@ -4688,7 +4598,7 @@
             </a:pPr>
             <a:fld id="{00000000-1234-1234-1234-123412341234}" type="slidenum">
               <a:rPr lang="en-US"/>
-              <a:t>5</a:t>
+              <a:t>6</a:t>
             </a:fld>
             <a:endParaRPr/>
           </a:p>
@@ -4859,7 +4769,7 @@
             </a:pPr>
             <a:fld id="{00000000-1234-1234-1234-123412341234}" type="slidenum">
               <a:rPr lang="en-US"/>
-              <a:t>6</a:t>
+              <a:t>7</a:t>
             </a:fld>
             <a:endParaRPr/>
           </a:p>
@@ -5252,7 +5162,7 @@
             </a:pPr>
             <a:fld id="{00000000-1234-1234-1234-123412341234}" type="slidenum">
               <a:rPr lang="en-US"/>
-              <a:t>9</a:t>
+              <a:t>10</a:t>
             </a:fld>
             <a:endParaRPr/>
           </a:p>
@@ -15905,6 +15815,460 @@
     </p:bg>
     <p:spTree>
       <p:nvGrpSpPr>
+        <p:cNvPr id="1" name="Shape 237"/>
+        <p:cNvGrpSpPr/>
+        <p:nvPr/>
+      </p:nvGrpSpPr>
+      <p:grpSpPr>
+        <a:xfrm>
+          <a:off x="0" y="0"/>
+          <a:ext cx="0" cy="0"/>
+          <a:chOff x="0" y="0"/>
+          <a:chExt cx="0" cy="0"/>
+        </a:xfrm>
+      </p:grpSpPr>
+      <p:sp>
+        <p:nvSpPr>
+          <p:cNvPr id="238" name="Google Shape;238;p10"/>
+          <p:cNvSpPr/>
+          <p:nvPr/>
+        </p:nvSpPr>
+        <p:spPr>
+          <a:xfrm flipH="1">
+            <a:off x="-3" y="-1"/>
+            <a:ext cx="12192000" cy="1590600"/>
+          </a:xfrm>
+          <a:prstGeom prst="rect">
+            <a:avLst/>
+          </a:prstGeom>
+          <a:gradFill>
+            <a:gsLst>
+              <a:gs pos="0">
+                <a:srgbClr val="000000"/>
+              </a:gs>
+              <a:gs pos="100000">
+                <a:srgbClr val="2F5496"/>
+              </a:gs>
+            </a:gsLst>
+            <a:lin ang="8400134" scaled="0"/>
+          </a:gradFill>
+          <a:ln>
+            <a:noFill/>
+          </a:ln>
+        </p:spPr>
+        <p:txBody>
+          <a:bodyPr spcFirstLastPara="1" wrap="square" lIns="91425" tIns="45700" rIns="91425" bIns="45700" anchor="ctr" anchorCtr="0">
+            <a:noAutofit/>
+          </a:bodyPr>
+          <a:lstStyle/>
+          <a:p>
+            <a:pPr marL="0" marR="0" lvl="0" indent="0" algn="ctr" rtl="0">
+              <a:spcBef>
+                <a:spcPts val="0"/>
+              </a:spcBef>
+              <a:spcAft>
+                <a:spcPts val="0"/>
+              </a:spcAft>
+              <a:buNone/>
+            </a:pPr>
+            <a:endParaRPr sz="1800" b="0" i="0" u="none" strike="noStrike" cap="none">
+              <a:solidFill>
+                <a:schemeClr val="lt1"/>
+              </a:solidFill>
+              <a:latin typeface="Calibri"/>
+              <a:ea typeface="Calibri"/>
+              <a:cs typeface="Calibri"/>
+              <a:sym typeface="Calibri"/>
+            </a:endParaRPr>
+          </a:p>
+        </p:txBody>
+      </p:sp>
+      <p:sp>
+        <p:nvSpPr>
+          <p:cNvPr id="239" name="Google Shape;239;p10"/>
+          <p:cNvSpPr/>
+          <p:nvPr/>
+        </p:nvSpPr>
+        <p:spPr>
+          <a:xfrm rot="10800000" flipH="1">
+            <a:off x="-3" y="142"/>
+            <a:ext cx="8115300" cy="1590600"/>
+          </a:xfrm>
+          <a:prstGeom prst="rect">
+            <a:avLst/>
+          </a:prstGeom>
+          <a:gradFill>
+            <a:gsLst>
+              <a:gs pos="0">
+                <a:srgbClr val="4472C4">
+                  <a:alpha val="0"/>
+                </a:srgbClr>
+              </a:gs>
+              <a:gs pos="20000">
+                <a:srgbClr val="4472C4">
+                  <a:alpha val="0"/>
+                </a:srgbClr>
+              </a:gs>
+              <a:gs pos="100000">
+                <a:srgbClr val="1F3864">
+                  <a:alpha val="54901"/>
+                </a:srgbClr>
+              </a:gs>
+            </a:gsLst>
+            <a:lin ang="13800146" scaled="0"/>
+          </a:gradFill>
+          <a:ln>
+            <a:noFill/>
+          </a:ln>
+        </p:spPr>
+        <p:txBody>
+          <a:bodyPr spcFirstLastPara="1" wrap="square" lIns="91425" tIns="45700" rIns="91425" bIns="45700" anchor="ctr" anchorCtr="0">
+            <a:noAutofit/>
+          </a:bodyPr>
+          <a:lstStyle/>
+          <a:p>
+            <a:pPr marL="0" marR="0" lvl="0" indent="0" algn="ctr" rtl="0">
+              <a:spcBef>
+                <a:spcPts val="0"/>
+              </a:spcBef>
+              <a:spcAft>
+                <a:spcPts val="0"/>
+              </a:spcAft>
+              <a:buNone/>
+            </a:pPr>
+            <a:endParaRPr sz="1800" b="0" i="0" u="none" strike="noStrike" cap="none">
+              <a:solidFill>
+                <a:schemeClr val="lt1"/>
+              </a:solidFill>
+              <a:latin typeface="Calibri"/>
+              <a:ea typeface="Calibri"/>
+              <a:cs typeface="Calibri"/>
+              <a:sym typeface="Calibri"/>
+            </a:endParaRPr>
+          </a:p>
+        </p:txBody>
+      </p:sp>
+      <p:sp>
+        <p:nvSpPr>
+          <p:cNvPr id="240" name="Google Shape;240;p10"/>
+          <p:cNvSpPr txBox="1">
+            <a:spLocks noGrp="1"/>
+          </p:cNvSpPr>
+          <p:nvPr>
+            <p:ph type="title"/>
+          </p:nvPr>
+        </p:nvSpPr>
+        <p:spPr>
+          <a:xfrm>
+            <a:off x="1371597" y="348865"/>
+            <a:ext cx="10044000" cy="877800"/>
+          </a:xfrm>
+          <a:prstGeom prst="rect">
+            <a:avLst/>
+          </a:prstGeom>
+          <a:noFill/>
+          <a:ln>
+            <a:noFill/>
+          </a:ln>
+        </p:spPr>
+        <p:txBody>
+          <a:bodyPr spcFirstLastPara="1" wrap="square" lIns="91425" tIns="45700" rIns="91425" bIns="45700" anchor="ctr" anchorCtr="0">
+            <a:normAutofit/>
+          </a:bodyPr>
+          <a:lstStyle/>
+          <a:p>
+            <a:pPr marL="0" lvl="0" indent="0" algn="l" rtl="0">
+              <a:lnSpc>
+                <a:spcPct val="90000"/>
+              </a:lnSpc>
+              <a:spcBef>
+                <a:spcPts val="0"/>
+              </a:spcBef>
+              <a:spcAft>
+                <a:spcPts val="0"/>
+              </a:spcAft>
+              <a:buClr>
+                <a:srgbClr val="FFFFFF"/>
+              </a:buClr>
+              <a:buSzPts val="4000"/>
+              <a:buFont typeface="Calibri"/>
+              <a:buNone/>
+            </a:pPr>
+            <a:r>
+              <a:rPr lang="en-US" sz="4000">
+                <a:solidFill>
+                  <a:srgbClr val="FFFFFF"/>
+                </a:solidFill>
+                <a:latin typeface="Calibri"/>
+                <a:ea typeface="Calibri"/>
+                <a:cs typeface="Calibri"/>
+                <a:sym typeface="Calibri"/>
+              </a:rPr>
+              <a:t>Variables</a:t>
+            </a:r>
+            <a:endParaRPr/>
+          </a:p>
+        </p:txBody>
+      </p:sp>
+      <p:sp>
+        <p:nvSpPr>
+          <p:cNvPr id="241" name="Google Shape;241;p10"/>
+          <p:cNvSpPr txBox="1">
+            <a:spLocks noGrp="1"/>
+          </p:cNvSpPr>
+          <p:nvPr>
+            <p:ph type="body" idx="2"/>
+          </p:nvPr>
+        </p:nvSpPr>
+        <p:spPr>
+          <a:xfrm>
+            <a:off x="1166297" y="2112579"/>
+            <a:ext cx="4872919" cy="4089712"/>
+          </a:xfrm>
+          <a:prstGeom prst="rect">
+            <a:avLst/>
+          </a:prstGeom>
+          <a:noFill/>
+          <a:ln>
+            <a:noFill/>
+          </a:ln>
+        </p:spPr>
+        <p:txBody>
+          <a:bodyPr spcFirstLastPara="1" wrap="square" lIns="91425" tIns="45700" rIns="91425" bIns="45700" anchor="t" anchorCtr="0">
+            <a:normAutofit/>
+          </a:bodyPr>
+          <a:lstStyle/>
+          <a:p>
+            <a:pPr marL="212598" lvl="0" indent="-212343" algn="l" rtl="0">
+              <a:lnSpc>
+                <a:spcPct val="90000"/>
+              </a:lnSpc>
+              <a:spcBef>
+                <a:spcPts val="0"/>
+              </a:spcBef>
+              <a:spcAft>
+                <a:spcPts val="0"/>
+              </a:spcAft>
+              <a:buClr>
+                <a:schemeClr val="dk1"/>
+              </a:buClr>
+              <a:buSzPts val="2600"/>
+              <a:buChar char="•"/>
+            </a:pPr>
+            <a:r>
+              <a:rPr lang="en-US" sz="2600" dirty="0">
+                <a:solidFill>
+                  <a:schemeClr val="dk1"/>
+                </a:solidFill>
+                <a:latin typeface="Calibri"/>
+                <a:ea typeface="Calibri"/>
+                <a:cs typeface="Calibri"/>
+                <a:sym typeface="Calibri"/>
+              </a:rPr>
+              <a:t>Names start with a $</a:t>
+            </a:r>
+            <a:endParaRPr sz="2600" dirty="0"/>
+          </a:p>
+          <a:p>
+            <a:pPr marL="212598" lvl="0" indent="-212343" algn="l" rtl="0">
+              <a:lnSpc>
+                <a:spcPct val="90000"/>
+              </a:lnSpc>
+              <a:spcBef>
+                <a:spcPts val="930"/>
+              </a:spcBef>
+              <a:spcAft>
+                <a:spcPts val="0"/>
+              </a:spcAft>
+              <a:buClr>
+                <a:schemeClr val="dk1"/>
+              </a:buClr>
+              <a:buSzPts val="2600"/>
+              <a:buChar char="•"/>
+            </a:pPr>
+            <a:r>
+              <a:rPr lang="en-US" sz="2600" dirty="0">
+                <a:solidFill>
+                  <a:schemeClr val="dk1"/>
+                </a:solidFill>
+                <a:latin typeface="Calibri"/>
+                <a:ea typeface="Calibri"/>
+                <a:cs typeface="Calibri"/>
+                <a:sym typeface="Calibri"/>
+              </a:rPr>
+              <a:t>Names are not case sensitive</a:t>
+            </a:r>
+            <a:endParaRPr sz="2600" dirty="0"/>
+          </a:p>
+          <a:p>
+            <a:pPr marL="212598" lvl="0" indent="-212343" algn="l" rtl="0">
+              <a:lnSpc>
+                <a:spcPct val="90000"/>
+              </a:lnSpc>
+              <a:spcBef>
+                <a:spcPts val="930"/>
+              </a:spcBef>
+              <a:spcAft>
+                <a:spcPts val="0"/>
+              </a:spcAft>
+              <a:buClr>
+                <a:schemeClr val="dk1"/>
+              </a:buClr>
+              <a:buSzPts val="2600"/>
+              <a:buChar char="•"/>
+            </a:pPr>
+            <a:r>
+              <a:rPr lang="en-US" sz="2600" dirty="0">
+                <a:solidFill>
+                  <a:schemeClr val="dk1"/>
+                </a:solidFill>
+                <a:latin typeface="Calibri"/>
+                <a:ea typeface="Calibri"/>
+                <a:cs typeface="Calibri"/>
+                <a:sym typeface="Calibri"/>
+              </a:rPr>
+              <a:t>Can contain numbers and letters</a:t>
+            </a:r>
+            <a:endParaRPr sz="2600" dirty="0"/>
+          </a:p>
+          <a:p>
+            <a:pPr marL="212598" lvl="0" indent="-212343" algn="l" rtl="0">
+              <a:lnSpc>
+                <a:spcPct val="90000"/>
+              </a:lnSpc>
+              <a:spcBef>
+                <a:spcPts val="930"/>
+              </a:spcBef>
+              <a:spcAft>
+                <a:spcPts val="0"/>
+              </a:spcAft>
+              <a:buClr>
+                <a:schemeClr val="dk1"/>
+              </a:buClr>
+              <a:buSzPts val="2600"/>
+              <a:buChar char="•"/>
+            </a:pPr>
+            <a:r>
+              <a:rPr lang="en-US" sz="2600" dirty="0"/>
+              <a:t>Variables have multiple scopes:</a:t>
+            </a:r>
+            <a:endParaRPr sz="2600" dirty="0"/>
+          </a:p>
+          <a:p>
+            <a:pPr marL="669798" lvl="1" indent="-225298" algn="l" rtl="0">
+              <a:lnSpc>
+                <a:spcPct val="90000"/>
+              </a:lnSpc>
+              <a:spcBef>
+                <a:spcPts val="930"/>
+              </a:spcBef>
+              <a:spcAft>
+                <a:spcPts val="0"/>
+              </a:spcAft>
+              <a:buClr>
+                <a:schemeClr val="dk1"/>
+              </a:buClr>
+              <a:buSzPts val="2600"/>
+              <a:buChar char="•"/>
+            </a:pPr>
+            <a:r>
+              <a:rPr lang="en-US" sz="2600" dirty="0"/>
+              <a:t>Global</a:t>
+            </a:r>
+            <a:endParaRPr sz="2600" dirty="0"/>
+          </a:p>
+          <a:p>
+            <a:pPr marL="669798" lvl="1" indent="-225298" algn="l" rtl="0">
+              <a:lnSpc>
+                <a:spcPct val="90000"/>
+              </a:lnSpc>
+              <a:spcBef>
+                <a:spcPts val="930"/>
+              </a:spcBef>
+              <a:spcAft>
+                <a:spcPts val="0"/>
+              </a:spcAft>
+              <a:buClr>
+                <a:schemeClr val="dk1"/>
+              </a:buClr>
+              <a:buSzPts val="2600"/>
+              <a:buChar char="•"/>
+            </a:pPr>
+            <a:r>
+              <a:rPr lang="en-US" sz="2600" dirty="0"/>
+              <a:t>Local</a:t>
+            </a:r>
+            <a:endParaRPr sz="2600" dirty="0"/>
+          </a:p>
+          <a:p>
+            <a:pPr marL="669798" lvl="1" indent="-225298" algn="l" rtl="0">
+              <a:lnSpc>
+                <a:spcPct val="90000"/>
+              </a:lnSpc>
+              <a:spcBef>
+                <a:spcPts val="930"/>
+              </a:spcBef>
+              <a:spcAft>
+                <a:spcPts val="0"/>
+              </a:spcAft>
+              <a:buClr>
+                <a:schemeClr val="dk1"/>
+              </a:buClr>
+              <a:buSzPts val="2600"/>
+              <a:buChar char="•"/>
+            </a:pPr>
+            <a:r>
+              <a:rPr lang="en-US" sz="2600" dirty="0"/>
+              <a:t>Script</a:t>
+            </a:r>
+            <a:endParaRPr sz="2600" dirty="0"/>
+          </a:p>
+          <a:p>
+            <a:pPr marL="669798" lvl="1" indent="-225298" algn="l" rtl="0">
+              <a:lnSpc>
+                <a:spcPct val="90000"/>
+              </a:lnSpc>
+              <a:spcBef>
+                <a:spcPts val="930"/>
+              </a:spcBef>
+              <a:spcAft>
+                <a:spcPts val="0"/>
+              </a:spcAft>
+              <a:buClr>
+                <a:schemeClr val="dk1"/>
+              </a:buClr>
+              <a:buSzPts val="2600"/>
+              <a:buChar char="•"/>
+            </a:pPr>
+            <a:r>
+              <a:rPr lang="en-US" sz="2600" dirty="0"/>
+              <a:t>Private (not really a scope)</a:t>
+            </a:r>
+            <a:endParaRPr sz="2600" dirty="0"/>
+          </a:p>
+        </p:txBody>
+      </p:sp>
+    </p:spTree>
+  </p:cSld>
+  <p:clrMapOvr>
+    <a:masterClrMapping/>
+  </p:clrMapOvr>
+</p:sld>
+</file>
+
+<file path=ppt/slides/slide11.xml><?xml version="1.0" encoding="utf-8"?>
+<p:sld xmlns:a="http://schemas.openxmlformats.org/drawingml/2006/main" xmlns:r="http://schemas.openxmlformats.org/officeDocument/2006/relationships" xmlns:p="http://schemas.openxmlformats.org/presentationml/2006/main">
+  <p:cSld>
+    <p:bg>
+      <p:bgPr>
+        <a:solidFill>
+          <a:schemeClr val="lt1"/>
+        </a:solidFill>
+        <a:effectLst/>
+      </p:bgPr>
+    </p:bg>
+    <p:spTree>
+      <p:nvGrpSpPr>
         <p:cNvPr id="1" name="Shape 245"/>
         <p:cNvGrpSpPr/>
         <p:nvPr/>
@@ -16330,7 +16694,7 @@
 </p:sld>
 </file>
 
-<file path=ppt/slides/slide11.xml><?xml version="1.0" encoding="utf-8"?>
+<file path=ppt/slides/slide12.xml><?xml version="1.0" encoding="utf-8"?>
 <p:sld xmlns:a="http://schemas.openxmlformats.org/drawingml/2006/main" xmlns:r="http://schemas.openxmlformats.org/officeDocument/2006/relationships" xmlns:p="http://schemas.openxmlformats.org/presentationml/2006/main">
   <p:cSld>
     <p:bg>
@@ -16767,7 +17131,15 @@
             </a:r>
             <a:r>
               <a:rPr lang="en-US" sz="2600" dirty="0"/>
-              <a:t> 537 thousand total packages</a:t>
+              <a:t> </a:t>
+            </a:r>
+            <a:r>
+              <a:rPr lang="en-US" sz="2600" strike="sngStrike" dirty="0"/>
+              <a:t>537</a:t>
+            </a:r>
+            <a:r>
+              <a:rPr lang="en-US" sz="2600" dirty="0"/>
+              <a:t> 610 thousand total packages</a:t>
             </a:r>
             <a:endParaRPr sz="2600" dirty="0"/>
           </a:p>
@@ -16806,7 +17178,15 @@
             </a:r>
             <a:r>
               <a:rPr lang="en-US" sz="2600" dirty="0"/>
-              <a:t> 14 thousand unique packages</a:t>
+              <a:t> </a:t>
+            </a:r>
+            <a:r>
+              <a:rPr lang="en-US" sz="2600" strike="sngStrike" dirty="0"/>
+              <a:t>14</a:t>
+            </a:r>
+            <a:r>
+              <a:rPr lang="en-US" sz="2600" dirty="0"/>
+              <a:t> 15 thousand unique packages</a:t>
             </a:r>
             <a:endParaRPr sz="2600" dirty="0"/>
           </a:p>
@@ -16853,7 +17233,15 @@
             </a:r>
             <a:r>
               <a:rPr lang="en-US" sz="2600" dirty="0"/>
-              <a:t> 27 billion packages downloaded</a:t>
+              <a:t> </a:t>
+            </a:r>
+            <a:r>
+              <a:rPr lang="en-US" sz="2600" strike="sngStrike" dirty="0"/>
+              <a:t>27</a:t>
+            </a:r>
+            <a:r>
+              <a:rPr lang="en-US" sz="2600" dirty="0"/>
+              <a:t> 31 billion packages downloaded</a:t>
             </a:r>
             <a:endParaRPr sz="2600" dirty="0"/>
           </a:p>
@@ -16951,7 +17339,7 @@
 </p:sld>
 </file>
 
-<file path=ppt/slides/slide12.xml><?xml version="1.0" encoding="utf-8"?>
+<file path=ppt/slides/slide13.xml><?xml version="1.0" encoding="utf-8"?>
 <p:sld xmlns:a="http://schemas.openxmlformats.org/drawingml/2006/main" xmlns:r="http://schemas.openxmlformats.org/officeDocument/2006/relationships" xmlns:p="http://schemas.openxmlformats.org/presentationml/2006/main">
   <p:cSld>
     <p:bg>
@@ -17652,7 +18040,7 @@
 </p:sld>
 </file>
 
-<file path=ppt/slides/slide13.xml><?xml version="1.0" encoding="utf-8"?>
+<file path=ppt/slides/slide14.xml><?xml version="1.0" encoding="utf-8"?>
 <p:sld xmlns:a="http://schemas.openxmlformats.org/drawingml/2006/main" xmlns:r="http://schemas.openxmlformats.org/officeDocument/2006/relationships" xmlns:p="http://schemas.openxmlformats.org/presentationml/2006/main">
   <p:cSld>
     <p:bg>
@@ -18070,7 +18458,7 @@
 </p:sld>
 </file>
 
-<file path=ppt/slides/slide14.xml><?xml version="1.0" encoding="utf-8"?>
+<file path=ppt/slides/slide15.xml><?xml version="1.0" encoding="utf-8"?>
 <p:sld xmlns:a="http://schemas.openxmlformats.org/drawingml/2006/main" xmlns:r="http://schemas.openxmlformats.org/officeDocument/2006/relationships" xmlns:p="http://schemas.openxmlformats.org/presentationml/2006/main">
   <p:cSld>
     <p:bg>
@@ -18500,7 +18888,7 @@
 </p:sld>
 </file>
 
-<file path=ppt/slides/slide15.xml><?xml version="1.0" encoding="utf-8"?>
+<file path=ppt/slides/slide16.xml><?xml version="1.0" encoding="utf-8"?>
 <p:sld xmlns:a="http://schemas.openxmlformats.org/drawingml/2006/main" xmlns:r="http://schemas.openxmlformats.org/officeDocument/2006/relationships" xmlns:p="http://schemas.openxmlformats.org/presentationml/2006/main">
   <p:cSld>
     <p:bg>
@@ -18940,7 +19328,7 @@
 </p:sld>
 </file>
 
-<file path=ppt/slides/slide16.xml><?xml version="1.0" encoding="utf-8"?>
+<file path=ppt/slides/slide17.xml><?xml version="1.0" encoding="utf-8"?>
 <p:sld xmlns:a="http://schemas.openxmlformats.org/drawingml/2006/main" xmlns:r="http://schemas.openxmlformats.org/officeDocument/2006/relationships" xmlns:p="http://schemas.openxmlformats.org/presentationml/2006/main">
   <p:cSld>
     <p:bg>
@@ -19293,7 +19681,7 @@
 </p:sld>
 </file>
 
-<file path=ppt/slides/slide17.xml><?xml version="1.0" encoding="utf-8"?>
+<file path=ppt/slides/slide18.xml><?xml version="1.0" encoding="utf-8"?>
 <p:sld xmlns:a="http://schemas.openxmlformats.org/drawingml/2006/main" xmlns:r="http://schemas.openxmlformats.org/officeDocument/2006/relationships" xmlns:p="http://schemas.openxmlformats.org/presentationml/2006/main">
   <p:cSld>
     <p:bg>
@@ -19690,7 +20078,7 @@
 </p:sld>
 </file>
 
-<file path=ppt/slides/slide18.xml><?xml version="1.0" encoding="utf-8"?>
+<file path=ppt/slides/slide19.xml><?xml version="1.0" encoding="utf-8"?>
 <p:sld xmlns:a="http://schemas.openxmlformats.org/drawingml/2006/main" xmlns:r="http://schemas.openxmlformats.org/officeDocument/2006/relationships" xmlns:p="http://schemas.openxmlformats.org/presentationml/2006/main">
   <p:cSld>
     <p:bg>
@@ -20057,7 +20445,67 @@
 </p:sld>
 </file>
 
-<file path=ppt/slides/slide19.xml><?xml version="1.0" encoding="utf-8"?>
+<file path=ppt/slides/slide2.xml><?xml version="1.0" encoding="utf-8"?>
+<p:sld xmlns:a="http://schemas.openxmlformats.org/drawingml/2006/main" xmlns:r="http://schemas.openxmlformats.org/officeDocument/2006/relationships" xmlns:p="http://schemas.openxmlformats.org/presentationml/2006/main">
+  <p:cSld>
+    <p:spTree>
+      <p:nvGrpSpPr>
+        <p:cNvPr id="1" name=""/>
+        <p:cNvGrpSpPr/>
+        <p:nvPr/>
+      </p:nvGrpSpPr>
+      <p:grpSpPr>
+        <a:xfrm>
+          <a:off x="0" y="0"/>
+          <a:ext cx="0" cy="0"/>
+          <a:chOff x="0" y="0"/>
+          <a:chExt cx="0" cy="0"/>
+        </a:xfrm>
+      </p:grpSpPr>
+      <p:pic>
+        <p:nvPicPr>
+          <p:cNvPr id="4" name="Picture 3">
+            <a:extLst>
+              <a:ext uri="{FF2B5EF4-FFF2-40B4-BE49-F238E27FC236}">
+                <a16:creationId xmlns:a16="http://schemas.microsoft.com/office/drawing/2014/main" id="{96F2C0D5-15F9-6000-BBBD-1279B705F256}"/>
+              </a:ext>
+            </a:extLst>
+          </p:cNvPr>
+          <p:cNvPicPr>
+            <a:picLocks noChangeAspect="1"/>
+          </p:cNvPicPr>
+          <p:nvPr/>
+        </p:nvPicPr>
+        <p:blipFill>
+          <a:blip r:embed="rId2"/>
+          <a:stretch>
+            <a:fillRect/>
+          </a:stretch>
+        </p:blipFill>
+        <p:spPr>
+          <a:xfrm>
+            <a:off x="1381692" y="0"/>
+            <a:ext cx="9428615" cy="6858000"/>
+          </a:xfrm>
+          <a:prstGeom prst="rect">
+            <a:avLst/>
+          </a:prstGeom>
+        </p:spPr>
+      </p:pic>
+    </p:spTree>
+    <p:extLst>
+      <p:ext uri="{BB962C8B-B14F-4D97-AF65-F5344CB8AC3E}">
+        <p14:creationId xmlns:p14="http://schemas.microsoft.com/office/powerpoint/2010/main" val="3483194011"/>
+      </p:ext>
+    </p:extLst>
+  </p:cSld>
+  <p:clrMapOvr>
+    <a:masterClrMapping/>
+  </p:clrMapOvr>
+</p:sld>
+</file>
+
+<file path=ppt/slides/slide20.xml><?xml version="1.0" encoding="utf-8"?>
 <p:sld xmlns:a="http://schemas.openxmlformats.org/drawingml/2006/main" xmlns:r="http://schemas.openxmlformats.org/officeDocument/2006/relationships" xmlns:p="http://schemas.openxmlformats.org/presentationml/2006/main">
   <p:cSld>
     <p:bg>
@@ -20474,7 +20922,2383 @@
 </p:sld>
 </file>
 
-<file path=ppt/slides/slide2.xml><?xml version="1.0" encoding="utf-8"?>
+<file path=ppt/slides/slide21.xml><?xml version="1.0" encoding="utf-8"?>
+<p:sld xmlns:a="http://schemas.openxmlformats.org/drawingml/2006/main" xmlns:r="http://schemas.openxmlformats.org/officeDocument/2006/relationships" xmlns:p="http://schemas.openxmlformats.org/presentationml/2006/main">
+  <p:cSld>
+    <p:bg>
+      <p:bgPr>
+        <a:solidFill>
+          <a:schemeClr val="lt1"/>
+        </a:solidFill>
+        <a:effectLst/>
+      </p:bgPr>
+    </p:bg>
+    <p:spTree>
+      <p:nvGrpSpPr>
+        <p:cNvPr id="1" name="Shape 347"/>
+        <p:cNvGrpSpPr/>
+        <p:nvPr/>
+      </p:nvGrpSpPr>
+      <p:grpSpPr>
+        <a:xfrm>
+          <a:off x="0" y="0"/>
+          <a:ext cx="0" cy="0"/>
+          <a:chOff x="0" y="0"/>
+          <a:chExt cx="0" cy="0"/>
+        </a:xfrm>
+      </p:grpSpPr>
+      <p:sp>
+        <p:nvSpPr>
+          <p:cNvPr id="348" name="Google Shape;348;p16"/>
+          <p:cNvSpPr/>
+          <p:nvPr/>
+        </p:nvSpPr>
+        <p:spPr>
+          <a:xfrm>
+            <a:off x="0" y="0"/>
+            <a:ext cx="12192000" cy="6858000"/>
+          </a:xfrm>
+          <a:prstGeom prst="rect">
+            <a:avLst/>
+          </a:prstGeom>
+          <a:solidFill>
+            <a:schemeClr val="lt1"/>
+          </a:solidFill>
+          <a:ln>
+            <a:noFill/>
+          </a:ln>
+        </p:spPr>
+        <p:txBody>
+          <a:bodyPr spcFirstLastPara="1" wrap="square" lIns="91425" tIns="45700" rIns="91425" bIns="45700" anchor="ctr" anchorCtr="0">
+            <a:noAutofit/>
+          </a:bodyPr>
+          <a:lstStyle/>
+          <a:p>
+            <a:pPr marL="0" marR="0" lvl="0" indent="0" algn="ctr" rtl="0">
+              <a:spcBef>
+                <a:spcPts val="0"/>
+              </a:spcBef>
+              <a:spcAft>
+                <a:spcPts val="0"/>
+              </a:spcAft>
+              <a:buNone/>
+            </a:pPr>
+            <a:endParaRPr sz="1800" b="0" i="0" u="none" strike="noStrike" cap="none">
+              <a:solidFill>
+                <a:schemeClr val="lt1"/>
+              </a:solidFill>
+              <a:latin typeface="Calibri"/>
+              <a:ea typeface="Calibri"/>
+              <a:cs typeface="Calibri"/>
+              <a:sym typeface="Calibri"/>
+            </a:endParaRPr>
+          </a:p>
+        </p:txBody>
+      </p:sp>
+      <p:sp>
+        <p:nvSpPr>
+          <p:cNvPr id="349" name="Google Shape;349;p16"/>
+          <p:cNvSpPr/>
+          <p:nvPr/>
+        </p:nvSpPr>
+        <p:spPr>
+          <a:xfrm flipH="1">
+            <a:off x="-3" y="-1"/>
+            <a:ext cx="12192000" cy="1590600"/>
+          </a:xfrm>
+          <a:prstGeom prst="rect">
+            <a:avLst/>
+          </a:prstGeom>
+          <a:gradFill>
+            <a:gsLst>
+              <a:gs pos="0">
+                <a:srgbClr val="000000"/>
+              </a:gs>
+              <a:gs pos="100000">
+                <a:srgbClr val="2F5496"/>
+              </a:gs>
+            </a:gsLst>
+            <a:lin ang="8400134" scaled="0"/>
+          </a:gradFill>
+          <a:ln>
+            <a:noFill/>
+          </a:ln>
+        </p:spPr>
+        <p:txBody>
+          <a:bodyPr spcFirstLastPara="1" wrap="square" lIns="91425" tIns="45700" rIns="91425" bIns="45700" anchor="ctr" anchorCtr="0">
+            <a:noAutofit/>
+          </a:bodyPr>
+          <a:lstStyle/>
+          <a:p>
+            <a:pPr marL="0" marR="0" lvl="0" indent="0" algn="ctr" rtl="0">
+              <a:spcBef>
+                <a:spcPts val="0"/>
+              </a:spcBef>
+              <a:spcAft>
+                <a:spcPts val="0"/>
+              </a:spcAft>
+              <a:buNone/>
+            </a:pPr>
+            <a:endParaRPr sz="1800" b="0" i="0" u="none" strike="noStrike" cap="none">
+              <a:solidFill>
+                <a:schemeClr val="lt1"/>
+              </a:solidFill>
+              <a:latin typeface="Calibri"/>
+              <a:ea typeface="Calibri"/>
+              <a:cs typeface="Calibri"/>
+              <a:sym typeface="Calibri"/>
+            </a:endParaRPr>
+          </a:p>
+        </p:txBody>
+      </p:sp>
+      <p:sp>
+        <p:nvSpPr>
+          <p:cNvPr id="350" name="Google Shape;350;p16"/>
+          <p:cNvSpPr/>
+          <p:nvPr/>
+        </p:nvSpPr>
+        <p:spPr>
+          <a:xfrm rot="10800000" flipH="1">
+            <a:off x="-3" y="142"/>
+            <a:ext cx="8115300" cy="1590600"/>
+          </a:xfrm>
+          <a:prstGeom prst="rect">
+            <a:avLst/>
+          </a:prstGeom>
+          <a:gradFill>
+            <a:gsLst>
+              <a:gs pos="0">
+                <a:srgbClr val="4472C4">
+                  <a:alpha val="0"/>
+                </a:srgbClr>
+              </a:gs>
+              <a:gs pos="20000">
+                <a:srgbClr val="4472C4">
+                  <a:alpha val="0"/>
+                </a:srgbClr>
+              </a:gs>
+              <a:gs pos="100000">
+                <a:srgbClr val="1F3864">
+                  <a:alpha val="54901"/>
+                </a:srgbClr>
+              </a:gs>
+            </a:gsLst>
+            <a:lin ang="13800146" scaled="0"/>
+          </a:gradFill>
+          <a:ln>
+            <a:noFill/>
+          </a:ln>
+        </p:spPr>
+        <p:txBody>
+          <a:bodyPr spcFirstLastPara="1" wrap="square" lIns="91425" tIns="45700" rIns="91425" bIns="45700" anchor="ctr" anchorCtr="0">
+            <a:noAutofit/>
+          </a:bodyPr>
+          <a:lstStyle/>
+          <a:p>
+            <a:pPr marL="0" marR="0" lvl="0" indent="0" algn="ctr" rtl="0">
+              <a:spcBef>
+                <a:spcPts val="0"/>
+              </a:spcBef>
+              <a:spcAft>
+                <a:spcPts val="0"/>
+              </a:spcAft>
+              <a:buNone/>
+            </a:pPr>
+            <a:endParaRPr sz="1800" b="0" i="0" u="none" strike="noStrike" cap="none">
+              <a:solidFill>
+                <a:schemeClr val="lt1"/>
+              </a:solidFill>
+              <a:latin typeface="Calibri"/>
+              <a:ea typeface="Calibri"/>
+              <a:cs typeface="Calibri"/>
+              <a:sym typeface="Calibri"/>
+            </a:endParaRPr>
+          </a:p>
+        </p:txBody>
+      </p:sp>
+      <p:sp>
+        <p:nvSpPr>
+          <p:cNvPr id="351" name="Google Shape;351;p16"/>
+          <p:cNvSpPr txBox="1">
+            <a:spLocks noGrp="1"/>
+          </p:cNvSpPr>
+          <p:nvPr>
+            <p:ph type="title"/>
+          </p:nvPr>
+        </p:nvSpPr>
+        <p:spPr>
+          <a:xfrm>
+            <a:off x="1371600" y="347472"/>
+            <a:ext cx="10040100" cy="877800"/>
+          </a:xfrm>
+          <a:prstGeom prst="rect">
+            <a:avLst/>
+          </a:prstGeom>
+          <a:noFill/>
+          <a:ln>
+            <a:noFill/>
+          </a:ln>
+        </p:spPr>
+        <p:txBody>
+          <a:bodyPr spcFirstLastPara="1" wrap="square" lIns="91425" tIns="45700" rIns="91425" bIns="45700" anchor="ctr" anchorCtr="0">
+            <a:normAutofit/>
+          </a:bodyPr>
+          <a:lstStyle/>
+          <a:p>
+            <a:pPr marL="0" lvl="0" indent="0" algn="l" rtl="0">
+              <a:lnSpc>
+                <a:spcPct val="90000"/>
+              </a:lnSpc>
+              <a:spcBef>
+                <a:spcPts val="0"/>
+              </a:spcBef>
+              <a:spcAft>
+                <a:spcPts val="0"/>
+              </a:spcAft>
+              <a:buClr>
+                <a:srgbClr val="FFFFFF"/>
+              </a:buClr>
+              <a:buSzPts val="4000"/>
+              <a:buFont typeface="Calibri"/>
+              <a:buNone/>
+            </a:pPr>
+            <a:r>
+              <a:rPr lang="en-US" sz="4000">
+                <a:solidFill>
+                  <a:srgbClr val="FFFFFF"/>
+                </a:solidFill>
+                <a:latin typeface="Calibri"/>
+                <a:ea typeface="Calibri"/>
+                <a:cs typeface="Calibri"/>
+                <a:sym typeface="Calibri"/>
+              </a:rPr>
+              <a:t>Demo - Formatting Output</a:t>
+            </a:r>
+            <a:endParaRPr/>
+          </a:p>
+        </p:txBody>
+      </p:sp>
+      <p:pic>
+        <p:nvPicPr>
+          <p:cNvPr id="352" name="Google Shape;352;p16" descr="Monitor"/>
+          <p:cNvPicPr preferRelativeResize="0"/>
+          <p:nvPr/>
+        </p:nvPicPr>
+        <p:blipFill rotWithShape="1">
+          <a:blip r:embed="rId3">
+            <a:alphaModFix/>
+          </a:blip>
+          <a:srcRect/>
+          <a:stretch/>
+        </p:blipFill>
+        <p:spPr>
+          <a:xfrm>
+            <a:off x="704088" y="1966293"/>
+            <a:ext cx="4452160" cy="4452160"/>
+          </a:xfrm>
+          <a:prstGeom prst="rect">
+            <a:avLst/>
+          </a:prstGeom>
+          <a:noFill/>
+          <a:ln>
+            <a:noFill/>
+          </a:ln>
+        </p:spPr>
+      </p:pic>
+      <p:sp>
+        <p:nvSpPr>
+          <p:cNvPr id="353" name="Google Shape;353;p16"/>
+          <p:cNvSpPr txBox="1">
+            <a:spLocks noGrp="1"/>
+          </p:cNvSpPr>
+          <p:nvPr>
+            <p:ph type="body" idx="2"/>
+          </p:nvPr>
+        </p:nvSpPr>
+        <p:spPr>
+          <a:xfrm>
+            <a:off x="6172200" y="1825625"/>
+            <a:ext cx="5181600" cy="4351200"/>
+          </a:xfrm>
+          <a:prstGeom prst="rect">
+            <a:avLst/>
+          </a:prstGeom>
+        </p:spPr>
+        <p:txBody>
+          <a:bodyPr spcFirstLastPara="1" wrap="square" lIns="91425" tIns="45700" rIns="91425" bIns="45700" anchor="t" anchorCtr="0">
+            <a:normAutofit/>
+          </a:bodyPr>
+          <a:lstStyle/>
+          <a:p>
+            <a:pPr marL="0" lvl="0" indent="0" algn="l" rtl="0">
+              <a:spcBef>
+                <a:spcPts val="1000"/>
+              </a:spcBef>
+              <a:spcAft>
+                <a:spcPts val="0"/>
+              </a:spcAft>
+              <a:buNone/>
+            </a:pPr>
+            <a:r>
+              <a:rPr lang="en-US"/>
+              <a:t>Ways to format the object:</a:t>
+            </a:r>
+            <a:endParaRPr/>
+          </a:p>
+          <a:p>
+            <a:pPr marL="457200" lvl="0" indent="-342900" algn="l" rtl="0">
+              <a:spcBef>
+                <a:spcPts val="1000"/>
+              </a:spcBef>
+              <a:spcAft>
+                <a:spcPts val="0"/>
+              </a:spcAft>
+              <a:buSzPts val="1800"/>
+              <a:buChar char="●"/>
+            </a:pPr>
+            <a:r>
+              <a:rPr lang="en-US"/>
+              <a:t>Sort-Object</a:t>
+            </a:r>
+            <a:endParaRPr/>
+          </a:p>
+          <a:p>
+            <a:pPr marL="457200" lvl="0" indent="-342900" algn="l" rtl="0">
+              <a:spcBef>
+                <a:spcPts val="0"/>
+              </a:spcBef>
+              <a:spcAft>
+                <a:spcPts val="0"/>
+              </a:spcAft>
+              <a:buSzPts val="1800"/>
+              <a:buChar char="●"/>
+            </a:pPr>
+            <a:r>
+              <a:rPr lang="en-US"/>
+              <a:t>Format-List</a:t>
+            </a:r>
+            <a:endParaRPr/>
+          </a:p>
+          <a:p>
+            <a:pPr marL="457200" lvl="0" indent="-342900" algn="l" rtl="0">
+              <a:spcBef>
+                <a:spcPts val="0"/>
+              </a:spcBef>
+              <a:spcAft>
+                <a:spcPts val="0"/>
+              </a:spcAft>
+              <a:buSzPts val="1800"/>
+              <a:buChar char="●"/>
+            </a:pPr>
+            <a:r>
+              <a:rPr lang="en-US"/>
+              <a:t>Format-Table</a:t>
+            </a:r>
+            <a:endParaRPr/>
+          </a:p>
+          <a:p>
+            <a:pPr marL="457200" lvl="0" indent="-342900" algn="l" rtl="0">
+              <a:spcBef>
+                <a:spcPts val="0"/>
+              </a:spcBef>
+              <a:spcAft>
+                <a:spcPts val="0"/>
+              </a:spcAft>
+              <a:buSzPts val="1800"/>
+              <a:buChar char="●"/>
+            </a:pPr>
+            <a:r>
+              <a:rPr lang="en-US"/>
+              <a:t>Out-Gridview</a:t>
+            </a:r>
+            <a:endParaRPr/>
+          </a:p>
+          <a:p>
+            <a:pPr marL="457200" lvl="0" indent="-342900" algn="l" rtl="0">
+              <a:spcBef>
+                <a:spcPts val="0"/>
+              </a:spcBef>
+              <a:spcAft>
+                <a:spcPts val="0"/>
+              </a:spcAft>
+              <a:buSzPts val="1800"/>
+              <a:buChar char="●"/>
+            </a:pPr>
+            <a:r>
+              <a:rPr lang="en-US"/>
+              <a:t>Write-Out</a:t>
+            </a:r>
+            <a:endParaRPr/>
+          </a:p>
+          <a:p>
+            <a:pPr marL="457200" lvl="0" indent="-342900" algn="l" rtl="0">
+              <a:spcBef>
+                <a:spcPts val="0"/>
+              </a:spcBef>
+              <a:spcAft>
+                <a:spcPts val="0"/>
+              </a:spcAft>
+              <a:buSzPts val="1800"/>
+              <a:buChar char="●"/>
+            </a:pPr>
+            <a:r>
+              <a:rPr lang="en-US"/>
+              <a:t>Write-Verbose</a:t>
+            </a:r>
+            <a:endParaRPr/>
+          </a:p>
+        </p:txBody>
+      </p:sp>
+    </p:spTree>
+  </p:cSld>
+  <p:clrMapOvr>
+    <a:masterClrMapping/>
+  </p:clrMapOvr>
+</p:sld>
+</file>
+
+<file path=ppt/slides/slide22.xml><?xml version="1.0" encoding="utf-8"?>
+<p:sld xmlns:a="http://schemas.openxmlformats.org/drawingml/2006/main" xmlns:r="http://schemas.openxmlformats.org/officeDocument/2006/relationships" xmlns:p="http://schemas.openxmlformats.org/presentationml/2006/main">
+  <p:cSld>
+    <p:bg>
+      <p:bgPr>
+        <a:solidFill>
+          <a:schemeClr val="lt1"/>
+        </a:solidFill>
+        <a:effectLst/>
+      </p:bgPr>
+    </p:bg>
+    <p:spTree>
+      <p:nvGrpSpPr>
+        <p:cNvPr id="1" name="Shape 358"/>
+        <p:cNvGrpSpPr/>
+        <p:nvPr/>
+      </p:nvGrpSpPr>
+      <p:grpSpPr>
+        <a:xfrm>
+          <a:off x="0" y="0"/>
+          <a:ext cx="0" cy="0"/>
+          <a:chOff x="0" y="0"/>
+          <a:chExt cx="0" cy="0"/>
+        </a:xfrm>
+      </p:grpSpPr>
+      <p:sp>
+        <p:nvSpPr>
+          <p:cNvPr id="359" name="Google Shape;359;g212d64ab2ef_1_23"/>
+          <p:cNvSpPr/>
+          <p:nvPr/>
+        </p:nvSpPr>
+        <p:spPr>
+          <a:xfrm>
+            <a:off x="0" y="0"/>
+            <a:ext cx="12192000" cy="6858000"/>
+          </a:xfrm>
+          <a:prstGeom prst="rect">
+            <a:avLst/>
+          </a:prstGeom>
+          <a:solidFill>
+            <a:schemeClr val="lt1"/>
+          </a:solidFill>
+          <a:ln>
+            <a:noFill/>
+          </a:ln>
+        </p:spPr>
+        <p:txBody>
+          <a:bodyPr spcFirstLastPara="1" wrap="square" lIns="91425" tIns="45700" rIns="91425" bIns="45700" anchor="ctr" anchorCtr="0">
+            <a:noAutofit/>
+          </a:bodyPr>
+          <a:lstStyle/>
+          <a:p>
+            <a:pPr marL="0" marR="0" lvl="0" indent="0" algn="ctr" rtl="0">
+              <a:spcBef>
+                <a:spcPts val="0"/>
+              </a:spcBef>
+              <a:spcAft>
+                <a:spcPts val="0"/>
+              </a:spcAft>
+              <a:buNone/>
+            </a:pPr>
+            <a:endParaRPr sz="1800" b="0" i="0" u="none" strike="noStrike" cap="none">
+              <a:solidFill>
+                <a:schemeClr val="lt1"/>
+              </a:solidFill>
+              <a:latin typeface="Calibri"/>
+              <a:ea typeface="Calibri"/>
+              <a:cs typeface="Calibri"/>
+              <a:sym typeface="Calibri"/>
+            </a:endParaRPr>
+          </a:p>
+        </p:txBody>
+      </p:sp>
+      <p:sp>
+        <p:nvSpPr>
+          <p:cNvPr id="360" name="Google Shape;360;g212d64ab2ef_1_23"/>
+          <p:cNvSpPr/>
+          <p:nvPr/>
+        </p:nvSpPr>
+        <p:spPr>
+          <a:xfrm flipH="1">
+            <a:off x="-3" y="-1"/>
+            <a:ext cx="12192000" cy="1590600"/>
+          </a:xfrm>
+          <a:prstGeom prst="rect">
+            <a:avLst/>
+          </a:prstGeom>
+          <a:gradFill>
+            <a:gsLst>
+              <a:gs pos="0">
+                <a:srgbClr val="000000"/>
+              </a:gs>
+              <a:gs pos="100000">
+                <a:srgbClr val="2F5496"/>
+              </a:gs>
+            </a:gsLst>
+            <a:lin ang="8400134" scaled="0"/>
+          </a:gradFill>
+          <a:ln>
+            <a:noFill/>
+          </a:ln>
+        </p:spPr>
+        <p:txBody>
+          <a:bodyPr spcFirstLastPara="1" wrap="square" lIns="91425" tIns="45700" rIns="91425" bIns="45700" anchor="ctr" anchorCtr="0">
+            <a:noAutofit/>
+          </a:bodyPr>
+          <a:lstStyle/>
+          <a:p>
+            <a:pPr marL="0" marR="0" lvl="0" indent="0" algn="ctr" rtl="0">
+              <a:spcBef>
+                <a:spcPts val="0"/>
+              </a:spcBef>
+              <a:spcAft>
+                <a:spcPts val="0"/>
+              </a:spcAft>
+              <a:buNone/>
+            </a:pPr>
+            <a:endParaRPr sz="1800" b="0" i="0" u="none" strike="noStrike" cap="none">
+              <a:solidFill>
+                <a:schemeClr val="lt1"/>
+              </a:solidFill>
+              <a:latin typeface="Calibri"/>
+              <a:ea typeface="Calibri"/>
+              <a:cs typeface="Calibri"/>
+              <a:sym typeface="Calibri"/>
+            </a:endParaRPr>
+          </a:p>
+        </p:txBody>
+      </p:sp>
+      <p:sp>
+        <p:nvSpPr>
+          <p:cNvPr id="361" name="Google Shape;361;g212d64ab2ef_1_23"/>
+          <p:cNvSpPr/>
+          <p:nvPr/>
+        </p:nvSpPr>
+        <p:spPr>
+          <a:xfrm rot="10800000" flipH="1">
+            <a:off x="-3" y="142"/>
+            <a:ext cx="8115300" cy="1590600"/>
+          </a:xfrm>
+          <a:prstGeom prst="rect">
+            <a:avLst/>
+          </a:prstGeom>
+          <a:gradFill>
+            <a:gsLst>
+              <a:gs pos="0">
+                <a:srgbClr val="4472C4">
+                  <a:alpha val="0"/>
+                </a:srgbClr>
+              </a:gs>
+              <a:gs pos="20000">
+                <a:srgbClr val="4472C4">
+                  <a:alpha val="0"/>
+                </a:srgbClr>
+              </a:gs>
+              <a:gs pos="100000">
+                <a:srgbClr val="1F3864">
+                  <a:alpha val="54901"/>
+                </a:srgbClr>
+              </a:gs>
+            </a:gsLst>
+            <a:lin ang="13800146" scaled="0"/>
+          </a:gradFill>
+          <a:ln>
+            <a:noFill/>
+          </a:ln>
+        </p:spPr>
+        <p:txBody>
+          <a:bodyPr spcFirstLastPara="1" wrap="square" lIns="91425" tIns="45700" rIns="91425" bIns="45700" anchor="ctr" anchorCtr="0">
+            <a:noAutofit/>
+          </a:bodyPr>
+          <a:lstStyle/>
+          <a:p>
+            <a:pPr marL="0" marR="0" lvl="0" indent="0" algn="ctr" rtl="0">
+              <a:spcBef>
+                <a:spcPts val="0"/>
+              </a:spcBef>
+              <a:spcAft>
+                <a:spcPts val="0"/>
+              </a:spcAft>
+              <a:buNone/>
+            </a:pPr>
+            <a:endParaRPr sz="1800" b="0" i="0" u="none" strike="noStrike" cap="none">
+              <a:solidFill>
+                <a:schemeClr val="lt1"/>
+              </a:solidFill>
+              <a:latin typeface="Calibri"/>
+              <a:ea typeface="Calibri"/>
+              <a:cs typeface="Calibri"/>
+              <a:sym typeface="Calibri"/>
+            </a:endParaRPr>
+          </a:p>
+        </p:txBody>
+      </p:sp>
+      <p:sp>
+        <p:nvSpPr>
+          <p:cNvPr id="362" name="Google Shape;362;g212d64ab2ef_1_23"/>
+          <p:cNvSpPr txBox="1">
+            <a:spLocks noGrp="1"/>
+          </p:cNvSpPr>
+          <p:nvPr>
+            <p:ph type="title"/>
+          </p:nvPr>
+        </p:nvSpPr>
+        <p:spPr>
+          <a:xfrm>
+            <a:off x="1371599" y="294538"/>
+            <a:ext cx="9896100" cy="1033800"/>
+          </a:xfrm>
+          <a:prstGeom prst="rect">
+            <a:avLst/>
+          </a:prstGeom>
+          <a:noFill/>
+          <a:ln>
+            <a:noFill/>
+          </a:ln>
+        </p:spPr>
+        <p:txBody>
+          <a:bodyPr spcFirstLastPara="1" wrap="square" lIns="91425" tIns="45700" rIns="91425" bIns="45700" anchor="ctr" anchorCtr="0">
+            <a:normAutofit/>
+          </a:bodyPr>
+          <a:lstStyle/>
+          <a:p>
+            <a:pPr marL="0" lvl="0" indent="0" algn="l" rtl="0">
+              <a:lnSpc>
+                <a:spcPct val="90000"/>
+              </a:lnSpc>
+              <a:spcBef>
+                <a:spcPts val="0"/>
+              </a:spcBef>
+              <a:spcAft>
+                <a:spcPts val="0"/>
+              </a:spcAft>
+              <a:buClr>
+                <a:srgbClr val="FFFFFF"/>
+              </a:buClr>
+              <a:buSzPts val="4000"/>
+              <a:buFont typeface="Calibri"/>
+              <a:buNone/>
+            </a:pPr>
+            <a:r>
+              <a:rPr lang="en-US" sz="4000">
+                <a:solidFill>
+                  <a:srgbClr val="FFFFFF"/>
+                </a:solidFill>
+              </a:rPr>
+              <a:t>Looping</a:t>
+            </a:r>
+            <a:endParaRPr/>
+          </a:p>
+        </p:txBody>
+      </p:sp>
+      <p:sp>
+        <p:nvSpPr>
+          <p:cNvPr id="363" name="Google Shape;363;g212d64ab2ef_1_23"/>
+          <p:cNvSpPr txBox="1">
+            <a:spLocks noGrp="1"/>
+          </p:cNvSpPr>
+          <p:nvPr>
+            <p:ph type="body" idx="1"/>
+          </p:nvPr>
+        </p:nvSpPr>
+        <p:spPr>
+          <a:xfrm>
+            <a:off x="1371599" y="2318197"/>
+            <a:ext cx="9723900" cy="3683400"/>
+          </a:xfrm>
+          <a:prstGeom prst="rect">
+            <a:avLst/>
+          </a:prstGeom>
+          <a:noFill/>
+          <a:ln>
+            <a:noFill/>
+          </a:ln>
+        </p:spPr>
+        <p:txBody>
+          <a:bodyPr spcFirstLastPara="1" wrap="square" lIns="91425" tIns="45700" rIns="91425" bIns="45700" anchor="ctr" anchorCtr="0">
+            <a:normAutofit/>
+          </a:bodyPr>
+          <a:lstStyle/>
+          <a:p>
+            <a:pPr marL="228600" lvl="0" indent="-101600" algn="l" rtl="0">
+              <a:lnSpc>
+                <a:spcPct val="90000"/>
+              </a:lnSpc>
+              <a:spcBef>
+                <a:spcPts val="0"/>
+              </a:spcBef>
+              <a:spcAft>
+                <a:spcPts val="0"/>
+              </a:spcAft>
+              <a:buClr>
+                <a:schemeClr val="dk1"/>
+              </a:buClr>
+              <a:buSzPts val="2000"/>
+              <a:buNone/>
+            </a:pPr>
+            <a:r>
+              <a:rPr lang="en-US" sz="2000" dirty="0"/>
+              <a:t>Just like most programming languages, you can write loops in PowerShell.</a:t>
+            </a:r>
+            <a:endParaRPr sz="2000" dirty="0"/>
+          </a:p>
+          <a:p>
+            <a:pPr marL="228600" lvl="0" indent="-101600" algn="l" rtl="0">
+              <a:lnSpc>
+                <a:spcPct val="90000"/>
+              </a:lnSpc>
+              <a:spcBef>
+                <a:spcPts val="0"/>
+              </a:spcBef>
+              <a:spcAft>
+                <a:spcPts val="0"/>
+              </a:spcAft>
+              <a:buClr>
+                <a:schemeClr val="dk1"/>
+              </a:buClr>
+              <a:buSzPts val="2000"/>
+              <a:buNone/>
+            </a:pPr>
+            <a:r>
+              <a:rPr lang="en-US" sz="2000" dirty="0"/>
+              <a:t>There’s 4 basic types of loops </a:t>
+            </a:r>
+            <a:endParaRPr sz="2000" dirty="0"/>
+          </a:p>
+          <a:p>
+            <a:pPr marL="457200" lvl="0" indent="-355600" algn="l" rtl="0">
+              <a:lnSpc>
+                <a:spcPct val="90000"/>
+              </a:lnSpc>
+              <a:spcBef>
+                <a:spcPts val="0"/>
+              </a:spcBef>
+              <a:spcAft>
+                <a:spcPts val="0"/>
+              </a:spcAft>
+              <a:buSzPts val="2000"/>
+              <a:buChar char="●"/>
+            </a:pPr>
+            <a:r>
+              <a:rPr lang="en-US" sz="2000" dirty="0"/>
+              <a:t>For - for looping with a built-in counter</a:t>
+            </a:r>
+            <a:endParaRPr sz="2000" dirty="0"/>
+          </a:p>
+          <a:p>
+            <a:pPr marL="457200" lvl="0" indent="-355600" algn="l" rtl="0">
+              <a:lnSpc>
+                <a:spcPct val="90000"/>
+              </a:lnSpc>
+              <a:spcBef>
+                <a:spcPts val="0"/>
+              </a:spcBef>
+              <a:spcAft>
+                <a:spcPts val="0"/>
+              </a:spcAft>
+              <a:buSzPts val="2000"/>
+              <a:buChar char="●"/>
+            </a:pPr>
+            <a:r>
+              <a:rPr lang="en-US" sz="2000" dirty="0"/>
+              <a:t>Foreach (x in y) - for looping through a collection or array</a:t>
+            </a:r>
+            <a:endParaRPr sz="2000" dirty="0"/>
+          </a:p>
+          <a:p>
+            <a:pPr marL="457200" lvl="0" indent="-355600" algn="l" rtl="0">
+              <a:lnSpc>
+                <a:spcPct val="90000"/>
+              </a:lnSpc>
+              <a:spcBef>
+                <a:spcPts val="0"/>
+              </a:spcBef>
+              <a:spcAft>
+                <a:spcPts val="0"/>
+              </a:spcAft>
+              <a:buSzPts val="2000"/>
+              <a:buChar char="●"/>
+            </a:pPr>
+            <a:r>
+              <a:rPr lang="en-US" sz="2000" dirty="0"/>
+              <a:t>Do &amp; While - Repeats until a condition is true.</a:t>
+            </a:r>
+            <a:endParaRPr sz="2000" dirty="0"/>
+          </a:p>
+          <a:p>
+            <a:pPr marL="228600" lvl="0" indent="-101600" algn="l" rtl="0">
+              <a:lnSpc>
+                <a:spcPct val="90000"/>
+              </a:lnSpc>
+              <a:spcBef>
+                <a:spcPts val="0"/>
+              </a:spcBef>
+              <a:spcAft>
+                <a:spcPts val="0"/>
+              </a:spcAft>
+              <a:buClr>
+                <a:schemeClr val="dk1"/>
+              </a:buClr>
+              <a:buSzPts val="2000"/>
+              <a:buNone/>
+            </a:pPr>
+            <a:endParaRPr sz="2000" dirty="0"/>
+          </a:p>
+          <a:p>
+            <a:pPr marL="228600" lvl="0" indent="-101600" algn="l" rtl="0">
+              <a:lnSpc>
+                <a:spcPct val="90000"/>
+              </a:lnSpc>
+              <a:spcBef>
+                <a:spcPts val="0"/>
+              </a:spcBef>
+              <a:spcAft>
+                <a:spcPts val="0"/>
+              </a:spcAft>
+              <a:buClr>
+                <a:schemeClr val="dk1"/>
+              </a:buClr>
+              <a:buSzPts val="2000"/>
+              <a:buNone/>
+            </a:pPr>
+            <a:r>
+              <a:rPr lang="en-US" sz="2000" dirty="0"/>
+              <a:t>And </a:t>
+            </a:r>
+            <a:r>
+              <a:rPr lang="en-US" sz="2000" dirty="0" err="1"/>
+              <a:t>and</a:t>
+            </a:r>
+            <a:r>
+              <a:rPr lang="en-US" sz="2000" dirty="0"/>
+              <a:t> one that you can use with pipelines:</a:t>
+            </a:r>
+            <a:endParaRPr sz="2000" dirty="0"/>
+          </a:p>
+          <a:p>
+            <a:pPr marL="457200" lvl="0" indent="-355600" algn="l" rtl="0">
+              <a:lnSpc>
+                <a:spcPct val="90000"/>
+              </a:lnSpc>
+              <a:spcBef>
+                <a:spcPts val="0"/>
+              </a:spcBef>
+              <a:spcAft>
+                <a:spcPts val="0"/>
+              </a:spcAft>
+              <a:buSzPts val="2000"/>
+              <a:buChar char="●"/>
+            </a:pPr>
+            <a:r>
+              <a:rPr lang="en-US" sz="2000" dirty="0"/>
+              <a:t>Foreach-Object</a:t>
+            </a:r>
+            <a:endParaRPr sz="2000" dirty="0"/>
+          </a:p>
+        </p:txBody>
+      </p:sp>
+    </p:spTree>
+  </p:cSld>
+  <p:clrMapOvr>
+    <a:masterClrMapping/>
+  </p:clrMapOvr>
+</p:sld>
+</file>
+
+<file path=ppt/slides/slide23.xml><?xml version="1.0" encoding="utf-8"?>
+<p:sld xmlns:a="http://schemas.openxmlformats.org/drawingml/2006/main" xmlns:r="http://schemas.openxmlformats.org/officeDocument/2006/relationships" xmlns:p="http://schemas.openxmlformats.org/presentationml/2006/main">
+  <p:cSld>
+    <p:bg>
+      <p:bgPr>
+        <a:solidFill>
+          <a:schemeClr val="lt1"/>
+        </a:solidFill>
+        <a:effectLst/>
+      </p:bgPr>
+    </p:bg>
+    <p:spTree>
+      <p:nvGrpSpPr>
+        <p:cNvPr id="1" name="Shape 368"/>
+        <p:cNvGrpSpPr/>
+        <p:nvPr/>
+      </p:nvGrpSpPr>
+      <p:grpSpPr>
+        <a:xfrm>
+          <a:off x="0" y="0"/>
+          <a:ext cx="0" cy="0"/>
+          <a:chOff x="0" y="0"/>
+          <a:chExt cx="0" cy="0"/>
+        </a:xfrm>
+      </p:grpSpPr>
+      <p:sp>
+        <p:nvSpPr>
+          <p:cNvPr id="369" name="Google Shape;369;p18"/>
+          <p:cNvSpPr/>
+          <p:nvPr/>
+        </p:nvSpPr>
+        <p:spPr>
+          <a:xfrm>
+            <a:off x="0" y="0"/>
+            <a:ext cx="12192000" cy="6858000"/>
+          </a:xfrm>
+          <a:prstGeom prst="rect">
+            <a:avLst/>
+          </a:prstGeom>
+          <a:solidFill>
+            <a:schemeClr val="lt1"/>
+          </a:solidFill>
+          <a:ln>
+            <a:noFill/>
+          </a:ln>
+        </p:spPr>
+        <p:txBody>
+          <a:bodyPr spcFirstLastPara="1" wrap="square" lIns="91425" tIns="45700" rIns="91425" bIns="45700" anchor="ctr" anchorCtr="0">
+            <a:noAutofit/>
+          </a:bodyPr>
+          <a:lstStyle/>
+          <a:p>
+            <a:pPr marL="0" marR="0" lvl="0" indent="0" algn="ctr" rtl="0">
+              <a:spcBef>
+                <a:spcPts val="0"/>
+              </a:spcBef>
+              <a:spcAft>
+                <a:spcPts val="0"/>
+              </a:spcAft>
+              <a:buNone/>
+            </a:pPr>
+            <a:endParaRPr sz="1800" b="0" i="0" u="none" strike="noStrike" cap="none">
+              <a:solidFill>
+                <a:schemeClr val="lt1"/>
+              </a:solidFill>
+              <a:latin typeface="Calibri"/>
+              <a:ea typeface="Calibri"/>
+              <a:cs typeface="Calibri"/>
+              <a:sym typeface="Calibri"/>
+            </a:endParaRPr>
+          </a:p>
+        </p:txBody>
+      </p:sp>
+      <p:sp>
+        <p:nvSpPr>
+          <p:cNvPr id="370" name="Google Shape;370;p18"/>
+          <p:cNvSpPr/>
+          <p:nvPr/>
+        </p:nvSpPr>
+        <p:spPr>
+          <a:xfrm flipH="1">
+            <a:off x="-3" y="-1"/>
+            <a:ext cx="12192000" cy="1590600"/>
+          </a:xfrm>
+          <a:prstGeom prst="rect">
+            <a:avLst/>
+          </a:prstGeom>
+          <a:gradFill>
+            <a:gsLst>
+              <a:gs pos="0">
+                <a:srgbClr val="000000"/>
+              </a:gs>
+              <a:gs pos="100000">
+                <a:srgbClr val="2F5496"/>
+              </a:gs>
+            </a:gsLst>
+            <a:lin ang="8400134" scaled="0"/>
+          </a:gradFill>
+          <a:ln>
+            <a:noFill/>
+          </a:ln>
+        </p:spPr>
+        <p:txBody>
+          <a:bodyPr spcFirstLastPara="1" wrap="square" lIns="91425" tIns="45700" rIns="91425" bIns="45700" anchor="ctr" anchorCtr="0">
+            <a:noAutofit/>
+          </a:bodyPr>
+          <a:lstStyle/>
+          <a:p>
+            <a:pPr marL="0" marR="0" lvl="0" indent="0" algn="ctr" rtl="0">
+              <a:spcBef>
+                <a:spcPts val="0"/>
+              </a:spcBef>
+              <a:spcAft>
+                <a:spcPts val="0"/>
+              </a:spcAft>
+              <a:buNone/>
+            </a:pPr>
+            <a:endParaRPr sz="1800" b="0" i="0" u="none" strike="noStrike" cap="none">
+              <a:solidFill>
+                <a:schemeClr val="lt1"/>
+              </a:solidFill>
+              <a:latin typeface="Calibri"/>
+              <a:ea typeface="Calibri"/>
+              <a:cs typeface="Calibri"/>
+              <a:sym typeface="Calibri"/>
+            </a:endParaRPr>
+          </a:p>
+        </p:txBody>
+      </p:sp>
+      <p:sp>
+        <p:nvSpPr>
+          <p:cNvPr id="371" name="Google Shape;371;p18"/>
+          <p:cNvSpPr/>
+          <p:nvPr/>
+        </p:nvSpPr>
+        <p:spPr>
+          <a:xfrm rot="10800000" flipH="1">
+            <a:off x="-3" y="142"/>
+            <a:ext cx="8115300" cy="1590600"/>
+          </a:xfrm>
+          <a:prstGeom prst="rect">
+            <a:avLst/>
+          </a:prstGeom>
+          <a:gradFill>
+            <a:gsLst>
+              <a:gs pos="0">
+                <a:srgbClr val="4472C4">
+                  <a:alpha val="0"/>
+                </a:srgbClr>
+              </a:gs>
+              <a:gs pos="20000">
+                <a:srgbClr val="4472C4">
+                  <a:alpha val="0"/>
+                </a:srgbClr>
+              </a:gs>
+              <a:gs pos="100000">
+                <a:srgbClr val="1F3864">
+                  <a:alpha val="54901"/>
+                </a:srgbClr>
+              </a:gs>
+            </a:gsLst>
+            <a:lin ang="13800146" scaled="0"/>
+          </a:gradFill>
+          <a:ln>
+            <a:noFill/>
+          </a:ln>
+        </p:spPr>
+        <p:txBody>
+          <a:bodyPr spcFirstLastPara="1" wrap="square" lIns="91425" tIns="45700" rIns="91425" bIns="45700" anchor="ctr" anchorCtr="0">
+            <a:noAutofit/>
+          </a:bodyPr>
+          <a:lstStyle/>
+          <a:p>
+            <a:pPr marL="0" marR="0" lvl="0" indent="0" algn="ctr" rtl="0">
+              <a:spcBef>
+                <a:spcPts val="0"/>
+              </a:spcBef>
+              <a:spcAft>
+                <a:spcPts val="0"/>
+              </a:spcAft>
+              <a:buNone/>
+            </a:pPr>
+            <a:endParaRPr sz="1800" b="0" i="0" u="none" strike="noStrike" cap="none">
+              <a:solidFill>
+                <a:schemeClr val="lt1"/>
+              </a:solidFill>
+              <a:latin typeface="Calibri"/>
+              <a:ea typeface="Calibri"/>
+              <a:cs typeface="Calibri"/>
+              <a:sym typeface="Calibri"/>
+            </a:endParaRPr>
+          </a:p>
+        </p:txBody>
+      </p:sp>
+      <p:sp>
+        <p:nvSpPr>
+          <p:cNvPr id="372" name="Google Shape;372;p18"/>
+          <p:cNvSpPr txBox="1">
+            <a:spLocks noGrp="1"/>
+          </p:cNvSpPr>
+          <p:nvPr>
+            <p:ph type="title"/>
+          </p:nvPr>
+        </p:nvSpPr>
+        <p:spPr>
+          <a:xfrm>
+            <a:off x="1371600" y="347472"/>
+            <a:ext cx="7063800" cy="877800"/>
+          </a:xfrm>
+          <a:prstGeom prst="rect">
+            <a:avLst/>
+          </a:prstGeom>
+          <a:noFill/>
+          <a:ln>
+            <a:noFill/>
+          </a:ln>
+        </p:spPr>
+        <p:txBody>
+          <a:bodyPr spcFirstLastPara="1" wrap="square" lIns="91425" tIns="45700" rIns="91425" bIns="45700" anchor="ctr" anchorCtr="0">
+            <a:normAutofit/>
+          </a:bodyPr>
+          <a:lstStyle/>
+          <a:p>
+            <a:pPr marL="0" lvl="0" indent="0" algn="l" rtl="0">
+              <a:lnSpc>
+                <a:spcPct val="90000"/>
+              </a:lnSpc>
+              <a:spcBef>
+                <a:spcPts val="0"/>
+              </a:spcBef>
+              <a:spcAft>
+                <a:spcPts val="0"/>
+              </a:spcAft>
+              <a:buClr>
+                <a:srgbClr val="FFFFFF"/>
+              </a:buClr>
+              <a:buSzPts val="4000"/>
+              <a:buFont typeface="Calibri"/>
+              <a:buNone/>
+            </a:pPr>
+            <a:r>
+              <a:rPr lang="en-US" sz="4000">
+                <a:solidFill>
+                  <a:srgbClr val="FFFFFF"/>
+                </a:solidFill>
+                <a:latin typeface="Calibri"/>
+                <a:ea typeface="Calibri"/>
+                <a:cs typeface="Calibri"/>
+                <a:sym typeface="Calibri"/>
+              </a:rPr>
+              <a:t>Demo – </a:t>
+            </a:r>
+            <a:r>
+              <a:rPr lang="en-US" sz="4000">
+                <a:solidFill>
+                  <a:srgbClr val="FFFFFF"/>
+                </a:solidFill>
+              </a:rPr>
+              <a:t>Loops</a:t>
+            </a:r>
+            <a:endParaRPr/>
+          </a:p>
+        </p:txBody>
+      </p:sp>
+      <p:pic>
+        <p:nvPicPr>
+          <p:cNvPr id="373" name="Google Shape;373;p18" descr="Monitor"/>
+          <p:cNvPicPr preferRelativeResize="0"/>
+          <p:nvPr/>
+        </p:nvPicPr>
+        <p:blipFill rotWithShape="1">
+          <a:blip r:embed="rId3">
+            <a:alphaModFix/>
+          </a:blip>
+          <a:srcRect/>
+          <a:stretch/>
+        </p:blipFill>
+        <p:spPr>
+          <a:xfrm>
+            <a:off x="699713" y="1966293"/>
+            <a:ext cx="4452160" cy="4452160"/>
+          </a:xfrm>
+          <a:prstGeom prst="rect">
+            <a:avLst/>
+          </a:prstGeom>
+          <a:noFill/>
+          <a:ln>
+            <a:noFill/>
+          </a:ln>
+        </p:spPr>
+      </p:pic>
+      <p:sp>
+        <p:nvSpPr>
+          <p:cNvPr id="374" name="Google Shape;374;p18"/>
+          <p:cNvSpPr txBox="1"/>
+          <p:nvPr/>
+        </p:nvSpPr>
+        <p:spPr>
+          <a:xfrm>
+            <a:off x="5920820" y="2112579"/>
+            <a:ext cx="4872919" cy="4305874"/>
+          </a:xfrm>
+          <a:prstGeom prst="rect">
+            <a:avLst/>
+          </a:prstGeom>
+          <a:noFill/>
+          <a:ln>
+            <a:noFill/>
+          </a:ln>
+        </p:spPr>
+        <p:txBody>
+          <a:bodyPr spcFirstLastPara="1" wrap="square" lIns="91425" tIns="45700" rIns="91425" bIns="45700" anchor="t" anchorCtr="0">
+            <a:noAutofit/>
+          </a:bodyPr>
+          <a:lstStyle/>
+          <a:p>
+            <a:pPr marL="0" marR="0" lvl="0" indent="0" algn="l" rtl="0">
+              <a:lnSpc>
+                <a:spcPct val="90000"/>
+              </a:lnSpc>
+              <a:spcBef>
+                <a:spcPts val="0"/>
+              </a:spcBef>
+              <a:spcAft>
+                <a:spcPts val="0"/>
+              </a:spcAft>
+              <a:buClr>
+                <a:schemeClr val="dk1"/>
+              </a:buClr>
+              <a:buSzPts val="2604"/>
+              <a:buFont typeface="Arial"/>
+              <a:buNone/>
+            </a:pPr>
+            <a:r>
+              <a:rPr lang="en-US" sz="2604" dirty="0">
+                <a:solidFill>
+                  <a:schemeClr val="dk1"/>
+                </a:solidFill>
+                <a:latin typeface="Calibri"/>
+                <a:ea typeface="Calibri"/>
+                <a:cs typeface="Calibri"/>
+                <a:sym typeface="Calibri"/>
+              </a:rPr>
+              <a:t>Looping methods</a:t>
+            </a:r>
+            <a:r>
+              <a:rPr lang="en-US" sz="2604" b="0" i="0" u="none" strike="noStrike" cap="none" dirty="0">
+                <a:solidFill>
+                  <a:schemeClr val="dk1"/>
+                </a:solidFill>
+                <a:latin typeface="Calibri"/>
+                <a:ea typeface="Calibri"/>
+                <a:cs typeface="Calibri"/>
+                <a:sym typeface="Calibri"/>
+              </a:rPr>
+              <a:t>:</a:t>
+            </a:r>
+            <a:endParaRPr dirty="0"/>
+          </a:p>
+          <a:p>
+            <a:pPr marL="228600" marR="0" lvl="0" indent="-228600" algn="l" rtl="0">
+              <a:lnSpc>
+                <a:spcPct val="90000"/>
+              </a:lnSpc>
+              <a:spcBef>
+                <a:spcPts val="930"/>
+              </a:spcBef>
+              <a:spcAft>
+                <a:spcPts val="0"/>
+              </a:spcAft>
+              <a:buClr>
+                <a:schemeClr val="dk1"/>
+              </a:buClr>
+              <a:buSzPts val="2604"/>
+              <a:buFont typeface="Arial"/>
+              <a:buChar char="•"/>
+            </a:pPr>
+            <a:r>
+              <a:rPr lang="en-US" sz="2604" dirty="0">
+                <a:solidFill>
+                  <a:schemeClr val="dk1"/>
+                </a:solidFill>
+                <a:latin typeface="Calibri"/>
+                <a:ea typeface="Calibri"/>
+                <a:cs typeface="Calibri"/>
+                <a:sym typeface="Calibri"/>
+              </a:rPr>
+              <a:t>For</a:t>
+            </a:r>
+            <a:endParaRPr sz="2604" dirty="0">
+              <a:solidFill>
+                <a:schemeClr val="dk1"/>
+              </a:solidFill>
+              <a:latin typeface="Calibri"/>
+              <a:ea typeface="Calibri"/>
+              <a:cs typeface="Calibri"/>
+              <a:sym typeface="Calibri"/>
+            </a:endParaRPr>
+          </a:p>
+          <a:p>
+            <a:pPr marL="228600" marR="0" lvl="0" indent="-228600" algn="l" rtl="0">
+              <a:lnSpc>
+                <a:spcPct val="90000"/>
+              </a:lnSpc>
+              <a:spcBef>
+                <a:spcPts val="930"/>
+              </a:spcBef>
+              <a:spcAft>
+                <a:spcPts val="0"/>
+              </a:spcAft>
+              <a:buClr>
+                <a:schemeClr val="dk1"/>
+              </a:buClr>
+              <a:buSzPts val="2604"/>
+              <a:buFont typeface="Calibri"/>
+              <a:buChar char="•"/>
+            </a:pPr>
+            <a:r>
+              <a:rPr lang="en-US" sz="2604" dirty="0">
+                <a:solidFill>
+                  <a:schemeClr val="dk1"/>
+                </a:solidFill>
+                <a:latin typeface="Calibri"/>
+                <a:ea typeface="Calibri"/>
+                <a:cs typeface="Calibri"/>
+                <a:sym typeface="Calibri"/>
+              </a:rPr>
+              <a:t>Foreach (x in y)</a:t>
+            </a:r>
+            <a:endParaRPr sz="2604" dirty="0">
+              <a:solidFill>
+                <a:schemeClr val="dk1"/>
+              </a:solidFill>
+              <a:latin typeface="Calibri"/>
+              <a:ea typeface="Calibri"/>
+              <a:cs typeface="Calibri"/>
+              <a:sym typeface="Calibri"/>
+            </a:endParaRPr>
+          </a:p>
+          <a:p>
+            <a:pPr marL="228600" marR="0" lvl="0" indent="-228600" algn="l" rtl="0">
+              <a:lnSpc>
+                <a:spcPct val="90000"/>
+              </a:lnSpc>
+              <a:spcBef>
+                <a:spcPts val="930"/>
+              </a:spcBef>
+              <a:spcAft>
+                <a:spcPts val="0"/>
+              </a:spcAft>
+              <a:buClr>
+                <a:schemeClr val="dk1"/>
+              </a:buClr>
+              <a:buSzPts val="2604"/>
+              <a:buFont typeface="Calibri"/>
+              <a:buChar char="•"/>
+            </a:pPr>
+            <a:r>
+              <a:rPr lang="en-US" sz="2604" dirty="0">
+                <a:solidFill>
+                  <a:schemeClr val="dk1"/>
+                </a:solidFill>
+                <a:latin typeface="Calibri"/>
+                <a:ea typeface="Calibri"/>
+                <a:cs typeface="Calibri"/>
+                <a:sym typeface="Calibri"/>
+              </a:rPr>
+              <a:t>Foreach-Object</a:t>
+            </a:r>
+            <a:endParaRPr sz="2604" dirty="0">
+              <a:solidFill>
+                <a:schemeClr val="dk1"/>
+              </a:solidFill>
+              <a:latin typeface="Calibri"/>
+              <a:ea typeface="Calibri"/>
+              <a:cs typeface="Calibri"/>
+              <a:sym typeface="Calibri"/>
+            </a:endParaRPr>
+          </a:p>
+          <a:p>
+            <a:pPr marL="228600" marR="0" lvl="0" indent="-228600" algn="l" rtl="0">
+              <a:lnSpc>
+                <a:spcPct val="90000"/>
+              </a:lnSpc>
+              <a:spcBef>
+                <a:spcPts val="930"/>
+              </a:spcBef>
+              <a:spcAft>
+                <a:spcPts val="0"/>
+              </a:spcAft>
+              <a:buClr>
+                <a:schemeClr val="dk1"/>
+              </a:buClr>
+              <a:buSzPts val="2604"/>
+              <a:buFont typeface="Calibri"/>
+              <a:buChar char="•"/>
+            </a:pPr>
+            <a:r>
+              <a:rPr lang="en-US" sz="2604" dirty="0">
+                <a:solidFill>
+                  <a:schemeClr val="dk1"/>
+                </a:solidFill>
+                <a:latin typeface="Calibri"/>
+                <a:ea typeface="Calibri"/>
+                <a:cs typeface="Calibri"/>
+                <a:sym typeface="Calibri"/>
+              </a:rPr>
+              <a:t>Do/While or Do/Until</a:t>
+            </a:r>
+            <a:endParaRPr sz="2604" dirty="0">
+              <a:solidFill>
+                <a:schemeClr val="dk1"/>
+              </a:solidFill>
+              <a:latin typeface="Calibri"/>
+              <a:ea typeface="Calibri"/>
+              <a:cs typeface="Calibri"/>
+              <a:sym typeface="Calibri"/>
+            </a:endParaRPr>
+          </a:p>
+          <a:p>
+            <a:pPr marL="228600" marR="0" lvl="0" indent="-228600" algn="l" rtl="0">
+              <a:lnSpc>
+                <a:spcPct val="90000"/>
+              </a:lnSpc>
+              <a:spcBef>
+                <a:spcPts val="930"/>
+              </a:spcBef>
+              <a:spcAft>
+                <a:spcPts val="0"/>
+              </a:spcAft>
+              <a:buClr>
+                <a:schemeClr val="dk1"/>
+              </a:buClr>
+              <a:buSzPts val="2604"/>
+              <a:buFont typeface="Calibri"/>
+              <a:buChar char="•"/>
+            </a:pPr>
+            <a:r>
+              <a:rPr lang="en-US" sz="2604" dirty="0">
+                <a:solidFill>
+                  <a:schemeClr val="dk1"/>
+                </a:solidFill>
+                <a:latin typeface="Calibri"/>
+                <a:ea typeface="Calibri"/>
+                <a:cs typeface="Calibri"/>
+                <a:sym typeface="Calibri"/>
+              </a:rPr>
+              <a:t>While</a:t>
+            </a:r>
+            <a:endParaRPr sz="2604" dirty="0">
+              <a:solidFill>
+                <a:schemeClr val="dk1"/>
+              </a:solidFill>
+              <a:latin typeface="Calibri"/>
+              <a:ea typeface="Calibri"/>
+              <a:cs typeface="Calibri"/>
+              <a:sym typeface="Calibri"/>
+            </a:endParaRPr>
+          </a:p>
+          <a:p>
+            <a:pPr marL="0" marR="0" lvl="0" indent="0" algn="l" rtl="0">
+              <a:lnSpc>
+                <a:spcPct val="90000"/>
+              </a:lnSpc>
+              <a:spcBef>
+                <a:spcPts val="930"/>
+              </a:spcBef>
+              <a:spcAft>
+                <a:spcPts val="0"/>
+              </a:spcAft>
+              <a:buNone/>
+            </a:pPr>
+            <a:r>
+              <a:rPr lang="en-US" sz="2604" dirty="0">
+                <a:solidFill>
+                  <a:schemeClr val="dk1"/>
+                </a:solidFill>
+                <a:latin typeface="Calibri"/>
+                <a:ea typeface="Calibri"/>
+                <a:cs typeface="Calibri"/>
+                <a:sym typeface="Calibri"/>
+              </a:rPr>
+              <a:t>Loop Control:</a:t>
+            </a:r>
+          </a:p>
+          <a:p>
+            <a:pPr marL="457200" marR="0" lvl="0" indent="-457200" algn="l" rtl="0">
+              <a:lnSpc>
+                <a:spcPct val="90000"/>
+              </a:lnSpc>
+              <a:spcBef>
+                <a:spcPts val="930"/>
+              </a:spcBef>
+              <a:spcAft>
+                <a:spcPts val="0"/>
+              </a:spcAft>
+              <a:buFont typeface="Arial" panose="020B0604020202020204" pitchFamily="34" charset="0"/>
+              <a:buChar char="•"/>
+            </a:pPr>
+            <a:r>
+              <a:rPr lang="en-US" sz="2604" dirty="0">
+                <a:solidFill>
+                  <a:schemeClr val="dk1"/>
+                </a:solidFill>
+                <a:latin typeface="Calibri"/>
+                <a:ea typeface="Calibri"/>
+                <a:cs typeface="Calibri"/>
+                <a:sym typeface="Calibri"/>
+              </a:rPr>
+              <a:t>Break</a:t>
+            </a:r>
+          </a:p>
+          <a:p>
+            <a:pPr marL="457200" marR="0" lvl="0" indent="-457200" algn="l" rtl="0">
+              <a:lnSpc>
+                <a:spcPct val="90000"/>
+              </a:lnSpc>
+              <a:spcBef>
+                <a:spcPts val="930"/>
+              </a:spcBef>
+              <a:spcAft>
+                <a:spcPts val="0"/>
+              </a:spcAft>
+              <a:buFont typeface="Arial" panose="020B0604020202020204" pitchFamily="34" charset="0"/>
+              <a:buChar char="•"/>
+            </a:pPr>
+            <a:r>
+              <a:rPr lang="en-US" sz="2604" dirty="0">
+                <a:solidFill>
+                  <a:schemeClr val="dk1"/>
+                </a:solidFill>
+                <a:latin typeface="Calibri"/>
+                <a:ea typeface="Calibri"/>
+                <a:cs typeface="Calibri"/>
+                <a:sym typeface="Calibri"/>
+              </a:rPr>
+              <a:t>Continue</a:t>
+            </a:r>
+            <a:endParaRPr sz="2604" dirty="0">
+              <a:solidFill>
+                <a:schemeClr val="dk1"/>
+              </a:solidFill>
+              <a:latin typeface="Calibri"/>
+              <a:ea typeface="Calibri"/>
+              <a:cs typeface="Calibri"/>
+              <a:sym typeface="Calibri"/>
+            </a:endParaRPr>
+          </a:p>
+        </p:txBody>
+      </p:sp>
+    </p:spTree>
+  </p:cSld>
+  <p:clrMapOvr>
+    <a:masterClrMapping/>
+  </p:clrMapOvr>
+</p:sld>
+</file>
+
+<file path=ppt/slides/slide24.xml><?xml version="1.0" encoding="utf-8"?>
+<p:sld xmlns:a="http://schemas.openxmlformats.org/drawingml/2006/main" xmlns:r="http://schemas.openxmlformats.org/officeDocument/2006/relationships" xmlns:p="http://schemas.openxmlformats.org/presentationml/2006/main">
+  <p:cSld>
+    <p:bg>
+      <p:bgPr>
+        <a:solidFill>
+          <a:schemeClr val="lt1"/>
+        </a:solidFill>
+        <a:effectLst/>
+      </p:bgPr>
+    </p:bg>
+    <p:spTree>
+      <p:nvGrpSpPr>
+        <p:cNvPr id="1" name="Shape 379"/>
+        <p:cNvGrpSpPr/>
+        <p:nvPr/>
+      </p:nvGrpSpPr>
+      <p:grpSpPr>
+        <a:xfrm>
+          <a:off x="0" y="0"/>
+          <a:ext cx="0" cy="0"/>
+          <a:chOff x="0" y="0"/>
+          <a:chExt cx="0" cy="0"/>
+        </a:xfrm>
+      </p:grpSpPr>
+      <p:sp>
+        <p:nvSpPr>
+          <p:cNvPr id="380" name="Google Shape;380;p19"/>
+          <p:cNvSpPr/>
+          <p:nvPr/>
+        </p:nvSpPr>
+        <p:spPr>
+          <a:xfrm>
+            <a:off x="0" y="0"/>
+            <a:ext cx="12192000" cy="6858000"/>
+          </a:xfrm>
+          <a:prstGeom prst="rect">
+            <a:avLst/>
+          </a:prstGeom>
+          <a:solidFill>
+            <a:schemeClr val="lt1"/>
+          </a:solidFill>
+          <a:ln>
+            <a:noFill/>
+          </a:ln>
+        </p:spPr>
+        <p:txBody>
+          <a:bodyPr spcFirstLastPara="1" wrap="square" lIns="91425" tIns="45700" rIns="91425" bIns="45700" anchor="ctr" anchorCtr="0">
+            <a:noAutofit/>
+          </a:bodyPr>
+          <a:lstStyle/>
+          <a:p>
+            <a:pPr marL="0" marR="0" lvl="0" indent="0" algn="ctr" rtl="0">
+              <a:spcBef>
+                <a:spcPts val="0"/>
+              </a:spcBef>
+              <a:spcAft>
+                <a:spcPts val="0"/>
+              </a:spcAft>
+              <a:buNone/>
+            </a:pPr>
+            <a:endParaRPr sz="1800" b="0" i="0" u="none" strike="noStrike" cap="none">
+              <a:solidFill>
+                <a:schemeClr val="lt1"/>
+              </a:solidFill>
+              <a:latin typeface="Calibri"/>
+              <a:ea typeface="Calibri"/>
+              <a:cs typeface="Calibri"/>
+              <a:sym typeface="Calibri"/>
+            </a:endParaRPr>
+          </a:p>
+        </p:txBody>
+      </p:sp>
+      <p:sp>
+        <p:nvSpPr>
+          <p:cNvPr id="381" name="Google Shape;381;p19"/>
+          <p:cNvSpPr/>
+          <p:nvPr/>
+        </p:nvSpPr>
+        <p:spPr>
+          <a:xfrm flipH="1">
+            <a:off x="-3" y="-1"/>
+            <a:ext cx="12192000" cy="1590600"/>
+          </a:xfrm>
+          <a:prstGeom prst="rect">
+            <a:avLst/>
+          </a:prstGeom>
+          <a:gradFill>
+            <a:gsLst>
+              <a:gs pos="0">
+                <a:srgbClr val="000000"/>
+              </a:gs>
+              <a:gs pos="100000">
+                <a:srgbClr val="2F5496"/>
+              </a:gs>
+            </a:gsLst>
+            <a:lin ang="8400134" scaled="0"/>
+          </a:gradFill>
+          <a:ln>
+            <a:noFill/>
+          </a:ln>
+        </p:spPr>
+        <p:txBody>
+          <a:bodyPr spcFirstLastPara="1" wrap="square" lIns="91425" tIns="45700" rIns="91425" bIns="45700" anchor="ctr" anchorCtr="0">
+            <a:noAutofit/>
+          </a:bodyPr>
+          <a:lstStyle/>
+          <a:p>
+            <a:pPr marL="0" marR="0" lvl="0" indent="0" algn="ctr" rtl="0">
+              <a:spcBef>
+                <a:spcPts val="0"/>
+              </a:spcBef>
+              <a:spcAft>
+                <a:spcPts val="0"/>
+              </a:spcAft>
+              <a:buNone/>
+            </a:pPr>
+            <a:endParaRPr sz="1800" b="0" i="0" u="none" strike="noStrike" cap="none">
+              <a:solidFill>
+                <a:schemeClr val="lt1"/>
+              </a:solidFill>
+              <a:latin typeface="Calibri"/>
+              <a:ea typeface="Calibri"/>
+              <a:cs typeface="Calibri"/>
+              <a:sym typeface="Calibri"/>
+            </a:endParaRPr>
+          </a:p>
+        </p:txBody>
+      </p:sp>
+      <p:sp>
+        <p:nvSpPr>
+          <p:cNvPr id="382" name="Google Shape;382;p19"/>
+          <p:cNvSpPr/>
+          <p:nvPr/>
+        </p:nvSpPr>
+        <p:spPr>
+          <a:xfrm rot="10800000" flipH="1">
+            <a:off x="-3" y="142"/>
+            <a:ext cx="8115300" cy="1590600"/>
+          </a:xfrm>
+          <a:prstGeom prst="rect">
+            <a:avLst/>
+          </a:prstGeom>
+          <a:gradFill>
+            <a:gsLst>
+              <a:gs pos="0">
+                <a:srgbClr val="4472C4">
+                  <a:alpha val="0"/>
+                </a:srgbClr>
+              </a:gs>
+              <a:gs pos="20000">
+                <a:srgbClr val="4472C4">
+                  <a:alpha val="0"/>
+                </a:srgbClr>
+              </a:gs>
+              <a:gs pos="100000">
+                <a:srgbClr val="1F3864">
+                  <a:alpha val="54901"/>
+                </a:srgbClr>
+              </a:gs>
+            </a:gsLst>
+            <a:lin ang="13800146" scaled="0"/>
+          </a:gradFill>
+          <a:ln>
+            <a:noFill/>
+          </a:ln>
+        </p:spPr>
+        <p:txBody>
+          <a:bodyPr spcFirstLastPara="1" wrap="square" lIns="91425" tIns="45700" rIns="91425" bIns="45700" anchor="ctr" anchorCtr="0">
+            <a:noAutofit/>
+          </a:bodyPr>
+          <a:lstStyle/>
+          <a:p>
+            <a:pPr marL="0" marR="0" lvl="0" indent="0" algn="ctr" rtl="0">
+              <a:spcBef>
+                <a:spcPts val="0"/>
+              </a:spcBef>
+              <a:spcAft>
+                <a:spcPts val="0"/>
+              </a:spcAft>
+              <a:buNone/>
+            </a:pPr>
+            <a:endParaRPr sz="1800" b="0" i="0" u="none" strike="noStrike" cap="none">
+              <a:solidFill>
+                <a:schemeClr val="lt1"/>
+              </a:solidFill>
+              <a:latin typeface="Calibri"/>
+              <a:ea typeface="Calibri"/>
+              <a:cs typeface="Calibri"/>
+              <a:sym typeface="Calibri"/>
+            </a:endParaRPr>
+          </a:p>
+        </p:txBody>
+      </p:sp>
+      <p:sp>
+        <p:nvSpPr>
+          <p:cNvPr id="383" name="Google Shape;383;p19"/>
+          <p:cNvSpPr txBox="1">
+            <a:spLocks noGrp="1"/>
+          </p:cNvSpPr>
+          <p:nvPr>
+            <p:ph type="title"/>
+          </p:nvPr>
+        </p:nvSpPr>
+        <p:spPr>
+          <a:xfrm>
+            <a:off x="1371599" y="294538"/>
+            <a:ext cx="9895951" cy="1033669"/>
+          </a:xfrm>
+          <a:prstGeom prst="rect">
+            <a:avLst/>
+          </a:prstGeom>
+          <a:noFill/>
+          <a:ln>
+            <a:noFill/>
+          </a:ln>
+        </p:spPr>
+        <p:txBody>
+          <a:bodyPr spcFirstLastPara="1" wrap="square" lIns="91425" tIns="45700" rIns="91425" bIns="45700" anchor="ctr" anchorCtr="0">
+            <a:normAutofit/>
+          </a:bodyPr>
+          <a:lstStyle/>
+          <a:p>
+            <a:pPr marL="0" lvl="0" indent="0" algn="l" rtl="0">
+              <a:lnSpc>
+                <a:spcPct val="90000"/>
+              </a:lnSpc>
+              <a:spcBef>
+                <a:spcPts val="0"/>
+              </a:spcBef>
+              <a:spcAft>
+                <a:spcPts val="0"/>
+              </a:spcAft>
+              <a:buClr>
+                <a:srgbClr val="FFFFFF"/>
+              </a:buClr>
+              <a:buSzPts val="4000"/>
+              <a:buFont typeface="Calibri"/>
+              <a:buNone/>
+            </a:pPr>
+            <a:r>
+              <a:rPr lang="en-US" sz="4000">
+                <a:solidFill>
+                  <a:srgbClr val="FFFFFF"/>
+                </a:solidFill>
+              </a:rPr>
+              <a:t>Resources</a:t>
+            </a:r>
+            <a:endParaRPr/>
+          </a:p>
+        </p:txBody>
+      </p:sp>
+      <p:sp>
+        <p:nvSpPr>
+          <p:cNvPr id="384" name="Google Shape;384;p19"/>
+          <p:cNvSpPr txBox="1">
+            <a:spLocks noGrp="1"/>
+          </p:cNvSpPr>
+          <p:nvPr>
+            <p:ph type="body" idx="1"/>
+          </p:nvPr>
+        </p:nvSpPr>
+        <p:spPr>
+          <a:xfrm>
+            <a:off x="1371599" y="2318197"/>
+            <a:ext cx="9724031" cy="3683358"/>
+          </a:xfrm>
+          <a:prstGeom prst="rect">
+            <a:avLst/>
+          </a:prstGeom>
+          <a:noFill/>
+          <a:ln>
+            <a:noFill/>
+          </a:ln>
+        </p:spPr>
+        <p:txBody>
+          <a:bodyPr spcFirstLastPara="1" wrap="square" lIns="91425" tIns="45700" rIns="91425" bIns="45700" anchor="ctr" anchorCtr="0">
+            <a:normAutofit/>
+          </a:bodyPr>
+          <a:lstStyle/>
+          <a:p>
+            <a:pPr marL="228600" lvl="0" indent="-228600" algn="l" rtl="0">
+              <a:lnSpc>
+                <a:spcPct val="90000"/>
+              </a:lnSpc>
+              <a:spcBef>
+                <a:spcPts val="1000"/>
+              </a:spcBef>
+              <a:spcAft>
+                <a:spcPts val="0"/>
+              </a:spcAft>
+              <a:buClr>
+                <a:schemeClr val="dk1"/>
+              </a:buClr>
+              <a:buSzPts val="2000"/>
+              <a:buChar char="•"/>
+            </a:pPr>
+            <a:r>
+              <a:rPr lang="en-US" sz="2000" u="sng" dirty="0" err="1">
+                <a:latin typeface="Arial"/>
+                <a:ea typeface="Arial"/>
+                <a:cs typeface="Arial"/>
+                <a:sym typeface="Arial"/>
+              </a:rPr>
+              <a:t>Powershell</a:t>
+            </a:r>
+            <a:r>
+              <a:rPr lang="en-US" sz="2000" u="sng" dirty="0">
+                <a:latin typeface="Arial"/>
+                <a:ea typeface="Arial"/>
+                <a:cs typeface="Arial"/>
+                <a:sym typeface="Arial"/>
+              </a:rPr>
+              <a:t> Gallery</a:t>
+            </a:r>
+            <a:br>
+              <a:rPr lang="en-US" sz="2000" u="sng" dirty="0">
+                <a:latin typeface="Arial"/>
+                <a:ea typeface="Arial"/>
+                <a:cs typeface="Arial"/>
+                <a:sym typeface="Arial"/>
+              </a:rPr>
+            </a:br>
+            <a:r>
+              <a:rPr lang="en-US" sz="2000" u="sng" dirty="0">
+                <a:solidFill>
+                  <a:schemeClr val="hlink"/>
+                </a:solidFill>
+                <a:latin typeface="Arial"/>
+                <a:ea typeface="Arial"/>
+                <a:cs typeface="Arial"/>
+                <a:sym typeface="Arial"/>
+                <a:hlinkClick r:id="rId3"/>
+              </a:rPr>
+              <a:t>https://www.powershellgallery.com/</a:t>
+            </a:r>
+            <a:br>
+              <a:rPr lang="en-US" sz="2000" u="sng" dirty="0">
+                <a:latin typeface="Arial"/>
+                <a:ea typeface="Arial"/>
+                <a:cs typeface="Arial"/>
+                <a:sym typeface="Arial"/>
+              </a:rPr>
+            </a:br>
+            <a:endParaRPr sz="2000" u="sng" dirty="0">
+              <a:latin typeface="Arial"/>
+              <a:ea typeface="Arial"/>
+              <a:cs typeface="Arial"/>
+              <a:sym typeface="Arial"/>
+            </a:endParaRPr>
+          </a:p>
+          <a:p>
+            <a:pPr marL="228600" lvl="0" indent="-228600" algn="l" rtl="0">
+              <a:lnSpc>
+                <a:spcPct val="90000"/>
+              </a:lnSpc>
+              <a:spcBef>
+                <a:spcPts val="1000"/>
+              </a:spcBef>
+              <a:spcAft>
+                <a:spcPts val="0"/>
+              </a:spcAft>
+              <a:buClr>
+                <a:schemeClr val="dk1"/>
+              </a:buClr>
+              <a:buSzPts val="2000"/>
+              <a:buChar char="•"/>
+            </a:pPr>
+            <a:r>
+              <a:rPr lang="en-US" sz="2000" b="0" i="0" u="sng" strike="noStrike" dirty="0">
+                <a:latin typeface="Arial"/>
+                <a:ea typeface="Arial"/>
+                <a:cs typeface="Arial"/>
+                <a:sym typeface="Arial"/>
+              </a:rPr>
+              <a:t>Microsoft </a:t>
+            </a:r>
+            <a:r>
+              <a:rPr lang="en-US" sz="2000" b="0" i="0" u="sng" strike="noStrike" dirty="0" err="1">
+                <a:latin typeface="Arial"/>
+                <a:ea typeface="Arial"/>
+                <a:cs typeface="Arial"/>
+                <a:sym typeface="Arial"/>
+              </a:rPr>
+              <a:t>Powershell</a:t>
+            </a:r>
+            <a:r>
+              <a:rPr lang="en-US" sz="2000" b="0" i="0" u="sng" strike="noStrike" dirty="0">
+                <a:latin typeface="Arial"/>
+                <a:ea typeface="Arial"/>
+                <a:cs typeface="Arial"/>
+                <a:sym typeface="Arial"/>
+              </a:rPr>
+              <a:t> Documentation</a:t>
+            </a:r>
+            <a:br>
+              <a:rPr lang="en-US" sz="2000" b="0" i="0" u="sng" strike="noStrike" dirty="0">
+                <a:latin typeface="Arial"/>
+                <a:ea typeface="Arial"/>
+                <a:cs typeface="Arial"/>
+                <a:sym typeface="Arial"/>
+              </a:rPr>
+            </a:br>
+            <a:r>
+              <a:rPr lang="en-US" sz="2000" b="0" i="0" u="sng" strike="noStrike" dirty="0">
+                <a:solidFill>
+                  <a:schemeClr val="hlink"/>
+                </a:solidFill>
+                <a:latin typeface="Arial"/>
+                <a:ea typeface="Arial"/>
+                <a:cs typeface="Arial"/>
+                <a:sym typeface="Arial"/>
+                <a:hlinkClick r:id="rId4"/>
+              </a:rPr>
+              <a:t>https://learn.microsoft.com/en-us/powershell/scripting/learn/ps101/00-introduction</a:t>
+            </a:r>
+            <a:br>
+              <a:rPr lang="en-US" sz="2000" b="0" i="0" u="sng" strike="noStrike" dirty="0">
+                <a:latin typeface="Arial"/>
+                <a:ea typeface="Arial"/>
+                <a:cs typeface="Arial"/>
+                <a:sym typeface="Arial"/>
+              </a:rPr>
+            </a:br>
+            <a:endParaRPr sz="2000" b="0" i="0" u="sng" strike="noStrike" dirty="0">
+              <a:latin typeface="Arial"/>
+              <a:ea typeface="Arial"/>
+              <a:cs typeface="Arial"/>
+              <a:sym typeface="Arial"/>
+            </a:endParaRPr>
+          </a:p>
+          <a:p>
+            <a:pPr marL="228600" lvl="0" indent="-228600" algn="l" rtl="0">
+              <a:spcBef>
+                <a:spcPts val="0"/>
+              </a:spcBef>
+              <a:spcAft>
+                <a:spcPts val="0"/>
+              </a:spcAft>
+              <a:buSzPts val="2000"/>
+              <a:buChar char="•"/>
+            </a:pPr>
+            <a:r>
+              <a:rPr lang="en-US" sz="2000" dirty="0">
+                <a:latin typeface="Arial"/>
+                <a:ea typeface="Arial"/>
+                <a:cs typeface="Arial"/>
+                <a:sym typeface="Arial"/>
+              </a:rPr>
+              <a:t>dbatools </a:t>
+            </a:r>
+            <a:br>
+              <a:rPr lang="en-US" sz="2000" dirty="0">
+                <a:latin typeface="Arial"/>
+                <a:ea typeface="Arial"/>
+                <a:cs typeface="Arial"/>
+                <a:sym typeface="Arial"/>
+              </a:rPr>
+            </a:br>
+            <a:r>
+              <a:rPr lang="en-US" sz="2000" u="sng" dirty="0">
+                <a:solidFill>
+                  <a:schemeClr val="hlink"/>
+                </a:solidFill>
+                <a:latin typeface="Arial"/>
+                <a:ea typeface="Arial"/>
+                <a:cs typeface="Arial"/>
+                <a:sym typeface="Arial"/>
+                <a:hlinkClick r:id="rId5"/>
+              </a:rPr>
+              <a:t>https://dbatools.io/</a:t>
+            </a:r>
+            <a:endParaRPr sz="2000" dirty="0">
+              <a:latin typeface="Arial"/>
+              <a:ea typeface="Arial"/>
+              <a:cs typeface="Arial"/>
+              <a:sym typeface="Arial"/>
+            </a:endParaRPr>
+          </a:p>
+        </p:txBody>
+      </p:sp>
+    </p:spTree>
+  </p:cSld>
+  <p:clrMapOvr>
+    <a:masterClrMapping/>
+  </p:clrMapOvr>
+</p:sld>
+</file>
+
+<file path=ppt/slides/slide25.xml><?xml version="1.0" encoding="utf-8"?>
+<p:sld xmlns:a="http://schemas.openxmlformats.org/drawingml/2006/main" xmlns:r="http://schemas.openxmlformats.org/officeDocument/2006/relationships" xmlns:p="http://schemas.openxmlformats.org/presentationml/2006/main">
+  <p:cSld>
+    <p:bg>
+      <p:bgPr>
+        <a:solidFill>
+          <a:schemeClr val="lt1"/>
+        </a:solidFill>
+        <a:effectLst/>
+      </p:bgPr>
+    </p:bg>
+    <p:spTree>
+      <p:nvGrpSpPr>
+        <p:cNvPr id="1" name="Shape 379"/>
+        <p:cNvGrpSpPr/>
+        <p:nvPr/>
+      </p:nvGrpSpPr>
+      <p:grpSpPr>
+        <a:xfrm>
+          <a:off x="0" y="0"/>
+          <a:ext cx="0" cy="0"/>
+          <a:chOff x="0" y="0"/>
+          <a:chExt cx="0" cy="0"/>
+        </a:xfrm>
+      </p:grpSpPr>
+      <p:sp>
+        <p:nvSpPr>
+          <p:cNvPr id="380" name="Google Shape;380;p19"/>
+          <p:cNvSpPr/>
+          <p:nvPr/>
+        </p:nvSpPr>
+        <p:spPr>
+          <a:xfrm>
+            <a:off x="0" y="0"/>
+            <a:ext cx="12192000" cy="6858000"/>
+          </a:xfrm>
+          <a:prstGeom prst="rect">
+            <a:avLst/>
+          </a:prstGeom>
+          <a:solidFill>
+            <a:schemeClr val="lt1"/>
+          </a:solidFill>
+          <a:ln>
+            <a:noFill/>
+          </a:ln>
+        </p:spPr>
+        <p:txBody>
+          <a:bodyPr spcFirstLastPara="1" wrap="square" lIns="91425" tIns="45700" rIns="91425" bIns="45700" anchor="ctr" anchorCtr="0">
+            <a:noAutofit/>
+          </a:bodyPr>
+          <a:lstStyle/>
+          <a:p>
+            <a:pPr marL="0" marR="0" lvl="0" indent="0" algn="ctr" rtl="0">
+              <a:spcBef>
+                <a:spcPts val="0"/>
+              </a:spcBef>
+              <a:spcAft>
+                <a:spcPts val="0"/>
+              </a:spcAft>
+              <a:buNone/>
+            </a:pPr>
+            <a:endParaRPr sz="1800" b="0" i="0" u="none" strike="noStrike" cap="none">
+              <a:solidFill>
+                <a:schemeClr val="lt1"/>
+              </a:solidFill>
+              <a:latin typeface="Calibri"/>
+              <a:ea typeface="Calibri"/>
+              <a:cs typeface="Calibri"/>
+              <a:sym typeface="Calibri"/>
+            </a:endParaRPr>
+          </a:p>
+        </p:txBody>
+      </p:sp>
+      <p:sp>
+        <p:nvSpPr>
+          <p:cNvPr id="381" name="Google Shape;381;p19"/>
+          <p:cNvSpPr/>
+          <p:nvPr/>
+        </p:nvSpPr>
+        <p:spPr>
+          <a:xfrm flipH="1">
+            <a:off x="-3" y="-1"/>
+            <a:ext cx="12192000" cy="1590600"/>
+          </a:xfrm>
+          <a:prstGeom prst="rect">
+            <a:avLst/>
+          </a:prstGeom>
+          <a:gradFill>
+            <a:gsLst>
+              <a:gs pos="0">
+                <a:srgbClr val="000000"/>
+              </a:gs>
+              <a:gs pos="100000">
+                <a:srgbClr val="2F5496"/>
+              </a:gs>
+            </a:gsLst>
+            <a:lin ang="8400134" scaled="0"/>
+          </a:gradFill>
+          <a:ln>
+            <a:noFill/>
+          </a:ln>
+        </p:spPr>
+        <p:txBody>
+          <a:bodyPr spcFirstLastPara="1" wrap="square" lIns="91425" tIns="45700" rIns="91425" bIns="45700" anchor="ctr" anchorCtr="0">
+            <a:noAutofit/>
+          </a:bodyPr>
+          <a:lstStyle/>
+          <a:p>
+            <a:pPr marL="0" marR="0" lvl="0" indent="0" algn="ctr" rtl="0">
+              <a:spcBef>
+                <a:spcPts val="0"/>
+              </a:spcBef>
+              <a:spcAft>
+                <a:spcPts val="0"/>
+              </a:spcAft>
+              <a:buNone/>
+            </a:pPr>
+            <a:endParaRPr sz="1800" b="0" i="0" u="none" strike="noStrike" cap="none">
+              <a:solidFill>
+                <a:schemeClr val="lt1"/>
+              </a:solidFill>
+              <a:latin typeface="Calibri"/>
+              <a:ea typeface="Calibri"/>
+              <a:cs typeface="Calibri"/>
+              <a:sym typeface="Calibri"/>
+            </a:endParaRPr>
+          </a:p>
+        </p:txBody>
+      </p:sp>
+      <p:sp>
+        <p:nvSpPr>
+          <p:cNvPr id="382" name="Google Shape;382;p19"/>
+          <p:cNvSpPr/>
+          <p:nvPr/>
+        </p:nvSpPr>
+        <p:spPr>
+          <a:xfrm rot="10800000" flipH="1">
+            <a:off x="-3" y="142"/>
+            <a:ext cx="8115300" cy="1590600"/>
+          </a:xfrm>
+          <a:prstGeom prst="rect">
+            <a:avLst/>
+          </a:prstGeom>
+          <a:gradFill>
+            <a:gsLst>
+              <a:gs pos="0">
+                <a:srgbClr val="4472C4">
+                  <a:alpha val="0"/>
+                </a:srgbClr>
+              </a:gs>
+              <a:gs pos="20000">
+                <a:srgbClr val="4472C4">
+                  <a:alpha val="0"/>
+                </a:srgbClr>
+              </a:gs>
+              <a:gs pos="100000">
+                <a:srgbClr val="1F3864">
+                  <a:alpha val="54901"/>
+                </a:srgbClr>
+              </a:gs>
+            </a:gsLst>
+            <a:lin ang="13800146" scaled="0"/>
+          </a:gradFill>
+          <a:ln>
+            <a:noFill/>
+          </a:ln>
+        </p:spPr>
+        <p:txBody>
+          <a:bodyPr spcFirstLastPara="1" wrap="square" lIns="91425" tIns="45700" rIns="91425" bIns="45700" anchor="ctr" anchorCtr="0">
+            <a:noAutofit/>
+          </a:bodyPr>
+          <a:lstStyle/>
+          <a:p>
+            <a:pPr marL="0" marR="0" lvl="0" indent="0" algn="ctr" rtl="0">
+              <a:spcBef>
+                <a:spcPts val="0"/>
+              </a:spcBef>
+              <a:spcAft>
+                <a:spcPts val="0"/>
+              </a:spcAft>
+              <a:buNone/>
+            </a:pPr>
+            <a:endParaRPr sz="1800" b="0" i="0" u="none" strike="noStrike" cap="none">
+              <a:solidFill>
+                <a:schemeClr val="lt1"/>
+              </a:solidFill>
+              <a:latin typeface="Calibri"/>
+              <a:ea typeface="Calibri"/>
+              <a:cs typeface="Calibri"/>
+              <a:sym typeface="Calibri"/>
+            </a:endParaRPr>
+          </a:p>
+        </p:txBody>
+      </p:sp>
+      <p:sp>
+        <p:nvSpPr>
+          <p:cNvPr id="383" name="Google Shape;383;p19"/>
+          <p:cNvSpPr txBox="1">
+            <a:spLocks noGrp="1"/>
+          </p:cNvSpPr>
+          <p:nvPr>
+            <p:ph type="title"/>
+          </p:nvPr>
+        </p:nvSpPr>
+        <p:spPr>
+          <a:xfrm>
+            <a:off x="1371599" y="294538"/>
+            <a:ext cx="9895951" cy="1033669"/>
+          </a:xfrm>
+          <a:prstGeom prst="rect">
+            <a:avLst/>
+          </a:prstGeom>
+          <a:noFill/>
+          <a:ln>
+            <a:noFill/>
+          </a:ln>
+        </p:spPr>
+        <p:txBody>
+          <a:bodyPr spcFirstLastPara="1" wrap="square" lIns="91425" tIns="45700" rIns="91425" bIns="45700" anchor="ctr" anchorCtr="0">
+            <a:normAutofit/>
+          </a:bodyPr>
+          <a:lstStyle/>
+          <a:p>
+            <a:pPr marL="0" lvl="0" indent="0" algn="l" rtl="0">
+              <a:lnSpc>
+                <a:spcPct val="90000"/>
+              </a:lnSpc>
+              <a:spcBef>
+                <a:spcPts val="0"/>
+              </a:spcBef>
+              <a:spcAft>
+                <a:spcPts val="0"/>
+              </a:spcAft>
+              <a:buClr>
+                <a:srgbClr val="FFFFFF"/>
+              </a:buClr>
+              <a:buSzPts val="4000"/>
+              <a:buFont typeface="Calibri"/>
+              <a:buNone/>
+            </a:pPr>
+            <a:r>
+              <a:rPr lang="en-US" sz="4000" dirty="0">
+                <a:solidFill>
+                  <a:srgbClr val="FFFFFF"/>
+                </a:solidFill>
+              </a:rPr>
+              <a:t>Thank You</a:t>
+            </a:r>
+            <a:endParaRPr dirty="0"/>
+          </a:p>
+        </p:txBody>
+      </p:sp>
+      <p:sp>
+        <p:nvSpPr>
+          <p:cNvPr id="384" name="Google Shape;384;p19"/>
+          <p:cNvSpPr txBox="1">
+            <a:spLocks noGrp="1"/>
+          </p:cNvSpPr>
+          <p:nvPr>
+            <p:ph type="body" idx="1"/>
+          </p:nvPr>
+        </p:nvSpPr>
+        <p:spPr>
+          <a:xfrm>
+            <a:off x="1371599" y="2318197"/>
+            <a:ext cx="9724031" cy="3683358"/>
+          </a:xfrm>
+          <a:prstGeom prst="rect">
+            <a:avLst/>
+          </a:prstGeom>
+          <a:noFill/>
+          <a:ln>
+            <a:noFill/>
+          </a:ln>
+        </p:spPr>
+        <p:txBody>
+          <a:bodyPr spcFirstLastPara="1" wrap="square" lIns="91425" tIns="45700" rIns="91425" bIns="45700" anchor="ctr" anchorCtr="0">
+            <a:normAutofit/>
+          </a:bodyPr>
+          <a:lstStyle/>
+          <a:p>
+            <a:pPr marL="0" lvl="0" indent="0" algn="l" rtl="0">
+              <a:lnSpc>
+                <a:spcPct val="90000"/>
+              </a:lnSpc>
+              <a:spcBef>
+                <a:spcPts val="1000"/>
+              </a:spcBef>
+              <a:spcAft>
+                <a:spcPts val="0"/>
+              </a:spcAft>
+              <a:buClr>
+                <a:schemeClr val="dk1"/>
+              </a:buClr>
+              <a:buSzPts val="2000"/>
+              <a:buNone/>
+            </a:pPr>
+            <a:r>
+              <a:rPr lang="en-US" sz="4000" dirty="0">
+                <a:latin typeface="Arial"/>
+                <a:ea typeface="Arial"/>
+                <a:cs typeface="Arial"/>
+                <a:sym typeface="Arial"/>
+              </a:rPr>
+              <a:t>Questions ?</a:t>
+            </a:r>
+            <a:endParaRPr sz="4000" dirty="0">
+              <a:latin typeface="Arial"/>
+              <a:ea typeface="Arial"/>
+              <a:cs typeface="Arial"/>
+              <a:sym typeface="Arial"/>
+            </a:endParaRPr>
+          </a:p>
+        </p:txBody>
+      </p:sp>
+    </p:spTree>
+    <p:extLst>
+      <p:ext uri="{BB962C8B-B14F-4D97-AF65-F5344CB8AC3E}">
+        <p14:creationId xmlns:p14="http://schemas.microsoft.com/office/powerpoint/2010/main" val="1340594635"/>
+      </p:ext>
+    </p:extLst>
+  </p:cSld>
+  <p:clrMapOvr>
+    <a:masterClrMapping/>
+  </p:clrMapOvr>
+</p:sld>
+</file>
+
+<file path=ppt/slides/slide3.xml><?xml version="1.0" encoding="utf-8"?>
 <p:sld xmlns:a="http://schemas.openxmlformats.org/drawingml/2006/main" xmlns:r="http://schemas.openxmlformats.org/officeDocument/2006/relationships" xmlns:p="http://schemas.openxmlformats.org/presentationml/2006/main">
   <p:cSld>
     <p:bg>
@@ -21067,2383 +23891,7 @@
 </p:sld>
 </file>
 
-<file path=ppt/slides/slide20.xml><?xml version="1.0" encoding="utf-8"?>
-<p:sld xmlns:a="http://schemas.openxmlformats.org/drawingml/2006/main" xmlns:r="http://schemas.openxmlformats.org/officeDocument/2006/relationships" xmlns:p="http://schemas.openxmlformats.org/presentationml/2006/main">
-  <p:cSld>
-    <p:bg>
-      <p:bgPr>
-        <a:solidFill>
-          <a:schemeClr val="lt1"/>
-        </a:solidFill>
-        <a:effectLst/>
-      </p:bgPr>
-    </p:bg>
-    <p:spTree>
-      <p:nvGrpSpPr>
-        <p:cNvPr id="1" name="Shape 347"/>
-        <p:cNvGrpSpPr/>
-        <p:nvPr/>
-      </p:nvGrpSpPr>
-      <p:grpSpPr>
-        <a:xfrm>
-          <a:off x="0" y="0"/>
-          <a:ext cx="0" cy="0"/>
-          <a:chOff x="0" y="0"/>
-          <a:chExt cx="0" cy="0"/>
-        </a:xfrm>
-      </p:grpSpPr>
-      <p:sp>
-        <p:nvSpPr>
-          <p:cNvPr id="348" name="Google Shape;348;p16"/>
-          <p:cNvSpPr/>
-          <p:nvPr/>
-        </p:nvSpPr>
-        <p:spPr>
-          <a:xfrm>
-            <a:off x="0" y="0"/>
-            <a:ext cx="12192000" cy="6858000"/>
-          </a:xfrm>
-          <a:prstGeom prst="rect">
-            <a:avLst/>
-          </a:prstGeom>
-          <a:solidFill>
-            <a:schemeClr val="lt1"/>
-          </a:solidFill>
-          <a:ln>
-            <a:noFill/>
-          </a:ln>
-        </p:spPr>
-        <p:txBody>
-          <a:bodyPr spcFirstLastPara="1" wrap="square" lIns="91425" tIns="45700" rIns="91425" bIns="45700" anchor="ctr" anchorCtr="0">
-            <a:noAutofit/>
-          </a:bodyPr>
-          <a:lstStyle/>
-          <a:p>
-            <a:pPr marL="0" marR="0" lvl="0" indent="0" algn="ctr" rtl="0">
-              <a:spcBef>
-                <a:spcPts val="0"/>
-              </a:spcBef>
-              <a:spcAft>
-                <a:spcPts val="0"/>
-              </a:spcAft>
-              <a:buNone/>
-            </a:pPr>
-            <a:endParaRPr sz="1800" b="0" i="0" u="none" strike="noStrike" cap="none">
-              <a:solidFill>
-                <a:schemeClr val="lt1"/>
-              </a:solidFill>
-              <a:latin typeface="Calibri"/>
-              <a:ea typeface="Calibri"/>
-              <a:cs typeface="Calibri"/>
-              <a:sym typeface="Calibri"/>
-            </a:endParaRPr>
-          </a:p>
-        </p:txBody>
-      </p:sp>
-      <p:sp>
-        <p:nvSpPr>
-          <p:cNvPr id="349" name="Google Shape;349;p16"/>
-          <p:cNvSpPr/>
-          <p:nvPr/>
-        </p:nvSpPr>
-        <p:spPr>
-          <a:xfrm flipH="1">
-            <a:off x="-3" y="-1"/>
-            <a:ext cx="12192000" cy="1590600"/>
-          </a:xfrm>
-          <a:prstGeom prst="rect">
-            <a:avLst/>
-          </a:prstGeom>
-          <a:gradFill>
-            <a:gsLst>
-              <a:gs pos="0">
-                <a:srgbClr val="000000"/>
-              </a:gs>
-              <a:gs pos="100000">
-                <a:srgbClr val="2F5496"/>
-              </a:gs>
-            </a:gsLst>
-            <a:lin ang="8400134" scaled="0"/>
-          </a:gradFill>
-          <a:ln>
-            <a:noFill/>
-          </a:ln>
-        </p:spPr>
-        <p:txBody>
-          <a:bodyPr spcFirstLastPara="1" wrap="square" lIns="91425" tIns="45700" rIns="91425" bIns="45700" anchor="ctr" anchorCtr="0">
-            <a:noAutofit/>
-          </a:bodyPr>
-          <a:lstStyle/>
-          <a:p>
-            <a:pPr marL="0" marR="0" lvl="0" indent="0" algn="ctr" rtl="0">
-              <a:spcBef>
-                <a:spcPts val="0"/>
-              </a:spcBef>
-              <a:spcAft>
-                <a:spcPts val="0"/>
-              </a:spcAft>
-              <a:buNone/>
-            </a:pPr>
-            <a:endParaRPr sz="1800" b="0" i="0" u="none" strike="noStrike" cap="none">
-              <a:solidFill>
-                <a:schemeClr val="lt1"/>
-              </a:solidFill>
-              <a:latin typeface="Calibri"/>
-              <a:ea typeface="Calibri"/>
-              <a:cs typeface="Calibri"/>
-              <a:sym typeface="Calibri"/>
-            </a:endParaRPr>
-          </a:p>
-        </p:txBody>
-      </p:sp>
-      <p:sp>
-        <p:nvSpPr>
-          <p:cNvPr id="350" name="Google Shape;350;p16"/>
-          <p:cNvSpPr/>
-          <p:nvPr/>
-        </p:nvSpPr>
-        <p:spPr>
-          <a:xfrm rot="10800000" flipH="1">
-            <a:off x="-3" y="142"/>
-            <a:ext cx="8115300" cy="1590600"/>
-          </a:xfrm>
-          <a:prstGeom prst="rect">
-            <a:avLst/>
-          </a:prstGeom>
-          <a:gradFill>
-            <a:gsLst>
-              <a:gs pos="0">
-                <a:srgbClr val="4472C4">
-                  <a:alpha val="0"/>
-                </a:srgbClr>
-              </a:gs>
-              <a:gs pos="20000">
-                <a:srgbClr val="4472C4">
-                  <a:alpha val="0"/>
-                </a:srgbClr>
-              </a:gs>
-              <a:gs pos="100000">
-                <a:srgbClr val="1F3864">
-                  <a:alpha val="54901"/>
-                </a:srgbClr>
-              </a:gs>
-            </a:gsLst>
-            <a:lin ang="13800146" scaled="0"/>
-          </a:gradFill>
-          <a:ln>
-            <a:noFill/>
-          </a:ln>
-        </p:spPr>
-        <p:txBody>
-          <a:bodyPr spcFirstLastPara="1" wrap="square" lIns="91425" tIns="45700" rIns="91425" bIns="45700" anchor="ctr" anchorCtr="0">
-            <a:noAutofit/>
-          </a:bodyPr>
-          <a:lstStyle/>
-          <a:p>
-            <a:pPr marL="0" marR="0" lvl="0" indent="0" algn="ctr" rtl="0">
-              <a:spcBef>
-                <a:spcPts val="0"/>
-              </a:spcBef>
-              <a:spcAft>
-                <a:spcPts val="0"/>
-              </a:spcAft>
-              <a:buNone/>
-            </a:pPr>
-            <a:endParaRPr sz="1800" b="0" i="0" u="none" strike="noStrike" cap="none">
-              <a:solidFill>
-                <a:schemeClr val="lt1"/>
-              </a:solidFill>
-              <a:latin typeface="Calibri"/>
-              <a:ea typeface="Calibri"/>
-              <a:cs typeface="Calibri"/>
-              <a:sym typeface="Calibri"/>
-            </a:endParaRPr>
-          </a:p>
-        </p:txBody>
-      </p:sp>
-      <p:sp>
-        <p:nvSpPr>
-          <p:cNvPr id="351" name="Google Shape;351;p16"/>
-          <p:cNvSpPr txBox="1">
-            <a:spLocks noGrp="1"/>
-          </p:cNvSpPr>
-          <p:nvPr>
-            <p:ph type="title"/>
-          </p:nvPr>
-        </p:nvSpPr>
-        <p:spPr>
-          <a:xfrm>
-            <a:off x="1371600" y="347472"/>
-            <a:ext cx="10040100" cy="877800"/>
-          </a:xfrm>
-          <a:prstGeom prst="rect">
-            <a:avLst/>
-          </a:prstGeom>
-          <a:noFill/>
-          <a:ln>
-            <a:noFill/>
-          </a:ln>
-        </p:spPr>
-        <p:txBody>
-          <a:bodyPr spcFirstLastPara="1" wrap="square" lIns="91425" tIns="45700" rIns="91425" bIns="45700" anchor="ctr" anchorCtr="0">
-            <a:normAutofit/>
-          </a:bodyPr>
-          <a:lstStyle/>
-          <a:p>
-            <a:pPr marL="0" lvl="0" indent="0" algn="l" rtl="0">
-              <a:lnSpc>
-                <a:spcPct val="90000"/>
-              </a:lnSpc>
-              <a:spcBef>
-                <a:spcPts val="0"/>
-              </a:spcBef>
-              <a:spcAft>
-                <a:spcPts val="0"/>
-              </a:spcAft>
-              <a:buClr>
-                <a:srgbClr val="FFFFFF"/>
-              </a:buClr>
-              <a:buSzPts val="4000"/>
-              <a:buFont typeface="Calibri"/>
-              <a:buNone/>
-            </a:pPr>
-            <a:r>
-              <a:rPr lang="en-US" sz="4000">
-                <a:solidFill>
-                  <a:srgbClr val="FFFFFF"/>
-                </a:solidFill>
-                <a:latin typeface="Calibri"/>
-                <a:ea typeface="Calibri"/>
-                <a:cs typeface="Calibri"/>
-                <a:sym typeface="Calibri"/>
-              </a:rPr>
-              <a:t>Demo - Formatting Output</a:t>
-            </a:r>
-            <a:endParaRPr/>
-          </a:p>
-        </p:txBody>
-      </p:sp>
-      <p:pic>
-        <p:nvPicPr>
-          <p:cNvPr id="352" name="Google Shape;352;p16" descr="Monitor"/>
-          <p:cNvPicPr preferRelativeResize="0"/>
-          <p:nvPr/>
-        </p:nvPicPr>
-        <p:blipFill rotWithShape="1">
-          <a:blip r:embed="rId3">
-            <a:alphaModFix/>
-          </a:blip>
-          <a:srcRect/>
-          <a:stretch/>
-        </p:blipFill>
-        <p:spPr>
-          <a:xfrm>
-            <a:off x="704088" y="1966293"/>
-            <a:ext cx="4452160" cy="4452160"/>
-          </a:xfrm>
-          <a:prstGeom prst="rect">
-            <a:avLst/>
-          </a:prstGeom>
-          <a:noFill/>
-          <a:ln>
-            <a:noFill/>
-          </a:ln>
-        </p:spPr>
-      </p:pic>
-      <p:sp>
-        <p:nvSpPr>
-          <p:cNvPr id="353" name="Google Shape;353;p16"/>
-          <p:cNvSpPr txBox="1">
-            <a:spLocks noGrp="1"/>
-          </p:cNvSpPr>
-          <p:nvPr>
-            <p:ph type="body" idx="2"/>
-          </p:nvPr>
-        </p:nvSpPr>
-        <p:spPr>
-          <a:xfrm>
-            <a:off x="6172200" y="1825625"/>
-            <a:ext cx="5181600" cy="4351200"/>
-          </a:xfrm>
-          <a:prstGeom prst="rect">
-            <a:avLst/>
-          </a:prstGeom>
-        </p:spPr>
-        <p:txBody>
-          <a:bodyPr spcFirstLastPara="1" wrap="square" lIns="91425" tIns="45700" rIns="91425" bIns="45700" anchor="t" anchorCtr="0">
-            <a:normAutofit/>
-          </a:bodyPr>
-          <a:lstStyle/>
-          <a:p>
-            <a:pPr marL="0" lvl="0" indent="0" algn="l" rtl="0">
-              <a:spcBef>
-                <a:spcPts val="1000"/>
-              </a:spcBef>
-              <a:spcAft>
-                <a:spcPts val="0"/>
-              </a:spcAft>
-              <a:buNone/>
-            </a:pPr>
-            <a:r>
-              <a:rPr lang="en-US"/>
-              <a:t>Ways to format the object:</a:t>
-            </a:r>
-            <a:endParaRPr/>
-          </a:p>
-          <a:p>
-            <a:pPr marL="457200" lvl="0" indent="-342900" algn="l" rtl="0">
-              <a:spcBef>
-                <a:spcPts val="1000"/>
-              </a:spcBef>
-              <a:spcAft>
-                <a:spcPts val="0"/>
-              </a:spcAft>
-              <a:buSzPts val="1800"/>
-              <a:buChar char="●"/>
-            </a:pPr>
-            <a:r>
-              <a:rPr lang="en-US"/>
-              <a:t>Sort-Object</a:t>
-            </a:r>
-            <a:endParaRPr/>
-          </a:p>
-          <a:p>
-            <a:pPr marL="457200" lvl="0" indent="-342900" algn="l" rtl="0">
-              <a:spcBef>
-                <a:spcPts val="0"/>
-              </a:spcBef>
-              <a:spcAft>
-                <a:spcPts val="0"/>
-              </a:spcAft>
-              <a:buSzPts val="1800"/>
-              <a:buChar char="●"/>
-            </a:pPr>
-            <a:r>
-              <a:rPr lang="en-US"/>
-              <a:t>Format-List</a:t>
-            </a:r>
-            <a:endParaRPr/>
-          </a:p>
-          <a:p>
-            <a:pPr marL="457200" lvl="0" indent="-342900" algn="l" rtl="0">
-              <a:spcBef>
-                <a:spcPts val="0"/>
-              </a:spcBef>
-              <a:spcAft>
-                <a:spcPts val="0"/>
-              </a:spcAft>
-              <a:buSzPts val="1800"/>
-              <a:buChar char="●"/>
-            </a:pPr>
-            <a:r>
-              <a:rPr lang="en-US"/>
-              <a:t>Format-Table</a:t>
-            </a:r>
-            <a:endParaRPr/>
-          </a:p>
-          <a:p>
-            <a:pPr marL="457200" lvl="0" indent="-342900" algn="l" rtl="0">
-              <a:spcBef>
-                <a:spcPts val="0"/>
-              </a:spcBef>
-              <a:spcAft>
-                <a:spcPts val="0"/>
-              </a:spcAft>
-              <a:buSzPts val="1800"/>
-              <a:buChar char="●"/>
-            </a:pPr>
-            <a:r>
-              <a:rPr lang="en-US"/>
-              <a:t>Out-Gridview</a:t>
-            </a:r>
-            <a:endParaRPr/>
-          </a:p>
-          <a:p>
-            <a:pPr marL="457200" lvl="0" indent="-342900" algn="l" rtl="0">
-              <a:spcBef>
-                <a:spcPts val="0"/>
-              </a:spcBef>
-              <a:spcAft>
-                <a:spcPts val="0"/>
-              </a:spcAft>
-              <a:buSzPts val="1800"/>
-              <a:buChar char="●"/>
-            </a:pPr>
-            <a:r>
-              <a:rPr lang="en-US"/>
-              <a:t>Write-Out</a:t>
-            </a:r>
-            <a:endParaRPr/>
-          </a:p>
-          <a:p>
-            <a:pPr marL="457200" lvl="0" indent="-342900" algn="l" rtl="0">
-              <a:spcBef>
-                <a:spcPts val="0"/>
-              </a:spcBef>
-              <a:spcAft>
-                <a:spcPts val="0"/>
-              </a:spcAft>
-              <a:buSzPts val="1800"/>
-              <a:buChar char="●"/>
-            </a:pPr>
-            <a:r>
-              <a:rPr lang="en-US"/>
-              <a:t>Write-Verbose</a:t>
-            </a:r>
-            <a:endParaRPr/>
-          </a:p>
-        </p:txBody>
-      </p:sp>
-    </p:spTree>
-  </p:cSld>
-  <p:clrMapOvr>
-    <a:masterClrMapping/>
-  </p:clrMapOvr>
-</p:sld>
-</file>
-
-<file path=ppt/slides/slide21.xml><?xml version="1.0" encoding="utf-8"?>
-<p:sld xmlns:a="http://schemas.openxmlformats.org/drawingml/2006/main" xmlns:r="http://schemas.openxmlformats.org/officeDocument/2006/relationships" xmlns:p="http://schemas.openxmlformats.org/presentationml/2006/main">
-  <p:cSld>
-    <p:bg>
-      <p:bgPr>
-        <a:solidFill>
-          <a:schemeClr val="lt1"/>
-        </a:solidFill>
-        <a:effectLst/>
-      </p:bgPr>
-    </p:bg>
-    <p:spTree>
-      <p:nvGrpSpPr>
-        <p:cNvPr id="1" name="Shape 358"/>
-        <p:cNvGrpSpPr/>
-        <p:nvPr/>
-      </p:nvGrpSpPr>
-      <p:grpSpPr>
-        <a:xfrm>
-          <a:off x="0" y="0"/>
-          <a:ext cx="0" cy="0"/>
-          <a:chOff x="0" y="0"/>
-          <a:chExt cx="0" cy="0"/>
-        </a:xfrm>
-      </p:grpSpPr>
-      <p:sp>
-        <p:nvSpPr>
-          <p:cNvPr id="359" name="Google Shape;359;g212d64ab2ef_1_23"/>
-          <p:cNvSpPr/>
-          <p:nvPr/>
-        </p:nvSpPr>
-        <p:spPr>
-          <a:xfrm>
-            <a:off x="0" y="0"/>
-            <a:ext cx="12192000" cy="6858000"/>
-          </a:xfrm>
-          <a:prstGeom prst="rect">
-            <a:avLst/>
-          </a:prstGeom>
-          <a:solidFill>
-            <a:schemeClr val="lt1"/>
-          </a:solidFill>
-          <a:ln>
-            <a:noFill/>
-          </a:ln>
-        </p:spPr>
-        <p:txBody>
-          <a:bodyPr spcFirstLastPara="1" wrap="square" lIns="91425" tIns="45700" rIns="91425" bIns="45700" anchor="ctr" anchorCtr="0">
-            <a:noAutofit/>
-          </a:bodyPr>
-          <a:lstStyle/>
-          <a:p>
-            <a:pPr marL="0" marR="0" lvl="0" indent="0" algn="ctr" rtl="0">
-              <a:spcBef>
-                <a:spcPts val="0"/>
-              </a:spcBef>
-              <a:spcAft>
-                <a:spcPts val="0"/>
-              </a:spcAft>
-              <a:buNone/>
-            </a:pPr>
-            <a:endParaRPr sz="1800" b="0" i="0" u="none" strike="noStrike" cap="none">
-              <a:solidFill>
-                <a:schemeClr val="lt1"/>
-              </a:solidFill>
-              <a:latin typeface="Calibri"/>
-              <a:ea typeface="Calibri"/>
-              <a:cs typeface="Calibri"/>
-              <a:sym typeface="Calibri"/>
-            </a:endParaRPr>
-          </a:p>
-        </p:txBody>
-      </p:sp>
-      <p:sp>
-        <p:nvSpPr>
-          <p:cNvPr id="360" name="Google Shape;360;g212d64ab2ef_1_23"/>
-          <p:cNvSpPr/>
-          <p:nvPr/>
-        </p:nvSpPr>
-        <p:spPr>
-          <a:xfrm flipH="1">
-            <a:off x="-3" y="-1"/>
-            <a:ext cx="12192000" cy="1590600"/>
-          </a:xfrm>
-          <a:prstGeom prst="rect">
-            <a:avLst/>
-          </a:prstGeom>
-          <a:gradFill>
-            <a:gsLst>
-              <a:gs pos="0">
-                <a:srgbClr val="000000"/>
-              </a:gs>
-              <a:gs pos="100000">
-                <a:srgbClr val="2F5496"/>
-              </a:gs>
-            </a:gsLst>
-            <a:lin ang="8400134" scaled="0"/>
-          </a:gradFill>
-          <a:ln>
-            <a:noFill/>
-          </a:ln>
-        </p:spPr>
-        <p:txBody>
-          <a:bodyPr spcFirstLastPara="1" wrap="square" lIns="91425" tIns="45700" rIns="91425" bIns="45700" anchor="ctr" anchorCtr="0">
-            <a:noAutofit/>
-          </a:bodyPr>
-          <a:lstStyle/>
-          <a:p>
-            <a:pPr marL="0" marR="0" lvl="0" indent="0" algn="ctr" rtl="0">
-              <a:spcBef>
-                <a:spcPts val="0"/>
-              </a:spcBef>
-              <a:spcAft>
-                <a:spcPts val="0"/>
-              </a:spcAft>
-              <a:buNone/>
-            </a:pPr>
-            <a:endParaRPr sz="1800" b="0" i="0" u="none" strike="noStrike" cap="none">
-              <a:solidFill>
-                <a:schemeClr val="lt1"/>
-              </a:solidFill>
-              <a:latin typeface="Calibri"/>
-              <a:ea typeface="Calibri"/>
-              <a:cs typeface="Calibri"/>
-              <a:sym typeface="Calibri"/>
-            </a:endParaRPr>
-          </a:p>
-        </p:txBody>
-      </p:sp>
-      <p:sp>
-        <p:nvSpPr>
-          <p:cNvPr id="361" name="Google Shape;361;g212d64ab2ef_1_23"/>
-          <p:cNvSpPr/>
-          <p:nvPr/>
-        </p:nvSpPr>
-        <p:spPr>
-          <a:xfrm rot="10800000" flipH="1">
-            <a:off x="-3" y="142"/>
-            <a:ext cx="8115300" cy="1590600"/>
-          </a:xfrm>
-          <a:prstGeom prst="rect">
-            <a:avLst/>
-          </a:prstGeom>
-          <a:gradFill>
-            <a:gsLst>
-              <a:gs pos="0">
-                <a:srgbClr val="4472C4">
-                  <a:alpha val="0"/>
-                </a:srgbClr>
-              </a:gs>
-              <a:gs pos="20000">
-                <a:srgbClr val="4472C4">
-                  <a:alpha val="0"/>
-                </a:srgbClr>
-              </a:gs>
-              <a:gs pos="100000">
-                <a:srgbClr val="1F3864">
-                  <a:alpha val="54901"/>
-                </a:srgbClr>
-              </a:gs>
-            </a:gsLst>
-            <a:lin ang="13800146" scaled="0"/>
-          </a:gradFill>
-          <a:ln>
-            <a:noFill/>
-          </a:ln>
-        </p:spPr>
-        <p:txBody>
-          <a:bodyPr spcFirstLastPara="1" wrap="square" lIns="91425" tIns="45700" rIns="91425" bIns="45700" anchor="ctr" anchorCtr="0">
-            <a:noAutofit/>
-          </a:bodyPr>
-          <a:lstStyle/>
-          <a:p>
-            <a:pPr marL="0" marR="0" lvl="0" indent="0" algn="ctr" rtl="0">
-              <a:spcBef>
-                <a:spcPts val="0"/>
-              </a:spcBef>
-              <a:spcAft>
-                <a:spcPts val="0"/>
-              </a:spcAft>
-              <a:buNone/>
-            </a:pPr>
-            <a:endParaRPr sz="1800" b="0" i="0" u="none" strike="noStrike" cap="none">
-              <a:solidFill>
-                <a:schemeClr val="lt1"/>
-              </a:solidFill>
-              <a:latin typeface="Calibri"/>
-              <a:ea typeface="Calibri"/>
-              <a:cs typeface="Calibri"/>
-              <a:sym typeface="Calibri"/>
-            </a:endParaRPr>
-          </a:p>
-        </p:txBody>
-      </p:sp>
-      <p:sp>
-        <p:nvSpPr>
-          <p:cNvPr id="362" name="Google Shape;362;g212d64ab2ef_1_23"/>
-          <p:cNvSpPr txBox="1">
-            <a:spLocks noGrp="1"/>
-          </p:cNvSpPr>
-          <p:nvPr>
-            <p:ph type="title"/>
-          </p:nvPr>
-        </p:nvSpPr>
-        <p:spPr>
-          <a:xfrm>
-            <a:off x="1371599" y="294538"/>
-            <a:ext cx="9896100" cy="1033800"/>
-          </a:xfrm>
-          <a:prstGeom prst="rect">
-            <a:avLst/>
-          </a:prstGeom>
-          <a:noFill/>
-          <a:ln>
-            <a:noFill/>
-          </a:ln>
-        </p:spPr>
-        <p:txBody>
-          <a:bodyPr spcFirstLastPara="1" wrap="square" lIns="91425" tIns="45700" rIns="91425" bIns="45700" anchor="ctr" anchorCtr="0">
-            <a:normAutofit/>
-          </a:bodyPr>
-          <a:lstStyle/>
-          <a:p>
-            <a:pPr marL="0" lvl="0" indent="0" algn="l" rtl="0">
-              <a:lnSpc>
-                <a:spcPct val="90000"/>
-              </a:lnSpc>
-              <a:spcBef>
-                <a:spcPts val="0"/>
-              </a:spcBef>
-              <a:spcAft>
-                <a:spcPts val="0"/>
-              </a:spcAft>
-              <a:buClr>
-                <a:srgbClr val="FFFFFF"/>
-              </a:buClr>
-              <a:buSzPts val="4000"/>
-              <a:buFont typeface="Calibri"/>
-              <a:buNone/>
-            </a:pPr>
-            <a:r>
-              <a:rPr lang="en-US" sz="4000">
-                <a:solidFill>
-                  <a:srgbClr val="FFFFFF"/>
-                </a:solidFill>
-              </a:rPr>
-              <a:t>Looping</a:t>
-            </a:r>
-            <a:endParaRPr/>
-          </a:p>
-        </p:txBody>
-      </p:sp>
-      <p:sp>
-        <p:nvSpPr>
-          <p:cNvPr id="363" name="Google Shape;363;g212d64ab2ef_1_23"/>
-          <p:cNvSpPr txBox="1">
-            <a:spLocks noGrp="1"/>
-          </p:cNvSpPr>
-          <p:nvPr>
-            <p:ph type="body" idx="1"/>
-          </p:nvPr>
-        </p:nvSpPr>
-        <p:spPr>
-          <a:xfrm>
-            <a:off x="1371599" y="2318197"/>
-            <a:ext cx="9723900" cy="3683400"/>
-          </a:xfrm>
-          <a:prstGeom prst="rect">
-            <a:avLst/>
-          </a:prstGeom>
-          <a:noFill/>
-          <a:ln>
-            <a:noFill/>
-          </a:ln>
-        </p:spPr>
-        <p:txBody>
-          <a:bodyPr spcFirstLastPara="1" wrap="square" lIns="91425" tIns="45700" rIns="91425" bIns="45700" anchor="ctr" anchorCtr="0">
-            <a:normAutofit/>
-          </a:bodyPr>
-          <a:lstStyle/>
-          <a:p>
-            <a:pPr marL="228600" lvl="0" indent="-101600" algn="l" rtl="0">
-              <a:lnSpc>
-                <a:spcPct val="90000"/>
-              </a:lnSpc>
-              <a:spcBef>
-                <a:spcPts val="0"/>
-              </a:spcBef>
-              <a:spcAft>
-                <a:spcPts val="0"/>
-              </a:spcAft>
-              <a:buClr>
-                <a:schemeClr val="dk1"/>
-              </a:buClr>
-              <a:buSzPts val="2000"/>
-              <a:buNone/>
-            </a:pPr>
-            <a:r>
-              <a:rPr lang="en-US" sz="2000" dirty="0"/>
-              <a:t>Just like most programming languages, you can write loops in PowerShell.</a:t>
-            </a:r>
-            <a:endParaRPr sz="2000" dirty="0"/>
-          </a:p>
-          <a:p>
-            <a:pPr marL="228600" lvl="0" indent="-101600" algn="l" rtl="0">
-              <a:lnSpc>
-                <a:spcPct val="90000"/>
-              </a:lnSpc>
-              <a:spcBef>
-                <a:spcPts val="0"/>
-              </a:spcBef>
-              <a:spcAft>
-                <a:spcPts val="0"/>
-              </a:spcAft>
-              <a:buClr>
-                <a:schemeClr val="dk1"/>
-              </a:buClr>
-              <a:buSzPts val="2000"/>
-              <a:buNone/>
-            </a:pPr>
-            <a:r>
-              <a:rPr lang="en-US" sz="2000" dirty="0"/>
-              <a:t>There’s 4 basic types of loops </a:t>
-            </a:r>
-            <a:endParaRPr sz="2000" dirty="0"/>
-          </a:p>
-          <a:p>
-            <a:pPr marL="457200" lvl="0" indent="-355600" algn="l" rtl="0">
-              <a:lnSpc>
-                <a:spcPct val="90000"/>
-              </a:lnSpc>
-              <a:spcBef>
-                <a:spcPts val="0"/>
-              </a:spcBef>
-              <a:spcAft>
-                <a:spcPts val="0"/>
-              </a:spcAft>
-              <a:buSzPts val="2000"/>
-              <a:buChar char="●"/>
-            </a:pPr>
-            <a:r>
-              <a:rPr lang="en-US" sz="2000" dirty="0"/>
-              <a:t>For - for looping with a built-in counter</a:t>
-            </a:r>
-            <a:endParaRPr sz="2000" dirty="0"/>
-          </a:p>
-          <a:p>
-            <a:pPr marL="457200" lvl="0" indent="-355600" algn="l" rtl="0">
-              <a:lnSpc>
-                <a:spcPct val="90000"/>
-              </a:lnSpc>
-              <a:spcBef>
-                <a:spcPts val="0"/>
-              </a:spcBef>
-              <a:spcAft>
-                <a:spcPts val="0"/>
-              </a:spcAft>
-              <a:buSzPts val="2000"/>
-              <a:buChar char="●"/>
-            </a:pPr>
-            <a:r>
-              <a:rPr lang="en-US" sz="2000" dirty="0"/>
-              <a:t>Foreach (x in y) - for looping through a collection or array</a:t>
-            </a:r>
-            <a:endParaRPr sz="2000" dirty="0"/>
-          </a:p>
-          <a:p>
-            <a:pPr marL="457200" lvl="0" indent="-355600" algn="l" rtl="0">
-              <a:lnSpc>
-                <a:spcPct val="90000"/>
-              </a:lnSpc>
-              <a:spcBef>
-                <a:spcPts val="0"/>
-              </a:spcBef>
-              <a:spcAft>
-                <a:spcPts val="0"/>
-              </a:spcAft>
-              <a:buSzPts val="2000"/>
-              <a:buChar char="●"/>
-            </a:pPr>
-            <a:r>
-              <a:rPr lang="en-US" sz="2000" dirty="0"/>
-              <a:t>Do &amp; While - Repeats until a condition is true.</a:t>
-            </a:r>
-            <a:endParaRPr sz="2000" dirty="0"/>
-          </a:p>
-          <a:p>
-            <a:pPr marL="228600" lvl="0" indent="-101600" algn="l" rtl="0">
-              <a:lnSpc>
-                <a:spcPct val="90000"/>
-              </a:lnSpc>
-              <a:spcBef>
-                <a:spcPts val="0"/>
-              </a:spcBef>
-              <a:spcAft>
-                <a:spcPts val="0"/>
-              </a:spcAft>
-              <a:buClr>
-                <a:schemeClr val="dk1"/>
-              </a:buClr>
-              <a:buSzPts val="2000"/>
-              <a:buNone/>
-            </a:pPr>
-            <a:endParaRPr sz="2000" dirty="0"/>
-          </a:p>
-          <a:p>
-            <a:pPr marL="228600" lvl="0" indent="-101600" algn="l" rtl="0">
-              <a:lnSpc>
-                <a:spcPct val="90000"/>
-              </a:lnSpc>
-              <a:spcBef>
-                <a:spcPts val="0"/>
-              </a:spcBef>
-              <a:spcAft>
-                <a:spcPts val="0"/>
-              </a:spcAft>
-              <a:buClr>
-                <a:schemeClr val="dk1"/>
-              </a:buClr>
-              <a:buSzPts val="2000"/>
-              <a:buNone/>
-            </a:pPr>
-            <a:r>
-              <a:rPr lang="en-US" sz="2000" dirty="0"/>
-              <a:t>And </a:t>
-            </a:r>
-            <a:r>
-              <a:rPr lang="en-US" sz="2000" dirty="0" err="1"/>
-              <a:t>and</a:t>
-            </a:r>
-            <a:r>
-              <a:rPr lang="en-US" sz="2000" dirty="0"/>
-              <a:t> one that you can use with pipelines:</a:t>
-            </a:r>
-            <a:endParaRPr sz="2000" dirty="0"/>
-          </a:p>
-          <a:p>
-            <a:pPr marL="457200" lvl="0" indent="-355600" algn="l" rtl="0">
-              <a:lnSpc>
-                <a:spcPct val="90000"/>
-              </a:lnSpc>
-              <a:spcBef>
-                <a:spcPts val="0"/>
-              </a:spcBef>
-              <a:spcAft>
-                <a:spcPts val="0"/>
-              </a:spcAft>
-              <a:buSzPts val="2000"/>
-              <a:buChar char="●"/>
-            </a:pPr>
-            <a:r>
-              <a:rPr lang="en-US" sz="2000" dirty="0"/>
-              <a:t>Foreach-Object</a:t>
-            </a:r>
-            <a:endParaRPr sz="2000" dirty="0"/>
-          </a:p>
-        </p:txBody>
-      </p:sp>
-    </p:spTree>
-  </p:cSld>
-  <p:clrMapOvr>
-    <a:masterClrMapping/>
-  </p:clrMapOvr>
-</p:sld>
-</file>
-
-<file path=ppt/slides/slide22.xml><?xml version="1.0" encoding="utf-8"?>
-<p:sld xmlns:a="http://schemas.openxmlformats.org/drawingml/2006/main" xmlns:r="http://schemas.openxmlformats.org/officeDocument/2006/relationships" xmlns:p="http://schemas.openxmlformats.org/presentationml/2006/main">
-  <p:cSld>
-    <p:bg>
-      <p:bgPr>
-        <a:solidFill>
-          <a:schemeClr val="lt1"/>
-        </a:solidFill>
-        <a:effectLst/>
-      </p:bgPr>
-    </p:bg>
-    <p:spTree>
-      <p:nvGrpSpPr>
-        <p:cNvPr id="1" name="Shape 368"/>
-        <p:cNvGrpSpPr/>
-        <p:nvPr/>
-      </p:nvGrpSpPr>
-      <p:grpSpPr>
-        <a:xfrm>
-          <a:off x="0" y="0"/>
-          <a:ext cx="0" cy="0"/>
-          <a:chOff x="0" y="0"/>
-          <a:chExt cx="0" cy="0"/>
-        </a:xfrm>
-      </p:grpSpPr>
-      <p:sp>
-        <p:nvSpPr>
-          <p:cNvPr id="369" name="Google Shape;369;p18"/>
-          <p:cNvSpPr/>
-          <p:nvPr/>
-        </p:nvSpPr>
-        <p:spPr>
-          <a:xfrm>
-            <a:off x="0" y="0"/>
-            <a:ext cx="12192000" cy="6858000"/>
-          </a:xfrm>
-          <a:prstGeom prst="rect">
-            <a:avLst/>
-          </a:prstGeom>
-          <a:solidFill>
-            <a:schemeClr val="lt1"/>
-          </a:solidFill>
-          <a:ln>
-            <a:noFill/>
-          </a:ln>
-        </p:spPr>
-        <p:txBody>
-          <a:bodyPr spcFirstLastPara="1" wrap="square" lIns="91425" tIns="45700" rIns="91425" bIns="45700" anchor="ctr" anchorCtr="0">
-            <a:noAutofit/>
-          </a:bodyPr>
-          <a:lstStyle/>
-          <a:p>
-            <a:pPr marL="0" marR="0" lvl="0" indent="0" algn="ctr" rtl="0">
-              <a:spcBef>
-                <a:spcPts val="0"/>
-              </a:spcBef>
-              <a:spcAft>
-                <a:spcPts val="0"/>
-              </a:spcAft>
-              <a:buNone/>
-            </a:pPr>
-            <a:endParaRPr sz="1800" b="0" i="0" u="none" strike="noStrike" cap="none">
-              <a:solidFill>
-                <a:schemeClr val="lt1"/>
-              </a:solidFill>
-              <a:latin typeface="Calibri"/>
-              <a:ea typeface="Calibri"/>
-              <a:cs typeface="Calibri"/>
-              <a:sym typeface="Calibri"/>
-            </a:endParaRPr>
-          </a:p>
-        </p:txBody>
-      </p:sp>
-      <p:sp>
-        <p:nvSpPr>
-          <p:cNvPr id="370" name="Google Shape;370;p18"/>
-          <p:cNvSpPr/>
-          <p:nvPr/>
-        </p:nvSpPr>
-        <p:spPr>
-          <a:xfrm flipH="1">
-            <a:off x="-3" y="-1"/>
-            <a:ext cx="12192000" cy="1590600"/>
-          </a:xfrm>
-          <a:prstGeom prst="rect">
-            <a:avLst/>
-          </a:prstGeom>
-          <a:gradFill>
-            <a:gsLst>
-              <a:gs pos="0">
-                <a:srgbClr val="000000"/>
-              </a:gs>
-              <a:gs pos="100000">
-                <a:srgbClr val="2F5496"/>
-              </a:gs>
-            </a:gsLst>
-            <a:lin ang="8400134" scaled="0"/>
-          </a:gradFill>
-          <a:ln>
-            <a:noFill/>
-          </a:ln>
-        </p:spPr>
-        <p:txBody>
-          <a:bodyPr spcFirstLastPara="1" wrap="square" lIns="91425" tIns="45700" rIns="91425" bIns="45700" anchor="ctr" anchorCtr="0">
-            <a:noAutofit/>
-          </a:bodyPr>
-          <a:lstStyle/>
-          <a:p>
-            <a:pPr marL="0" marR="0" lvl="0" indent="0" algn="ctr" rtl="0">
-              <a:spcBef>
-                <a:spcPts val="0"/>
-              </a:spcBef>
-              <a:spcAft>
-                <a:spcPts val="0"/>
-              </a:spcAft>
-              <a:buNone/>
-            </a:pPr>
-            <a:endParaRPr sz="1800" b="0" i="0" u="none" strike="noStrike" cap="none">
-              <a:solidFill>
-                <a:schemeClr val="lt1"/>
-              </a:solidFill>
-              <a:latin typeface="Calibri"/>
-              <a:ea typeface="Calibri"/>
-              <a:cs typeface="Calibri"/>
-              <a:sym typeface="Calibri"/>
-            </a:endParaRPr>
-          </a:p>
-        </p:txBody>
-      </p:sp>
-      <p:sp>
-        <p:nvSpPr>
-          <p:cNvPr id="371" name="Google Shape;371;p18"/>
-          <p:cNvSpPr/>
-          <p:nvPr/>
-        </p:nvSpPr>
-        <p:spPr>
-          <a:xfrm rot="10800000" flipH="1">
-            <a:off x="-3" y="142"/>
-            <a:ext cx="8115300" cy="1590600"/>
-          </a:xfrm>
-          <a:prstGeom prst="rect">
-            <a:avLst/>
-          </a:prstGeom>
-          <a:gradFill>
-            <a:gsLst>
-              <a:gs pos="0">
-                <a:srgbClr val="4472C4">
-                  <a:alpha val="0"/>
-                </a:srgbClr>
-              </a:gs>
-              <a:gs pos="20000">
-                <a:srgbClr val="4472C4">
-                  <a:alpha val="0"/>
-                </a:srgbClr>
-              </a:gs>
-              <a:gs pos="100000">
-                <a:srgbClr val="1F3864">
-                  <a:alpha val="54901"/>
-                </a:srgbClr>
-              </a:gs>
-            </a:gsLst>
-            <a:lin ang="13800146" scaled="0"/>
-          </a:gradFill>
-          <a:ln>
-            <a:noFill/>
-          </a:ln>
-        </p:spPr>
-        <p:txBody>
-          <a:bodyPr spcFirstLastPara="1" wrap="square" lIns="91425" tIns="45700" rIns="91425" bIns="45700" anchor="ctr" anchorCtr="0">
-            <a:noAutofit/>
-          </a:bodyPr>
-          <a:lstStyle/>
-          <a:p>
-            <a:pPr marL="0" marR="0" lvl="0" indent="0" algn="ctr" rtl="0">
-              <a:spcBef>
-                <a:spcPts val="0"/>
-              </a:spcBef>
-              <a:spcAft>
-                <a:spcPts val="0"/>
-              </a:spcAft>
-              <a:buNone/>
-            </a:pPr>
-            <a:endParaRPr sz="1800" b="0" i="0" u="none" strike="noStrike" cap="none">
-              <a:solidFill>
-                <a:schemeClr val="lt1"/>
-              </a:solidFill>
-              <a:latin typeface="Calibri"/>
-              <a:ea typeface="Calibri"/>
-              <a:cs typeface="Calibri"/>
-              <a:sym typeface="Calibri"/>
-            </a:endParaRPr>
-          </a:p>
-        </p:txBody>
-      </p:sp>
-      <p:sp>
-        <p:nvSpPr>
-          <p:cNvPr id="372" name="Google Shape;372;p18"/>
-          <p:cNvSpPr txBox="1">
-            <a:spLocks noGrp="1"/>
-          </p:cNvSpPr>
-          <p:nvPr>
-            <p:ph type="title"/>
-          </p:nvPr>
-        </p:nvSpPr>
-        <p:spPr>
-          <a:xfrm>
-            <a:off x="1371600" y="347472"/>
-            <a:ext cx="7063800" cy="877800"/>
-          </a:xfrm>
-          <a:prstGeom prst="rect">
-            <a:avLst/>
-          </a:prstGeom>
-          <a:noFill/>
-          <a:ln>
-            <a:noFill/>
-          </a:ln>
-        </p:spPr>
-        <p:txBody>
-          <a:bodyPr spcFirstLastPara="1" wrap="square" lIns="91425" tIns="45700" rIns="91425" bIns="45700" anchor="ctr" anchorCtr="0">
-            <a:normAutofit/>
-          </a:bodyPr>
-          <a:lstStyle/>
-          <a:p>
-            <a:pPr marL="0" lvl="0" indent="0" algn="l" rtl="0">
-              <a:lnSpc>
-                <a:spcPct val="90000"/>
-              </a:lnSpc>
-              <a:spcBef>
-                <a:spcPts val="0"/>
-              </a:spcBef>
-              <a:spcAft>
-                <a:spcPts val="0"/>
-              </a:spcAft>
-              <a:buClr>
-                <a:srgbClr val="FFFFFF"/>
-              </a:buClr>
-              <a:buSzPts val="4000"/>
-              <a:buFont typeface="Calibri"/>
-              <a:buNone/>
-            </a:pPr>
-            <a:r>
-              <a:rPr lang="en-US" sz="4000">
-                <a:solidFill>
-                  <a:srgbClr val="FFFFFF"/>
-                </a:solidFill>
-                <a:latin typeface="Calibri"/>
-                <a:ea typeface="Calibri"/>
-                <a:cs typeface="Calibri"/>
-                <a:sym typeface="Calibri"/>
-              </a:rPr>
-              <a:t>Demo – </a:t>
-            </a:r>
-            <a:r>
-              <a:rPr lang="en-US" sz="4000">
-                <a:solidFill>
-                  <a:srgbClr val="FFFFFF"/>
-                </a:solidFill>
-              </a:rPr>
-              <a:t>Loops</a:t>
-            </a:r>
-            <a:endParaRPr/>
-          </a:p>
-        </p:txBody>
-      </p:sp>
-      <p:pic>
-        <p:nvPicPr>
-          <p:cNvPr id="373" name="Google Shape;373;p18" descr="Monitor"/>
-          <p:cNvPicPr preferRelativeResize="0"/>
-          <p:nvPr/>
-        </p:nvPicPr>
-        <p:blipFill rotWithShape="1">
-          <a:blip r:embed="rId3">
-            <a:alphaModFix/>
-          </a:blip>
-          <a:srcRect/>
-          <a:stretch/>
-        </p:blipFill>
-        <p:spPr>
-          <a:xfrm>
-            <a:off x="699713" y="1966293"/>
-            <a:ext cx="4452160" cy="4452160"/>
-          </a:xfrm>
-          <a:prstGeom prst="rect">
-            <a:avLst/>
-          </a:prstGeom>
-          <a:noFill/>
-          <a:ln>
-            <a:noFill/>
-          </a:ln>
-        </p:spPr>
-      </p:pic>
-      <p:sp>
-        <p:nvSpPr>
-          <p:cNvPr id="374" name="Google Shape;374;p18"/>
-          <p:cNvSpPr txBox="1"/>
-          <p:nvPr/>
-        </p:nvSpPr>
-        <p:spPr>
-          <a:xfrm>
-            <a:off x="5920820" y="2112579"/>
-            <a:ext cx="4872919" cy="4305874"/>
-          </a:xfrm>
-          <a:prstGeom prst="rect">
-            <a:avLst/>
-          </a:prstGeom>
-          <a:noFill/>
-          <a:ln>
-            <a:noFill/>
-          </a:ln>
-        </p:spPr>
-        <p:txBody>
-          <a:bodyPr spcFirstLastPara="1" wrap="square" lIns="91425" tIns="45700" rIns="91425" bIns="45700" anchor="t" anchorCtr="0">
-            <a:noAutofit/>
-          </a:bodyPr>
-          <a:lstStyle/>
-          <a:p>
-            <a:pPr marL="0" marR="0" lvl="0" indent="0" algn="l" rtl="0">
-              <a:lnSpc>
-                <a:spcPct val="90000"/>
-              </a:lnSpc>
-              <a:spcBef>
-                <a:spcPts val="0"/>
-              </a:spcBef>
-              <a:spcAft>
-                <a:spcPts val="0"/>
-              </a:spcAft>
-              <a:buClr>
-                <a:schemeClr val="dk1"/>
-              </a:buClr>
-              <a:buSzPts val="2604"/>
-              <a:buFont typeface="Arial"/>
-              <a:buNone/>
-            </a:pPr>
-            <a:r>
-              <a:rPr lang="en-US" sz="2604" dirty="0">
-                <a:solidFill>
-                  <a:schemeClr val="dk1"/>
-                </a:solidFill>
-                <a:latin typeface="Calibri"/>
-                <a:ea typeface="Calibri"/>
-                <a:cs typeface="Calibri"/>
-                <a:sym typeface="Calibri"/>
-              </a:rPr>
-              <a:t>Looping methods</a:t>
-            </a:r>
-            <a:r>
-              <a:rPr lang="en-US" sz="2604" b="0" i="0" u="none" strike="noStrike" cap="none" dirty="0">
-                <a:solidFill>
-                  <a:schemeClr val="dk1"/>
-                </a:solidFill>
-                <a:latin typeface="Calibri"/>
-                <a:ea typeface="Calibri"/>
-                <a:cs typeface="Calibri"/>
-                <a:sym typeface="Calibri"/>
-              </a:rPr>
-              <a:t>:</a:t>
-            </a:r>
-            <a:endParaRPr dirty="0"/>
-          </a:p>
-          <a:p>
-            <a:pPr marL="228600" marR="0" lvl="0" indent="-228600" algn="l" rtl="0">
-              <a:lnSpc>
-                <a:spcPct val="90000"/>
-              </a:lnSpc>
-              <a:spcBef>
-                <a:spcPts val="930"/>
-              </a:spcBef>
-              <a:spcAft>
-                <a:spcPts val="0"/>
-              </a:spcAft>
-              <a:buClr>
-                <a:schemeClr val="dk1"/>
-              </a:buClr>
-              <a:buSzPts val="2604"/>
-              <a:buFont typeface="Arial"/>
-              <a:buChar char="•"/>
-            </a:pPr>
-            <a:r>
-              <a:rPr lang="en-US" sz="2604" dirty="0">
-                <a:solidFill>
-                  <a:schemeClr val="dk1"/>
-                </a:solidFill>
-                <a:latin typeface="Calibri"/>
-                <a:ea typeface="Calibri"/>
-                <a:cs typeface="Calibri"/>
-                <a:sym typeface="Calibri"/>
-              </a:rPr>
-              <a:t>For</a:t>
-            </a:r>
-            <a:endParaRPr sz="2604" dirty="0">
-              <a:solidFill>
-                <a:schemeClr val="dk1"/>
-              </a:solidFill>
-              <a:latin typeface="Calibri"/>
-              <a:ea typeface="Calibri"/>
-              <a:cs typeface="Calibri"/>
-              <a:sym typeface="Calibri"/>
-            </a:endParaRPr>
-          </a:p>
-          <a:p>
-            <a:pPr marL="228600" marR="0" lvl="0" indent="-228600" algn="l" rtl="0">
-              <a:lnSpc>
-                <a:spcPct val="90000"/>
-              </a:lnSpc>
-              <a:spcBef>
-                <a:spcPts val="930"/>
-              </a:spcBef>
-              <a:spcAft>
-                <a:spcPts val="0"/>
-              </a:spcAft>
-              <a:buClr>
-                <a:schemeClr val="dk1"/>
-              </a:buClr>
-              <a:buSzPts val="2604"/>
-              <a:buFont typeface="Calibri"/>
-              <a:buChar char="•"/>
-            </a:pPr>
-            <a:r>
-              <a:rPr lang="en-US" sz="2604" dirty="0">
-                <a:solidFill>
-                  <a:schemeClr val="dk1"/>
-                </a:solidFill>
-                <a:latin typeface="Calibri"/>
-                <a:ea typeface="Calibri"/>
-                <a:cs typeface="Calibri"/>
-                <a:sym typeface="Calibri"/>
-              </a:rPr>
-              <a:t>Foreach (x in y)</a:t>
-            </a:r>
-            <a:endParaRPr sz="2604" dirty="0">
-              <a:solidFill>
-                <a:schemeClr val="dk1"/>
-              </a:solidFill>
-              <a:latin typeface="Calibri"/>
-              <a:ea typeface="Calibri"/>
-              <a:cs typeface="Calibri"/>
-              <a:sym typeface="Calibri"/>
-            </a:endParaRPr>
-          </a:p>
-          <a:p>
-            <a:pPr marL="228600" marR="0" lvl="0" indent="-228600" algn="l" rtl="0">
-              <a:lnSpc>
-                <a:spcPct val="90000"/>
-              </a:lnSpc>
-              <a:spcBef>
-                <a:spcPts val="930"/>
-              </a:spcBef>
-              <a:spcAft>
-                <a:spcPts val="0"/>
-              </a:spcAft>
-              <a:buClr>
-                <a:schemeClr val="dk1"/>
-              </a:buClr>
-              <a:buSzPts val="2604"/>
-              <a:buFont typeface="Calibri"/>
-              <a:buChar char="•"/>
-            </a:pPr>
-            <a:r>
-              <a:rPr lang="en-US" sz="2604" dirty="0">
-                <a:solidFill>
-                  <a:schemeClr val="dk1"/>
-                </a:solidFill>
-                <a:latin typeface="Calibri"/>
-                <a:ea typeface="Calibri"/>
-                <a:cs typeface="Calibri"/>
-                <a:sym typeface="Calibri"/>
-              </a:rPr>
-              <a:t>Foreach-Object</a:t>
-            </a:r>
-            <a:endParaRPr sz="2604" dirty="0">
-              <a:solidFill>
-                <a:schemeClr val="dk1"/>
-              </a:solidFill>
-              <a:latin typeface="Calibri"/>
-              <a:ea typeface="Calibri"/>
-              <a:cs typeface="Calibri"/>
-              <a:sym typeface="Calibri"/>
-            </a:endParaRPr>
-          </a:p>
-          <a:p>
-            <a:pPr marL="228600" marR="0" lvl="0" indent="-228600" algn="l" rtl="0">
-              <a:lnSpc>
-                <a:spcPct val="90000"/>
-              </a:lnSpc>
-              <a:spcBef>
-                <a:spcPts val="930"/>
-              </a:spcBef>
-              <a:spcAft>
-                <a:spcPts val="0"/>
-              </a:spcAft>
-              <a:buClr>
-                <a:schemeClr val="dk1"/>
-              </a:buClr>
-              <a:buSzPts val="2604"/>
-              <a:buFont typeface="Calibri"/>
-              <a:buChar char="•"/>
-            </a:pPr>
-            <a:r>
-              <a:rPr lang="en-US" sz="2604" dirty="0">
-                <a:solidFill>
-                  <a:schemeClr val="dk1"/>
-                </a:solidFill>
-                <a:latin typeface="Calibri"/>
-                <a:ea typeface="Calibri"/>
-                <a:cs typeface="Calibri"/>
-                <a:sym typeface="Calibri"/>
-              </a:rPr>
-              <a:t>Do/While or Do/Until</a:t>
-            </a:r>
-            <a:endParaRPr sz="2604" dirty="0">
-              <a:solidFill>
-                <a:schemeClr val="dk1"/>
-              </a:solidFill>
-              <a:latin typeface="Calibri"/>
-              <a:ea typeface="Calibri"/>
-              <a:cs typeface="Calibri"/>
-              <a:sym typeface="Calibri"/>
-            </a:endParaRPr>
-          </a:p>
-          <a:p>
-            <a:pPr marL="228600" marR="0" lvl="0" indent="-228600" algn="l" rtl="0">
-              <a:lnSpc>
-                <a:spcPct val="90000"/>
-              </a:lnSpc>
-              <a:spcBef>
-                <a:spcPts val="930"/>
-              </a:spcBef>
-              <a:spcAft>
-                <a:spcPts val="0"/>
-              </a:spcAft>
-              <a:buClr>
-                <a:schemeClr val="dk1"/>
-              </a:buClr>
-              <a:buSzPts val="2604"/>
-              <a:buFont typeface="Calibri"/>
-              <a:buChar char="•"/>
-            </a:pPr>
-            <a:r>
-              <a:rPr lang="en-US" sz="2604" dirty="0">
-                <a:solidFill>
-                  <a:schemeClr val="dk1"/>
-                </a:solidFill>
-                <a:latin typeface="Calibri"/>
-                <a:ea typeface="Calibri"/>
-                <a:cs typeface="Calibri"/>
-                <a:sym typeface="Calibri"/>
-              </a:rPr>
-              <a:t>While</a:t>
-            </a:r>
-            <a:endParaRPr sz="2604" dirty="0">
-              <a:solidFill>
-                <a:schemeClr val="dk1"/>
-              </a:solidFill>
-              <a:latin typeface="Calibri"/>
-              <a:ea typeface="Calibri"/>
-              <a:cs typeface="Calibri"/>
-              <a:sym typeface="Calibri"/>
-            </a:endParaRPr>
-          </a:p>
-          <a:p>
-            <a:pPr marL="0" marR="0" lvl="0" indent="0" algn="l" rtl="0">
-              <a:lnSpc>
-                <a:spcPct val="90000"/>
-              </a:lnSpc>
-              <a:spcBef>
-                <a:spcPts val="930"/>
-              </a:spcBef>
-              <a:spcAft>
-                <a:spcPts val="0"/>
-              </a:spcAft>
-              <a:buNone/>
-            </a:pPr>
-            <a:r>
-              <a:rPr lang="en-US" sz="2604" dirty="0">
-                <a:solidFill>
-                  <a:schemeClr val="dk1"/>
-                </a:solidFill>
-                <a:latin typeface="Calibri"/>
-                <a:ea typeface="Calibri"/>
-                <a:cs typeface="Calibri"/>
-                <a:sym typeface="Calibri"/>
-              </a:rPr>
-              <a:t>Loop Control:</a:t>
-            </a:r>
-          </a:p>
-          <a:p>
-            <a:pPr marL="457200" marR="0" lvl="0" indent="-457200" algn="l" rtl="0">
-              <a:lnSpc>
-                <a:spcPct val="90000"/>
-              </a:lnSpc>
-              <a:spcBef>
-                <a:spcPts val="930"/>
-              </a:spcBef>
-              <a:spcAft>
-                <a:spcPts val="0"/>
-              </a:spcAft>
-              <a:buFont typeface="Arial" panose="020B0604020202020204" pitchFamily="34" charset="0"/>
-              <a:buChar char="•"/>
-            </a:pPr>
-            <a:r>
-              <a:rPr lang="en-US" sz="2604" dirty="0">
-                <a:solidFill>
-                  <a:schemeClr val="dk1"/>
-                </a:solidFill>
-                <a:latin typeface="Calibri"/>
-                <a:ea typeface="Calibri"/>
-                <a:cs typeface="Calibri"/>
-                <a:sym typeface="Calibri"/>
-              </a:rPr>
-              <a:t>Break</a:t>
-            </a:r>
-          </a:p>
-          <a:p>
-            <a:pPr marL="457200" marR="0" lvl="0" indent="-457200" algn="l" rtl="0">
-              <a:lnSpc>
-                <a:spcPct val="90000"/>
-              </a:lnSpc>
-              <a:spcBef>
-                <a:spcPts val="930"/>
-              </a:spcBef>
-              <a:spcAft>
-                <a:spcPts val="0"/>
-              </a:spcAft>
-              <a:buFont typeface="Arial" panose="020B0604020202020204" pitchFamily="34" charset="0"/>
-              <a:buChar char="•"/>
-            </a:pPr>
-            <a:r>
-              <a:rPr lang="en-US" sz="2604" dirty="0">
-                <a:solidFill>
-                  <a:schemeClr val="dk1"/>
-                </a:solidFill>
-                <a:latin typeface="Calibri"/>
-                <a:ea typeface="Calibri"/>
-                <a:cs typeface="Calibri"/>
-                <a:sym typeface="Calibri"/>
-              </a:rPr>
-              <a:t>Continue</a:t>
-            </a:r>
-            <a:endParaRPr sz="2604" dirty="0">
-              <a:solidFill>
-                <a:schemeClr val="dk1"/>
-              </a:solidFill>
-              <a:latin typeface="Calibri"/>
-              <a:ea typeface="Calibri"/>
-              <a:cs typeface="Calibri"/>
-              <a:sym typeface="Calibri"/>
-            </a:endParaRPr>
-          </a:p>
-        </p:txBody>
-      </p:sp>
-    </p:spTree>
-  </p:cSld>
-  <p:clrMapOvr>
-    <a:masterClrMapping/>
-  </p:clrMapOvr>
-</p:sld>
-</file>
-
-<file path=ppt/slides/slide23.xml><?xml version="1.0" encoding="utf-8"?>
-<p:sld xmlns:a="http://schemas.openxmlformats.org/drawingml/2006/main" xmlns:r="http://schemas.openxmlformats.org/officeDocument/2006/relationships" xmlns:p="http://schemas.openxmlformats.org/presentationml/2006/main">
-  <p:cSld>
-    <p:bg>
-      <p:bgPr>
-        <a:solidFill>
-          <a:schemeClr val="lt1"/>
-        </a:solidFill>
-        <a:effectLst/>
-      </p:bgPr>
-    </p:bg>
-    <p:spTree>
-      <p:nvGrpSpPr>
-        <p:cNvPr id="1" name="Shape 379"/>
-        <p:cNvGrpSpPr/>
-        <p:nvPr/>
-      </p:nvGrpSpPr>
-      <p:grpSpPr>
-        <a:xfrm>
-          <a:off x="0" y="0"/>
-          <a:ext cx="0" cy="0"/>
-          <a:chOff x="0" y="0"/>
-          <a:chExt cx="0" cy="0"/>
-        </a:xfrm>
-      </p:grpSpPr>
-      <p:sp>
-        <p:nvSpPr>
-          <p:cNvPr id="380" name="Google Shape;380;p19"/>
-          <p:cNvSpPr/>
-          <p:nvPr/>
-        </p:nvSpPr>
-        <p:spPr>
-          <a:xfrm>
-            <a:off x="0" y="0"/>
-            <a:ext cx="12192000" cy="6858000"/>
-          </a:xfrm>
-          <a:prstGeom prst="rect">
-            <a:avLst/>
-          </a:prstGeom>
-          <a:solidFill>
-            <a:schemeClr val="lt1"/>
-          </a:solidFill>
-          <a:ln>
-            <a:noFill/>
-          </a:ln>
-        </p:spPr>
-        <p:txBody>
-          <a:bodyPr spcFirstLastPara="1" wrap="square" lIns="91425" tIns="45700" rIns="91425" bIns="45700" anchor="ctr" anchorCtr="0">
-            <a:noAutofit/>
-          </a:bodyPr>
-          <a:lstStyle/>
-          <a:p>
-            <a:pPr marL="0" marR="0" lvl="0" indent="0" algn="ctr" rtl="0">
-              <a:spcBef>
-                <a:spcPts val="0"/>
-              </a:spcBef>
-              <a:spcAft>
-                <a:spcPts val="0"/>
-              </a:spcAft>
-              <a:buNone/>
-            </a:pPr>
-            <a:endParaRPr sz="1800" b="0" i="0" u="none" strike="noStrike" cap="none">
-              <a:solidFill>
-                <a:schemeClr val="lt1"/>
-              </a:solidFill>
-              <a:latin typeface="Calibri"/>
-              <a:ea typeface="Calibri"/>
-              <a:cs typeface="Calibri"/>
-              <a:sym typeface="Calibri"/>
-            </a:endParaRPr>
-          </a:p>
-        </p:txBody>
-      </p:sp>
-      <p:sp>
-        <p:nvSpPr>
-          <p:cNvPr id="381" name="Google Shape;381;p19"/>
-          <p:cNvSpPr/>
-          <p:nvPr/>
-        </p:nvSpPr>
-        <p:spPr>
-          <a:xfrm flipH="1">
-            <a:off x="-3" y="-1"/>
-            <a:ext cx="12192000" cy="1590600"/>
-          </a:xfrm>
-          <a:prstGeom prst="rect">
-            <a:avLst/>
-          </a:prstGeom>
-          <a:gradFill>
-            <a:gsLst>
-              <a:gs pos="0">
-                <a:srgbClr val="000000"/>
-              </a:gs>
-              <a:gs pos="100000">
-                <a:srgbClr val="2F5496"/>
-              </a:gs>
-            </a:gsLst>
-            <a:lin ang="8400134" scaled="0"/>
-          </a:gradFill>
-          <a:ln>
-            <a:noFill/>
-          </a:ln>
-        </p:spPr>
-        <p:txBody>
-          <a:bodyPr spcFirstLastPara="1" wrap="square" lIns="91425" tIns="45700" rIns="91425" bIns="45700" anchor="ctr" anchorCtr="0">
-            <a:noAutofit/>
-          </a:bodyPr>
-          <a:lstStyle/>
-          <a:p>
-            <a:pPr marL="0" marR="0" lvl="0" indent="0" algn="ctr" rtl="0">
-              <a:spcBef>
-                <a:spcPts val="0"/>
-              </a:spcBef>
-              <a:spcAft>
-                <a:spcPts val="0"/>
-              </a:spcAft>
-              <a:buNone/>
-            </a:pPr>
-            <a:endParaRPr sz="1800" b="0" i="0" u="none" strike="noStrike" cap="none">
-              <a:solidFill>
-                <a:schemeClr val="lt1"/>
-              </a:solidFill>
-              <a:latin typeface="Calibri"/>
-              <a:ea typeface="Calibri"/>
-              <a:cs typeface="Calibri"/>
-              <a:sym typeface="Calibri"/>
-            </a:endParaRPr>
-          </a:p>
-        </p:txBody>
-      </p:sp>
-      <p:sp>
-        <p:nvSpPr>
-          <p:cNvPr id="382" name="Google Shape;382;p19"/>
-          <p:cNvSpPr/>
-          <p:nvPr/>
-        </p:nvSpPr>
-        <p:spPr>
-          <a:xfrm rot="10800000" flipH="1">
-            <a:off x="-3" y="142"/>
-            <a:ext cx="8115300" cy="1590600"/>
-          </a:xfrm>
-          <a:prstGeom prst="rect">
-            <a:avLst/>
-          </a:prstGeom>
-          <a:gradFill>
-            <a:gsLst>
-              <a:gs pos="0">
-                <a:srgbClr val="4472C4">
-                  <a:alpha val="0"/>
-                </a:srgbClr>
-              </a:gs>
-              <a:gs pos="20000">
-                <a:srgbClr val="4472C4">
-                  <a:alpha val="0"/>
-                </a:srgbClr>
-              </a:gs>
-              <a:gs pos="100000">
-                <a:srgbClr val="1F3864">
-                  <a:alpha val="54901"/>
-                </a:srgbClr>
-              </a:gs>
-            </a:gsLst>
-            <a:lin ang="13800146" scaled="0"/>
-          </a:gradFill>
-          <a:ln>
-            <a:noFill/>
-          </a:ln>
-        </p:spPr>
-        <p:txBody>
-          <a:bodyPr spcFirstLastPara="1" wrap="square" lIns="91425" tIns="45700" rIns="91425" bIns="45700" anchor="ctr" anchorCtr="0">
-            <a:noAutofit/>
-          </a:bodyPr>
-          <a:lstStyle/>
-          <a:p>
-            <a:pPr marL="0" marR="0" lvl="0" indent="0" algn="ctr" rtl="0">
-              <a:spcBef>
-                <a:spcPts val="0"/>
-              </a:spcBef>
-              <a:spcAft>
-                <a:spcPts val="0"/>
-              </a:spcAft>
-              <a:buNone/>
-            </a:pPr>
-            <a:endParaRPr sz="1800" b="0" i="0" u="none" strike="noStrike" cap="none">
-              <a:solidFill>
-                <a:schemeClr val="lt1"/>
-              </a:solidFill>
-              <a:latin typeface="Calibri"/>
-              <a:ea typeface="Calibri"/>
-              <a:cs typeface="Calibri"/>
-              <a:sym typeface="Calibri"/>
-            </a:endParaRPr>
-          </a:p>
-        </p:txBody>
-      </p:sp>
-      <p:sp>
-        <p:nvSpPr>
-          <p:cNvPr id="383" name="Google Shape;383;p19"/>
-          <p:cNvSpPr txBox="1">
-            <a:spLocks noGrp="1"/>
-          </p:cNvSpPr>
-          <p:nvPr>
-            <p:ph type="title"/>
-          </p:nvPr>
-        </p:nvSpPr>
-        <p:spPr>
-          <a:xfrm>
-            <a:off x="1371599" y="294538"/>
-            <a:ext cx="9895951" cy="1033669"/>
-          </a:xfrm>
-          <a:prstGeom prst="rect">
-            <a:avLst/>
-          </a:prstGeom>
-          <a:noFill/>
-          <a:ln>
-            <a:noFill/>
-          </a:ln>
-        </p:spPr>
-        <p:txBody>
-          <a:bodyPr spcFirstLastPara="1" wrap="square" lIns="91425" tIns="45700" rIns="91425" bIns="45700" anchor="ctr" anchorCtr="0">
-            <a:normAutofit/>
-          </a:bodyPr>
-          <a:lstStyle/>
-          <a:p>
-            <a:pPr marL="0" lvl="0" indent="0" algn="l" rtl="0">
-              <a:lnSpc>
-                <a:spcPct val="90000"/>
-              </a:lnSpc>
-              <a:spcBef>
-                <a:spcPts val="0"/>
-              </a:spcBef>
-              <a:spcAft>
-                <a:spcPts val="0"/>
-              </a:spcAft>
-              <a:buClr>
-                <a:srgbClr val="FFFFFF"/>
-              </a:buClr>
-              <a:buSzPts val="4000"/>
-              <a:buFont typeface="Calibri"/>
-              <a:buNone/>
-            </a:pPr>
-            <a:r>
-              <a:rPr lang="en-US" sz="4000">
-                <a:solidFill>
-                  <a:srgbClr val="FFFFFF"/>
-                </a:solidFill>
-              </a:rPr>
-              <a:t>Resources</a:t>
-            </a:r>
-            <a:endParaRPr/>
-          </a:p>
-        </p:txBody>
-      </p:sp>
-      <p:sp>
-        <p:nvSpPr>
-          <p:cNvPr id="384" name="Google Shape;384;p19"/>
-          <p:cNvSpPr txBox="1">
-            <a:spLocks noGrp="1"/>
-          </p:cNvSpPr>
-          <p:nvPr>
-            <p:ph type="body" idx="1"/>
-          </p:nvPr>
-        </p:nvSpPr>
-        <p:spPr>
-          <a:xfrm>
-            <a:off x="1371599" y="2318197"/>
-            <a:ext cx="9724031" cy="3683358"/>
-          </a:xfrm>
-          <a:prstGeom prst="rect">
-            <a:avLst/>
-          </a:prstGeom>
-          <a:noFill/>
-          <a:ln>
-            <a:noFill/>
-          </a:ln>
-        </p:spPr>
-        <p:txBody>
-          <a:bodyPr spcFirstLastPara="1" wrap="square" lIns="91425" tIns="45700" rIns="91425" bIns="45700" anchor="ctr" anchorCtr="0">
-            <a:normAutofit/>
-          </a:bodyPr>
-          <a:lstStyle/>
-          <a:p>
-            <a:pPr marL="228600" lvl="0" indent="-228600" algn="l" rtl="0">
-              <a:lnSpc>
-                <a:spcPct val="90000"/>
-              </a:lnSpc>
-              <a:spcBef>
-                <a:spcPts val="1000"/>
-              </a:spcBef>
-              <a:spcAft>
-                <a:spcPts val="0"/>
-              </a:spcAft>
-              <a:buClr>
-                <a:schemeClr val="dk1"/>
-              </a:buClr>
-              <a:buSzPts val="2000"/>
-              <a:buChar char="•"/>
-            </a:pPr>
-            <a:r>
-              <a:rPr lang="en-US" sz="2000" u="sng" dirty="0" err="1">
-                <a:latin typeface="Arial"/>
-                <a:ea typeface="Arial"/>
-                <a:cs typeface="Arial"/>
-                <a:sym typeface="Arial"/>
-              </a:rPr>
-              <a:t>Powershell</a:t>
-            </a:r>
-            <a:r>
-              <a:rPr lang="en-US" sz="2000" u="sng" dirty="0">
-                <a:latin typeface="Arial"/>
-                <a:ea typeface="Arial"/>
-                <a:cs typeface="Arial"/>
-                <a:sym typeface="Arial"/>
-              </a:rPr>
-              <a:t> Gallery</a:t>
-            </a:r>
-            <a:br>
-              <a:rPr lang="en-US" sz="2000" u="sng" dirty="0">
-                <a:latin typeface="Arial"/>
-                <a:ea typeface="Arial"/>
-                <a:cs typeface="Arial"/>
-                <a:sym typeface="Arial"/>
-              </a:rPr>
-            </a:br>
-            <a:r>
-              <a:rPr lang="en-US" sz="2000" u="sng" dirty="0">
-                <a:solidFill>
-                  <a:schemeClr val="hlink"/>
-                </a:solidFill>
-                <a:latin typeface="Arial"/>
-                <a:ea typeface="Arial"/>
-                <a:cs typeface="Arial"/>
-                <a:sym typeface="Arial"/>
-                <a:hlinkClick r:id="rId3"/>
-              </a:rPr>
-              <a:t>https://www.powershellgallery.com/</a:t>
-            </a:r>
-            <a:br>
-              <a:rPr lang="en-US" sz="2000" u="sng" dirty="0">
-                <a:latin typeface="Arial"/>
-                <a:ea typeface="Arial"/>
-                <a:cs typeface="Arial"/>
-                <a:sym typeface="Arial"/>
-              </a:rPr>
-            </a:br>
-            <a:endParaRPr sz="2000" u="sng" dirty="0">
-              <a:latin typeface="Arial"/>
-              <a:ea typeface="Arial"/>
-              <a:cs typeface="Arial"/>
-              <a:sym typeface="Arial"/>
-            </a:endParaRPr>
-          </a:p>
-          <a:p>
-            <a:pPr marL="228600" lvl="0" indent="-228600" algn="l" rtl="0">
-              <a:lnSpc>
-                <a:spcPct val="90000"/>
-              </a:lnSpc>
-              <a:spcBef>
-                <a:spcPts val="1000"/>
-              </a:spcBef>
-              <a:spcAft>
-                <a:spcPts val="0"/>
-              </a:spcAft>
-              <a:buClr>
-                <a:schemeClr val="dk1"/>
-              </a:buClr>
-              <a:buSzPts val="2000"/>
-              <a:buChar char="•"/>
-            </a:pPr>
-            <a:r>
-              <a:rPr lang="en-US" sz="2000" b="0" i="0" u="sng" strike="noStrike" dirty="0">
-                <a:latin typeface="Arial"/>
-                <a:ea typeface="Arial"/>
-                <a:cs typeface="Arial"/>
-                <a:sym typeface="Arial"/>
-              </a:rPr>
-              <a:t>Microsoft </a:t>
-            </a:r>
-            <a:r>
-              <a:rPr lang="en-US" sz="2000" b="0" i="0" u="sng" strike="noStrike" dirty="0" err="1">
-                <a:latin typeface="Arial"/>
-                <a:ea typeface="Arial"/>
-                <a:cs typeface="Arial"/>
-                <a:sym typeface="Arial"/>
-              </a:rPr>
-              <a:t>Powershell</a:t>
-            </a:r>
-            <a:r>
-              <a:rPr lang="en-US" sz="2000" b="0" i="0" u="sng" strike="noStrike" dirty="0">
-                <a:latin typeface="Arial"/>
-                <a:ea typeface="Arial"/>
-                <a:cs typeface="Arial"/>
-                <a:sym typeface="Arial"/>
-              </a:rPr>
-              <a:t> Documentation</a:t>
-            </a:r>
-            <a:br>
-              <a:rPr lang="en-US" sz="2000" b="0" i="0" u="sng" strike="noStrike" dirty="0">
-                <a:latin typeface="Arial"/>
-                <a:ea typeface="Arial"/>
-                <a:cs typeface="Arial"/>
-                <a:sym typeface="Arial"/>
-              </a:rPr>
-            </a:br>
-            <a:r>
-              <a:rPr lang="en-US" sz="2000" b="0" i="0" u="sng" strike="noStrike" dirty="0">
-                <a:solidFill>
-                  <a:schemeClr val="hlink"/>
-                </a:solidFill>
-                <a:latin typeface="Arial"/>
-                <a:ea typeface="Arial"/>
-                <a:cs typeface="Arial"/>
-                <a:sym typeface="Arial"/>
-                <a:hlinkClick r:id="rId4"/>
-              </a:rPr>
-              <a:t>https://learn.microsoft.com/en-us/powershell/scripting/learn/ps101/00-introduction</a:t>
-            </a:r>
-            <a:br>
-              <a:rPr lang="en-US" sz="2000" b="0" i="0" u="sng" strike="noStrike" dirty="0">
-                <a:latin typeface="Arial"/>
-                <a:ea typeface="Arial"/>
-                <a:cs typeface="Arial"/>
-                <a:sym typeface="Arial"/>
-              </a:rPr>
-            </a:br>
-            <a:endParaRPr sz="2000" b="0" i="0" u="sng" strike="noStrike" dirty="0">
-              <a:latin typeface="Arial"/>
-              <a:ea typeface="Arial"/>
-              <a:cs typeface="Arial"/>
-              <a:sym typeface="Arial"/>
-            </a:endParaRPr>
-          </a:p>
-          <a:p>
-            <a:pPr marL="228600" lvl="0" indent="-228600" algn="l" rtl="0">
-              <a:spcBef>
-                <a:spcPts val="0"/>
-              </a:spcBef>
-              <a:spcAft>
-                <a:spcPts val="0"/>
-              </a:spcAft>
-              <a:buSzPts val="2000"/>
-              <a:buChar char="•"/>
-            </a:pPr>
-            <a:r>
-              <a:rPr lang="en-US" sz="2000" dirty="0">
-                <a:latin typeface="Arial"/>
-                <a:ea typeface="Arial"/>
-                <a:cs typeface="Arial"/>
-                <a:sym typeface="Arial"/>
-              </a:rPr>
-              <a:t>dbatools </a:t>
-            </a:r>
-            <a:br>
-              <a:rPr lang="en-US" sz="2000" dirty="0">
-                <a:latin typeface="Arial"/>
-                <a:ea typeface="Arial"/>
-                <a:cs typeface="Arial"/>
-                <a:sym typeface="Arial"/>
-              </a:rPr>
-            </a:br>
-            <a:r>
-              <a:rPr lang="en-US" sz="2000" u="sng" dirty="0">
-                <a:solidFill>
-                  <a:schemeClr val="hlink"/>
-                </a:solidFill>
-                <a:latin typeface="Arial"/>
-                <a:ea typeface="Arial"/>
-                <a:cs typeface="Arial"/>
-                <a:sym typeface="Arial"/>
-                <a:hlinkClick r:id="rId5"/>
-              </a:rPr>
-              <a:t>https://dbatools.io/</a:t>
-            </a:r>
-            <a:endParaRPr sz="2000" dirty="0">
-              <a:latin typeface="Arial"/>
-              <a:ea typeface="Arial"/>
-              <a:cs typeface="Arial"/>
-              <a:sym typeface="Arial"/>
-            </a:endParaRPr>
-          </a:p>
-        </p:txBody>
-      </p:sp>
-    </p:spTree>
-  </p:cSld>
-  <p:clrMapOvr>
-    <a:masterClrMapping/>
-  </p:clrMapOvr>
-</p:sld>
-</file>
-
-<file path=ppt/slides/slide24.xml><?xml version="1.0" encoding="utf-8"?>
-<p:sld xmlns:a="http://schemas.openxmlformats.org/drawingml/2006/main" xmlns:r="http://schemas.openxmlformats.org/officeDocument/2006/relationships" xmlns:p="http://schemas.openxmlformats.org/presentationml/2006/main">
-  <p:cSld>
-    <p:bg>
-      <p:bgPr>
-        <a:solidFill>
-          <a:schemeClr val="lt1"/>
-        </a:solidFill>
-        <a:effectLst/>
-      </p:bgPr>
-    </p:bg>
-    <p:spTree>
-      <p:nvGrpSpPr>
-        <p:cNvPr id="1" name="Shape 379"/>
-        <p:cNvGrpSpPr/>
-        <p:nvPr/>
-      </p:nvGrpSpPr>
-      <p:grpSpPr>
-        <a:xfrm>
-          <a:off x="0" y="0"/>
-          <a:ext cx="0" cy="0"/>
-          <a:chOff x="0" y="0"/>
-          <a:chExt cx="0" cy="0"/>
-        </a:xfrm>
-      </p:grpSpPr>
-      <p:sp>
-        <p:nvSpPr>
-          <p:cNvPr id="380" name="Google Shape;380;p19"/>
-          <p:cNvSpPr/>
-          <p:nvPr/>
-        </p:nvSpPr>
-        <p:spPr>
-          <a:xfrm>
-            <a:off x="0" y="0"/>
-            <a:ext cx="12192000" cy="6858000"/>
-          </a:xfrm>
-          <a:prstGeom prst="rect">
-            <a:avLst/>
-          </a:prstGeom>
-          <a:solidFill>
-            <a:schemeClr val="lt1"/>
-          </a:solidFill>
-          <a:ln>
-            <a:noFill/>
-          </a:ln>
-        </p:spPr>
-        <p:txBody>
-          <a:bodyPr spcFirstLastPara="1" wrap="square" lIns="91425" tIns="45700" rIns="91425" bIns="45700" anchor="ctr" anchorCtr="0">
-            <a:noAutofit/>
-          </a:bodyPr>
-          <a:lstStyle/>
-          <a:p>
-            <a:pPr marL="0" marR="0" lvl="0" indent="0" algn="ctr" rtl="0">
-              <a:spcBef>
-                <a:spcPts val="0"/>
-              </a:spcBef>
-              <a:spcAft>
-                <a:spcPts val="0"/>
-              </a:spcAft>
-              <a:buNone/>
-            </a:pPr>
-            <a:endParaRPr sz="1800" b="0" i="0" u="none" strike="noStrike" cap="none">
-              <a:solidFill>
-                <a:schemeClr val="lt1"/>
-              </a:solidFill>
-              <a:latin typeface="Calibri"/>
-              <a:ea typeface="Calibri"/>
-              <a:cs typeface="Calibri"/>
-              <a:sym typeface="Calibri"/>
-            </a:endParaRPr>
-          </a:p>
-        </p:txBody>
-      </p:sp>
-      <p:sp>
-        <p:nvSpPr>
-          <p:cNvPr id="381" name="Google Shape;381;p19"/>
-          <p:cNvSpPr/>
-          <p:nvPr/>
-        </p:nvSpPr>
-        <p:spPr>
-          <a:xfrm flipH="1">
-            <a:off x="-3" y="-1"/>
-            <a:ext cx="12192000" cy="1590600"/>
-          </a:xfrm>
-          <a:prstGeom prst="rect">
-            <a:avLst/>
-          </a:prstGeom>
-          <a:gradFill>
-            <a:gsLst>
-              <a:gs pos="0">
-                <a:srgbClr val="000000"/>
-              </a:gs>
-              <a:gs pos="100000">
-                <a:srgbClr val="2F5496"/>
-              </a:gs>
-            </a:gsLst>
-            <a:lin ang="8400134" scaled="0"/>
-          </a:gradFill>
-          <a:ln>
-            <a:noFill/>
-          </a:ln>
-        </p:spPr>
-        <p:txBody>
-          <a:bodyPr spcFirstLastPara="1" wrap="square" lIns="91425" tIns="45700" rIns="91425" bIns="45700" anchor="ctr" anchorCtr="0">
-            <a:noAutofit/>
-          </a:bodyPr>
-          <a:lstStyle/>
-          <a:p>
-            <a:pPr marL="0" marR="0" lvl="0" indent="0" algn="ctr" rtl="0">
-              <a:spcBef>
-                <a:spcPts val="0"/>
-              </a:spcBef>
-              <a:spcAft>
-                <a:spcPts val="0"/>
-              </a:spcAft>
-              <a:buNone/>
-            </a:pPr>
-            <a:endParaRPr sz="1800" b="0" i="0" u="none" strike="noStrike" cap="none">
-              <a:solidFill>
-                <a:schemeClr val="lt1"/>
-              </a:solidFill>
-              <a:latin typeface="Calibri"/>
-              <a:ea typeface="Calibri"/>
-              <a:cs typeface="Calibri"/>
-              <a:sym typeface="Calibri"/>
-            </a:endParaRPr>
-          </a:p>
-        </p:txBody>
-      </p:sp>
-      <p:sp>
-        <p:nvSpPr>
-          <p:cNvPr id="382" name="Google Shape;382;p19"/>
-          <p:cNvSpPr/>
-          <p:nvPr/>
-        </p:nvSpPr>
-        <p:spPr>
-          <a:xfrm rot="10800000" flipH="1">
-            <a:off x="-3" y="142"/>
-            <a:ext cx="8115300" cy="1590600"/>
-          </a:xfrm>
-          <a:prstGeom prst="rect">
-            <a:avLst/>
-          </a:prstGeom>
-          <a:gradFill>
-            <a:gsLst>
-              <a:gs pos="0">
-                <a:srgbClr val="4472C4">
-                  <a:alpha val="0"/>
-                </a:srgbClr>
-              </a:gs>
-              <a:gs pos="20000">
-                <a:srgbClr val="4472C4">
-                  <a:alpha val="0"/>
-                </a:srgbClr>
-              </a:gs>
-              <a:gs pos="100000">
-                <a:srgbClr val="1F3864">
-                  <a:alpha val="54901"/>
-                </a:srgbClr>
-              </a:gs>
-            </a:gsLst>
-            <a:lin ang="13800146" scaled="0"/>
-          </a:gradFill>
-          <a:ln>
-            <a:noFill/>
-          </a:ln>
-        </p:spPr>
-        <p:txBody>
-          <a:bodyPr spcFirstLastPara="1" wrap="square" lIns="91425" tIns="45700" rIns="91425" bIns="45700" anchor="ctr" anchorCtr="0">
-            <a:noAutofit/>
-          </a:bodyPr>
-          <a:lstStyle/>
-          <a:p>
-            <a:pPr marL="0" marR="0" lvl="0" indent="0" algn="ctr" rtl="0">
-              <a:spcBef>
-                <a:spcPts val="0"/>
-              </a:spcBef>
-              <a:spcAft>
-                <a:spcPts val="0"/>
-              </a:spcAft>
-              <a:buNone/>
-            </a:pPr>
-            <a:endParaRPr sz="1800" b="0" i="0" u="none" strike="noStrike" cap="none">
-              <a:solidFill>
-                <a:schemeClr val="lt1"/>
-              </a:solidFill>
-              <a:latin typeface="Calibri"/>
-              <a:ea typeface="Calibri"/>
-              <a:cs typeface="Calibri"/>
-              <a:sym typeface="Calibri"/>
-            </a:endParaRPr>
-          </a:p>
-        </p:txBody>
-      </p:sp>
-      <p:sp>
-        <p:nvSpPr>
-          <p:cNvPr id="383" name="Google Shape;383;p19"/>
-          <p:cNvSpPr txBox="1">
-            <a:spLocks noGrp="1"/>
-          </p:cNvSpPr>
-          <p:nvPr>
-            <p:ph type="title"/>
-          </p:nvPr>
-        </p:nvSpPr>
-        <p:spPr>
-          <a:xfrm>
-            <a:off x="1371599" y="294538"/>
-            <a:ext cx="9895951" cy="1033669"/>
-          </a:xfrm>
-          <a:prstGeom prst="rect">
-            <a:avLst/>
-          </a:prstGeom>
-          <a:noFill/>
-          <a:ln>
-            <a:noFill/>
-          </a:ln>
-        </p:spPr>
-        <p:txBody>
-          <a:bodyPr spcFirstLastPara="1" wrap="square" lIns="91425" tIns="45700" rIns="91425" bIns="45700" anchor="ctr" anchorCtr="0">
-            <a:normAutofit/>
-          </a:bodyPr>
-          <a:lstStyle/>
-          <a:p>
-            <a:pPr marL="0" lvl="0" indent="0" algn="l" rtl="0">
-              <a:lnSpc>
-                <a:spcPct val="90000"/>
-              </a:lnSpc>
-              <a:spcBef>
-                <a:spcPts val="0"/>
-              </a:spcBef>
-              <a:spcAft>
-                <a:spcPts val="0"/>
-              </a:spcAft>
-              <a:buClr>
-                <a:srgbClr val="FFFFFF"/>
-              </a:buClr>
-              <a:buSzPts val="4000"/>
-              <a:buFont typeface="Calibri"/>
-              <a:buNone/>
-            </a:pPr>
-            <a:r>
-              <a:rPr lang="en-US" sz="4000" dirty="0">
-                <a:solidFill>
-                  <a:srgbClr val="FFFFFF"/>
-                </a:solidFill>
-              </a:rPr>
-              <a:t>Thank You</a:t>
-            </a:r>
-            <a:endParaRPr dirty="0"/>
-          </a:p>
-        </p:txBody>
-      </p:sp>
-      <p:sp>
-        <p:nvSpPr>
-          <p:cNvPr id="384" name="Google Shape;384;p19"/>
-          <p:cNvSpPr txBox="1">
-            <a:spLocks noGrp="1"/>
-          </p:cNvSpPr>
-          <p:nvPr>
-            <p:ph type="body" idx="1"/>
-          </p:nvPr>
-        </p:nvSpPr>
-        <p:spPr>
-          <a:xfrm>
-            <a:off x="1371599" y="2318197"/>
-            <a:ext cx="9724031" cy="3683358"/>
-          </a:xfrm>
-          <a:prstGeom prst="rect">
-            <a:avLst/>
-          </a:prstGeom>
-          <a:noFill/>
-          <a:ln>
-            <a:noFill/>
-          </a:ln>
-        </p:spPr>
-        <p:txBody>
-          <a:bodyPr spcFirstLastPara="1" wrap="square" lIns="91425" tIns="45700" rIns="91425" bIns="45700" anchor="ctr" anchorCtr="0">
-            <a:normAutofit/>
-          </a:bodyPr>
-          <a:lstStyle/>
-          <a:p>
-            <a:pPr marL="0" lvl="0" indent="0" algn="l" rtl="0">
-              <a:lnSpc>
-                <a:spcPct val="90000"/>
-              </a:lnSpc>
-              <a:spcBef>
-                <a:spcPts val="1000"/>
-              </a:spcBef>
-              <a:spcAft>
-                <a:spcPts val="0"/>
-              </a:spcAft>
-              <a:buClr>
-                <a:schemeClr val="dk1"/>
-              </a:buClr>
-              <a:buSzPts val="2000"/>
-              <a:buNone/>
-            </a:pPr>
-            <a:r>
-              <a:rPr lang="en-US" sz="4000" dirty="0">
-                <a:latin typeface="Arial"/>
-                <a:ea typeface="Arial"/>
-                <a:cs typeface="Arial"/>
-                <a:sym typeface="Arial"/>
-              </a:rPr>
-              <a:t>Questions ?</a:t>
-            </a:r>
-            <a:endParaRPr sz="4000" dirty="0">
-              <a:latin typeface="Arial"/>
-              <a:ea typeface="Arial"/>
-              <a:cs typeface="Arial"/>
-              <a:sym typeface="Arial"/>
-            </a:endParaRPr>
-          </a:p>
-        </p:txBody>
-      </p:sp>
-    </p:spTree>
-    <p:extLst>
-      <p:ext uri="{BB962C8B-B14F-4D97-AF65-F5344CB8AC3E}">
-        <p14:creationId xmlns:p14="http://schemas.microsoft.com/office/powerpoint/2010/main" val="1340594635"/>
-      </p:ext>
-    </p:extLst>
-  </p:cSld>
-  <p:clrMapOvr>
-    <a:masterClrMapping/>
-  </p:clrMapOvr>
-</p:sld>
-</file>
-
-<file path=ppt/slides/slide3.xml><?xml version="1.0" encoding="utf-8"?>
+<file path=ppt/slides/slide4.xml><?xml version="1.0" encoding="utf-8"?>
 <p:sld xmlns:a="http://schemas.openxmlformats.org/drawingml/2006/main" xmlns:r="http://schemas.openxmlformats.org/officeDocument/2006/relationships" xmlns:p="http://schemas.openxmlformats.org/presentationml/2006/main">
   <p:cSld>
     <p:bg>
@@ -24017,7 +24465,7 @@
 </p:sld>
 </file>
 
-<file path=ppt/slides/slide4.xml><?xml version="1.0" encoding="utf-8"?>
+<file path=ppt/slides/slide5.xml><?xml version="1.0" encoding="utf-8"?>
 <p:sld xmlns:a="http://schemas.openxmlformats.org/drawingml/2006/main" xmlns:r="http://schemas.openxmlformats.org/officeDocument/2006/relationships" xmlns:p="http://schemas.openxmlformats.org/presentationml/2006/main">
   <p:cSld>
     <p:bg>
@@ -24642,15 +25090,7 @@
             </a:br>
             <a:r>
               <a:rPr lang="en-US" sz="2600" dirty="0"/>
-              <a:t>Last updated </a:t>
-            </a:r>
-            <a:r>
-              <a:rPr lang="en-US" sz="2600"/>
-              <a:t>(06/17/2025</a:t>
-            </a:r>
-            <a:r>
-              <a:rPr lang="en-US" sz="2600" dirty="0"/>
-              <a:t>)</a:t>
+              <a:t>Last updated (06/17/2025)</a:t>
             </a:r>
             <a:endParaRPr sz="2600" dirty="0"/>
           </a:p>
@@ -24683,7 +25123,7 @@
 </p:sld>
 </file>
 
-<file path=ppt/slides/slide5.xml><?xml version="1.0" encoding="utf-8"?>
+<file path=ppt/slides/slide6.xml><?xml version="1.0" encoding="utf-8"?>
 <p:sld xmlns:a="http://schemas.openxmlformats.org/drawingml/2006/main" xmlns:r="http://schemas.openxmlformats.org/officeDocument/2006/relationships" xmlns:p="http://schemas.openxmlformats.org/presentationml/2006/main">
   <p:cSld>
     <p:bg>
@@ -25051,11 +25491,11 @@
               <a:buNone/>
             </a:pPr>
             <a:r>
-              <a:rPr lang="en-US" sz="2600"/>
+              <a:rPr lang="en-US" sz="2600" dirty="0"/>
               <a:t>Started out as a group of commands for migrating SQL instances in 2016 by </a:t>
             </a:r>
             <a:r>
-              <a:rPr lang="en-US" sz="2600" u="sng">
+              <a:rPr lang="en-US" sz="2600" u="sng" dirty="0">
                 <a:solidFill>
                   <a:schemeClr val="hlink"/>
                 </a:solidFill>
@@ -25064,10 +25504,10 @@
               <a:t>Chrissy LeMaire</a:t>
             </a:r>
             <a:r>
-              <a:rPr lang="en-US" sz="2600"/>
+              <a:rPr lang="en-US" sz="2600" dirty="0"/>
               <a:t>, SQL &amp; PowerShell MVP</a:t>
             </a:r>
-            <a:endParaRPr sz="2600"/>
+            <a:endParaRPr sz="2600" dirty="0"/>
           </a:p>
           <a:p>
             <a:pPr marL="0" lvl="0" indent="0" algn="l" rtl="0">
@@ -25086,7 +25526,7 @@
               <a:buSzPts val="2000"/>
               <a:buNone/>
             </a:pPr>
-            <a:endParaRPr sz="2600"/>
+            <a:endParaRPr sz="2600" dirty="0"/>
           </a:p>
           <a:p>
             <a:pPr marL="0" lvl="0" indent="0" algn="l" rtl="0">
@@ -25106,10 +25546,10 @@
               <a:buNone/>
             </a:pPr>
             <a:r>
-              <a:rPr lang="en-US" sz="2600"/>
-              <a:t>With the help of over 140 contributors, it has grown into a fully fledged module with almost 700 commands that allow DBAs to automate and standardize their work.</a:t>
+              <a:rPr lang="en-US" sz="2600" dirty="0"/>
+              <a:t>With the help of over 140 contributors, it has grown into a fully fledged module with over 700 commands that allow DBAs to automate and standardize their work.</a:t>
             </a:r>
-            <a:endParaRPr sz="2600"/>
+            <a:endParaRPr sz="2600" dirty="0"/>
           </a:p>
           <a:p>
             <a:pPr marL="0" lvl="0" indent="0" algn="l" rtl="0">
@@ -25128,7 +25568,7 @@
               <a:buSzPts val="2000"/>
               <a:buNone/>
             </a:pPr>
-            <a:endParaRPr sz="2600"/>
+            <a:endParaRPr sz="2600" dirty="0"/>
           </a:p>
           <a:p>
             <a:pPr marL="0" lvl="0" indent="0" algn="l" rtl="0">
@@ -25148,10 +25588,10 @@
               <a:buNone/>
             </a:pPr>
             <a:r>
-              <a:rPr lang="en-US" sz="2600"/>
+              <a:rPr lang="en-US" sz="2600" dirty="0"/>
               <a:t>Is it Secure ?</a:t>
             </a:r>
-            <a:endParaRPr sz="2600"/>
+            <a:endParaRPr sz="2600" dirty="0"/>
           </a:p>
           <a:p>
             <a:pPr marL="228600" lvl="0" indent="-266700" algn="l" rtl="0">
@@ -25171,10 +25611,10 @@
               <a:buChar char="•"/>
             </a:pPr>
             <a:r>
-              <a:rPr lang="en-US" sz="2600" b="0"/>
+              <a:rPr lang="en-US" sz="2600" b="0" dirty="0"/>
               <a:t>Open Source with limited permissions to merge to Master. 5 out of 6 are current/former Microsoft MVPs or employees.</a:t>
             </a:r>
-            <a:endParaRPr sz="2600"/>
+            <a:endParaRPr sz="2600" dirty="0"/>
           </a:p>
           <a:p>
             <a:pPr marL="228600" lvl="0" indent="-266700" algn="l" rtl="0">
@@ -25194,10 +25634,10 @@
               <a:buChar char="•"/>
             </a:pPr>
             <a:r>
-              <a:rPr lang="en-US" sz="2600" b="0"/>
+              <a:rPr lang="en-US" sz="2600" b="0" dirty="0"/>
               <a:t>All the code is digitally signed</a:t>
             </a:r>
-            <a:endParaRPr sz="2600"/>
+            <a:endParaRPr sz="2600" dirty="0"/>
           </a:p>
         </p:txBody>
       </p:sp>
@@ -25209,7 +25649,7 @@
 </p:sld>
 </file>
 
-<file path=ppt/slides/slide6.xml><?xml version="1.0" encoding="utf-8"?>
+<file path=ppt/slides/slide7.xml><?xml version="1.0" encoding="utf-8"?>
 <p:sld xmlns:a="http://schemas.openxmlformats.org/drawingml/2006/main" xmlns:r="http://schemas.openxmlformats.org/officeDocument/2006/relationships" xmlns:p="http://schemas.openxmlformats.org/presentationml/2006/main">
   <p:cSld>
     <p:bg>
@@ -26524,7 +26964,7 @@
 </p:sld>
 </file>
 
-<file path=ppt/slides/slide7.xml><?xml version="1.0" encoding="utf-8"?>
+<file path=ppt/slides/slide8.xml><?xml version="1.0" encoding="utf-8"?>
 <p:sld xmlns:a="http://schemas.openxmlformats.org/drawingml/2006/main" xmlns:r="http://schemas.openxmlformats.org/officeDocument/2006/relationships" xmlns:p="http://schemas.openxmlformats.org/presentationml/2006/main">
   <p:cSld>
     <p:bg>
@@ -27163,7 +27603,7 @@
 </p:sld>
 </file>
 
-<file path=ppt/slides/slide8.xml><?xml version="1.0" encoding="utf-8"?>
+<file path=ppt/slides/slide9.xml><?xml version="1.0" encoding="utf-8"?>
 <p:sld xmlns:a="http://schemas.openxmlformats.org/drawingml/2006/main" xmlns:r="http://schemas.openxmlformats.org/officeDocument/2006/relationships" xmlns:p="http://schemas.openxmlformats.org/presentationml/2006/main">
   <p:cSld>
     <p:bg>
@@ -27570,460 +28010,6 @@
               <a:buNone/>
             </a:pPr>
             <a:endParaRPr/>
-          </a:p>
-        </p:txBody>
-      </p:sp>
-    </p:spTree>
-  </p:cSld>
-  <p:clrMapOvr>
-    <a:masterClrMapping/>
-  </p:clrMapOvr>
-</p:sld>
-</file>
-
-<file path=ppt/slides/slide9.xml><?xml version="1.0" encoding="utf-8"?>
-<p:sld xmlns:a="http://schemas.openxmlformats.org/drawingml/2006/main" xmlns:r="http://schemas.openxmlformats.org/officeDocument/2006/relationships" xmlns:p="http://schemas.openxmlformats.org/presentationml/2006/main">
-  <p:cSld>
-    <p:bg>
-      <p:bgPr>
-        <a:solidFill>
-          <a:schemeClr val="lt1"/>
-        </a:solidFill>
-        <a:effectLst/>
-      </p:bgPr>
-    </p:bg>
-    <p:spTree>
-      <p:nvGrpSpPr>
-        <p:cNvPr id="1" name="Shape 237"/>
-        <p:cNvGrpSpPr/>
-        <p:nvPr/>
-      </p:nvGrpSpPr>
-      <p:grpSpPr>
-        <a:xfrm>
-          <a:off x="0" y="0"/>
-          <a:ext cx="0" cy="0"/>
-          <a:chOff x="0" y="0"/>
-          <a:chExt cx="0" cy="0"/>
-        </a:xfrm>
-      </p:grpSpPr>
-      <p:sp>
-        <p:nvSpPr>
-          <p:cNvPr id="238" name="Google Shape;238;p10"/>
-          <p:cNvSpPr/>
-          <p:nvPr/>
-        </p:nvSpPr>
-        <p:spPr>
-          <a:xfrm flipH="1">
-            <a:off x="-3" y="-1"/>
-            <a:ext cx="12192000" cy="1590600"/>
-          </a:xfrm>
-          <a:prstGeom prst="rect">
-            <a:avLst/>
-          </a:prstGeom>
-          <a:gradFill>
-            <a:gsLst>
-              <a:gs pos="0">
-                <a:srgbClr val="000000"/>
-              </a:gs>
-              <a:gs pos="100000">
-                <a:srgbClr val="2F5496"/>
-              </a:gs>
-            </a:gsLst>
-            <a:lin ang="8400134" scaled="0"/>
-          </a:gradFill>
-          <a:ln>
-            <a:noFill/>
-          </a:ln>
-        </p:spPr>
-        <p:txBody>
-          <a:bodyPr spcFirstLastPara="1" wrap="square" lIns="91425" tIns="45700" rIns="91425" bIns="45700" anchor="ctr" anchorCtr="0">
-            <a:noAutofit/>
-          </a:bodyPr>
-          <a:lstStyle/>
-          <a:p>
-            <a:pPr marL="0" marR="0" lvl="0" indent="0" algn="ctr" rtl="0">
-              <a:spcBef>
-                <a:spcPts val="0"/>
-              </a:spcBef>
-              <a:spcAft>
-                <a:spcPts val="0"/>
-              </a:spcAft>
-              <a:buNone/>
-            </a:pPr>
-            <a:endParaRPr sz="1800" b="0" i="0" u="none" strike="noStrike" cap="none">
-              <a:solidFill>
-                <a:schemeClr val="lt1"/>
-              </a:solidFill>
-              <a:latin typeface="Calibri"/>
-              <a:ea typeface="Calibri"/>
-              <a:cs typeface="Calibri"/>
-              <a:sym typeface="Calibri"/>
-            </a:endParaRPr>
-          </a:p>
-        </p:txBody>
-      </p:sp>
-      <p:sp>
-        <p:nvSpPr>
-          <p:cNvPr id="239" name="Google Shape;239;p10"/>
-          <p:cNvSpPr/>
-          <p:nvPr/>
-        </p:nvSpPr>
-        <p:spPr>
-          <a:xfrm rot="10800000" flipH="1">
-            <a:off x="-3" y="142"/>
-            <a:ext cx="8115300" cy="1590600"/>
-          </a:xfrm>
-          <a:prstGeom prst="rect">
-            <a:avLst/>
-          </a:prstGeom>
-          <a:gradFill>
-            <a:gsLst>
-              <a:gs pos="0">
-                <a:srgbClr val="4472C4">
-                  <a:alpha val="0"/>
-                </a:srgbClr>
-              </a:gs>
-              <a:gs pos="20000">
-                <a:srgbClr val="4472C4">
-                  <a:alpha val="0"/>
-                </a:srgbClr>
-              </a:gs>
-              <a:gs pos="100000">
-                <a:srgbClr val="1F3864">
-                  <a:alpha val="54901"/>
-                </a:srgbClr>
-              </a:gs>
-            </a:gsLst>
-            <a:lin ang="13800146" scaled="0"/>
-          </a:gradFill>
-          <a:ln>
-            <a:noFill/>
-          </a:ln>
-        </p:spPr>
-        <p:txBody>
-          <a:bodyPr spcFirstLastPara="1" wrap="square" lIns="91425" tIns="45700" rIns="91425" bIns="45700" anchor="ctr" anchorCtr="0">
-            <a:noAutofit/>
-          </a:bodyPr>
-          <a:lstStyle/>
-          <a:p>
-            <a:pPr marL="0" marR="0" lvl="0" indent="0" algn="ctr" rtl="0">
-              <a:spcBef>
-                <a:spcPts val="0"/>
-              </a:spcBef>
-              <a:spcAft>
-                <a:spcPts val="0"/>
-              </a:spcAft>
-              <a:buNone/>
-            </a:pPr>
-            <a:endParaRPr sz="1800" b="0" i="0" u="none" strike="noStrike" cap="none">
-              <a:solidFill>
-                <a:schemeClr val="lt1"/>
-              </a:solidFill>
-              <a:latin typeface="Calibri"/>
-              <a:ea typeface="Calibri"/>
-              <a:cs typeface="Calibri"/>
-              <a:sym typeface="Calibri"/>
-            </a:endParaRPr>
-          </a:p>
-        </p:txBody>
-      </p:sp>
-      <p:sp>
-        <p:nvSpPr>
-          <p:cNvPr id="240" name="Google Shape;240;p10"/>
-          <p:cNvSpPr txBox="1">
-            <a:spLocks noGrp="1"/>
-          </p:cNvSpPr>
-          <p:nvPr>
-            <p:ph type="title"/>
-          </p:nvPr>
-        </p:nvSpPr>
-        <p:spPr>
-          <a:xfrm>
-            <a:off x="1371597" y="348865"/>
-            <a:ext cx="10044000" cy="877800"/>
-          </a:xfrm>
-          <a:prstGeom prst="rect">
-            <a:avLst/>
-          </a:prstGeom>
-          <a:noFill/>
-          <a:ln>
-            <a:noFill/>
-          </a:ln>
-        </p:spPr>
-        <p:txBody>
-          <a:bodyPr spcFirstLastPara="1" wrap="square" lIns="91425" tIns="45700" rIns="91425" bIns="45700" anchor="ctr" anchorCtr="0">
-            <a:normAutofit/>
-          </a:bodyPr>
-          <a:lstStyle/>
-          <a:p>
-            <a:pPr marL="0" lvl="0" indent="0" algn="l" rtl="0">
-              <a:lnSpc>
-                <a:spcPct val="90000"/>
-              </a:lnSpc>
-              <a:spcBef>
-                <a:spcPts val="0"/>
-              </a:spcBef>
-              <a:spcAft>
-                <a:spcPts val="0"/>
-              </a:spcAft>
-              <a:buClr>
-                <a:srgbClr val="FFFFFF"/>
-              </a:buClr>
-              <a:buSzPts val="4000"/>
-              <a:buFont typeface="Calibri"/>
-              <a:buNone/>
-            </a:pPr>
-            <a:r>
-              <a:rPr lang="en-US" sz="4000">
-                <a:solidFill>
-                  <a:srgbClr val="FFFFFF"/>
-                </a:solidFill>
-                <a:latin typeface="Calibri"/>
-                <a:ea typeface="Calibri"/>
-                <a:cs typeface="Calibri"/>
-                <a:sym typeface="Calibri"/>
-              </a:rPr>
-              <a:t>Variables</a:t>
-            </a:r>
-            <a:endParaRPr/>
-          </a:p>
-        </p:txBody>
-      </p:sp>
-      <p:sp>
-        <p:nvSpPr>
-          <p:cNvPr id="241" name="Google Shape;241;p10"/>
-          <p:cNvSpPr txBox="1">
-            <a:spLocks noGrp="1"/>
-          </p:cNvSpPr>
-          <p:nvPr>
-            <p:ph type="body" idx="2"/>
-          </p:nvPr>
-        </p:nvSpPr>
-        <p:spPr>
-          <a:xfrm>
-            <a:off x="1166297" y="2112579"/>
-            <a:ext cx="4872919" cy="4089712"/>
-          </a:xfrm>
-          <a:prstGeom prst="rect">
-            <a:avLst/>
-          </a:prstGeom>
-          <a:noFill/>
-          <a:ln>
-            <a:noFill/>
-          </a:ln>
-        </p:spPr>
-        <p:txBody>
-          <a:bodyPr spcFirstLastPara="1" wrap="square" lIns="91425" tIns="45700" rIns="91425" bIns="45700" anchor="t" anchorCtr="0">
-            <a:normAutofit/>
-          </a:bodyPr>
-          <a:lstStyle/>
-          <a:p>
-            <a:pPr marL="212598" lvl="0" indent="-212343" algn="l" rtl="0">
-              <a:lnSpc>
-                <a:spcPct val="90000"/>
-              </a:lnSpc>
-              <a:spcBef>
-                <a:spcPts val="0"/>
-              </a:spcBef>
-              <a:spcAft>
-                <a:spcPts val="0"/>
-              </a:spcAft>
-              <a:buClr>
-                <a:schemeClr val="dk1"/>
-              </a:buClr>
-              <a:buSzPts val="2600"/>
-              <a:buChar char="•"/>
-            </a:pPr>
-            <a:r>
-              <a:rPr lang="en-US" sz="2600" dirty="0">
-                <a:solidFill>
-                  <a:schemeClr val="dk1"/>
-                </a:solidFill>
-                <a:latin typeface="Calibri"/>
-                <a:ea typeface="Calibri"/>
-                <a:cs typeface="Calibri"/>
-                <a:sym typeface="Calibri"/>
-              </a:rPr>
-              <a:t>Names start with a $</a:t>
-            </a:r>
-            <a:endParaRPr sz="2600" dirty="0"/>
-          </a:p>
-          <a:p>
-            <a:pPr marL="212598" lvl="0" indent="-212343" algn="l" rtl="0">
-              <a:lnSpc>
-                <a:spcPct val="90000"/>
-              </a:lnSpc>
-              <a:spcBef>
-                <a:spcPts val="930"/>
-              </a:spcBef>
-              <a:spcAft>
-                <a:spcPts val="0"/>
-              </a:spcAft>
-              <a:buClr>
-                <a:schemeClr val="dk1"/>
-              </a:buClr>
-              <a:buSzPts val="2600"/>
-              <a:buChar char="•"/>
-            </a:pPr>
-            <a:r>
-              <a:rPr lang="en-US" sz="2600" dirty="0">
-                <a:solidFill>
-                  <a:schemeClr val="dk1"/>
-                </a:solidFill>
-                <a:latin typeface="Calibri"/>
-                <a:ea typeface="Calibri"/>
-                <a:cs typeface="Calibri"/>
-                <a:sym typeface="Calibri"/>
-              </a:rPr>
-              <a:t>Names are not case sensitive</a:t>
-            </a:r>
-            <a:endParaRPr sz="2600" dirty="0"/>
-          </a:p>
-          <a:p>
-            <a:pPr marL="212598" lvl="0" indent="-212343" algn="l" rtl="0">
-              <a:lnSpc>
-                <a:spcPct val="90000"/>
-              </a:lnSpc>
-              <a:spcBef>
-                <a:spcPts val="930"/>
-              </a:spcBef>
-              <a:spcAft>
-                <a:spcPts val="0"/>
-              </a:spcAft>
-              <a:buClr>
-                <a:schemeClr val="dk1"/>
-              </a:buClr>
-              <a:buSzPts val="2600"/>
-              <a:buChar char="•"/>
-            </a:pPr>
-            <a:r>
-              <a:rPr lang="en-US" sz="2600" dirty="0">
-                <a:solidFill>
-                  <a:schemeClr val="dk1"/>
-                </a:solidFill>
-                <a:latin typeface="Calibri"/>
-                <a:ea typeface="Calibri"/>
-                <a:cs typeface="Calibri"/>
-                <a:sym typeface="Calibri"/>
-              </a:rPr>
-              <a:t>Can contain numbers and letters</a:t>
-            </a:r>
-            <a:endParaRPr sz="2600" dirty="0"/>
-          </a:p>
-          <a:p>
-            <a:pPr marL="212598" lvl="0" indent="-212343" algn="l" rtl="0">
-              <a:lnSpc>
-                <a:spcPct val="90000"/>
-              </a:lnSpc>
-              <a:spcBef>
-                <a:spcPts val="930"/>
-              </a:spcBef>
-              <a:spcAft>
-                <a:spcPts val="0"/>
-              </a:spcAft>
-              <a:buClr>
-                <a:schemeClr val="dk1"/>
-              </a:buClr>
-              <a:buSzPts val="2600"/>
-              <a:buChar char="•"/>
-            </a:pPr>
-            <a:r>
-              <a:rPr lang="en-US" sz="2600" dirty="0"/>
-              <a:t>Variables have multiple scopes:</a:t>
-            </a:r>
-            <a:endParaRPr sz="2600" dirty="0"/>
-          </a:p>
-          <a:p>
-            <a:pPr marL="669798" lvl="1" indent="-225298" algn="l" rtl="0">
-              <a:lnSpc>
-                <a:spcPct val="90000"/>
-              </a:lnSpc>
-              <a:spcBef>
-                <a:spcPts val="930"/>
-              </a:spcBef>
-              <a:spcAft>
-                <a:spcPts val="0"/>
-              </a:spcAft>
-              <a:buClr>
-                <a:schemeClr val="dk1"/>
-              </a:buClr>
-              <a:buSzPts val="2600"/>
-              <a:buChar char="•"/>
-            </a:pPr>
-            <a:r>
-              <a:rPr lang="en-US" sz="2600" dirty="0"/>
-              <a:t>Global</a:t>
-            </a:r>
-            <a:endParaRPr sz="2600" dirty="0"/>
-          </a:p>
-          <a:p>
-            <a:pPr marL="669798" lvl="1" indent="-225298" algn="l" rtl="0">
-              <a:lnSpc>
-                <a:spcPct val="90000"/>
-              </a:lnSpc>
-              <a:spcBef>
-                <a:spcPts val="930"/>
-              </a:spcBef>
-              <a:spcAft>
-                <a:spcPts val="0"/>
-              </a:spcAft>
-              <a:buClr>
-                <a:schemeClr val="dk1"/>
-              </a:buClr>
-              <a:buSzPts val="2600"/>
-              <a:buChar char="•"/>
-            </a:pPr>
-            <a:r>
-              <a:rPr lang="en-US" sz="2600" dirty="0"/>
-              <a:t>Local</a:t>
-            </a:r>
-            <a:endParaRPr sz="2600" dirty="0"/>
-          </a:p>
-          <a:p>
-            <a:pPr marL="669798" lvl="1" indent="-225298" algn="l" rtl="0">
-              <a:lnSpc>
-                <a:spcPct val="90000"/>
-              </a:lnSpc>
-              <a:spcBef>
-                <a:spcPts val="930"/>
-              </a:spcBef>
-              <a:spcAft>
-                <a:spcPts val="0"/>
-              </a:spcAft>
-              <a:buClr>
-                <a:schemeClr val="dk1"/>
-              </a:buClr>
-              <a:buSzPts val="2600"/>
-              <a:buChar char="•"/>
-            </a:pPr>
-            <a:r>
-              <a:rPr lang="en-US" sz="2600" dirty="0"/>
-              <a:t>Script</a:t>
-            </a:r>
-            <a:endParaRPr sz="2600" dirty="0"/>
-          </a:p>
-          <a:p>
-            <a:pPr marL="669798" lvl="1" indent="-225298" algn="l" rtl="0">
-              <a:lnSpc>
-                <a:spcPct val="90000"/>
-              </a:lnSpc>
-              <a:spcBef>
-                <a:spcPts val="930"/>
-              </a:spcBef>
-              <a:spcAft>
-                <a:spcPts val="0"/>
-              </a:spcAft>
-              <a:buClr>
-                <a:schemeClr val="dk1"/>
-              </a:buClr>
-              <a:buSzPts val="2600"/>
-              <a:buChar char="•"/>
-            </a:pPr>
-            <a:r>
-              <a:rPr lang="en-US" sz="2600" dirty="0"/>
-              <a:t>Private (not really a scope)</a:t>
-            </a:r>
-            <a:endParaRPr sz="2600" dirty="0"/>
           </a:p>
         </p:txBody>
       </p:sp>
